--- a/slides/AIT736_Final_Project_AnHuynh.pptx
+++ b/slides/AIT736_Final_Project_AnHuynh.pptx
@@ -5,7 +5,7 @@
     <p:sldMasterId id="2147483648" r:id="rId4"/>
   </p:sldMasterIdLst>
   <p:notesMasterIdLst>
-    <p:notesMasterId r:id="rId17"/>
+    <p:notesMasterId r:id="rId24"/>
   </p:notesMasterIdLst>
   <p:sldIdLst>
     <p:sldId id="256" r:id="rId5"/>
@@ -13,13 +13,20 @@
     <p:sldId id="261" r:id="rId7"/>
     <p:sldId id="257" r:id="rId8"/>
     <p:sldId id="262" r:id="rId9"/>
-    <p:sldId id="263" r:id="rId10"/>
-    <p:sldId id="264" r:id="rId11"/>
-    <p:sldId id="266" r:id="rId12"/>
-    <p:sldId id="267" r:id="rId13"/>
-    <p:sldId id="258" r:id="rId14"/>
-    <p:sldId id="259" r:id="rId15"/>
-    <p:sldId id="260" r:id="rId16"/>
+    <p:sldId id="272" r:id="rId10"/>
+    <p:sldId id="270" r:id="rId11"/>
+    <p:sldId id="273" r:id="rId12"/>
+    <p:sldId id="274" r:id="rId13"/>
+    <p:sldId id="271" r:id="rId14"/>
+    <p:sldId id="275" r:id="rId15"/>
+    <p:sldId id="276" r:id="rId16"/>
+    <p:sldId id="277" r:id="rId17"/>
+    <p:sldId id="278" r:id="rId18"/>
+    <p:sldId id="279" r:id="rId19"/>
+    <p:sldId id="280" r:id="rId20"/>
+    <p:sldId id="258" r:id="rId21"/>
+    <p:sldId id="259" r:id="rId22"/>
+    <p:sldId id="260" r:id="rId23"/>
   </p:sldIdLst>
   <p:sldSz cx="12192000" cy="6858000"/>
   <p:notesSz cx="6858000" cy="9144000"/>
@@ -257,7 +264,7 @@
       <p15:sldGuideLst xmlns:p15="http://schemas.microsoft.com/office/powerpoint/2012/main"/>
     </p:ext>
     <p:ext uri="http://customooxmlschemas.google.com/">
-      <go:slidesCustomData xmlns:go="http://customooxmlschemas.google.com/" xmlns:p15="http://schemas.microsoft.com/office/powerpoint/2012/main" xmlns:p14="http://schemas.microsoft.com/office/powerpoint/2010/main" xmlns:com="http://schemas.openxmlformats.org/drawingml/2006/compatibility" xmlns:pvml="urn:schemas-microsoft-com:office:powerpoint" xmlns:v="urn:schemas-microsoft-com:vml" xmlns:o="urn:schemas-microsoft-com:office:office" xmlns:dgm="http://schemas.openxmlformats.org/drawingml/2006/diagram" xmlns:c="http://schemas.openxmlformats.org/drawingml/2006/chart" xmlns:mv="urn:schemas-microsoft-com:mac:vml" xmlns:mc="http://schemas.openxmlformats.org/markup-compatibility/2006" xmlns="" r:id="rId18" roundtripDataSignature="AMtx7mjoA08xUQFmVkTcOpqRfxDqbGkKow=="/>
+      <go:slidesCustomData xmlns="" xmlns:mc="http://schemas.openxmlformats.org/markup-compatibility/2006" xmlns:mv="urn:schemas-microsoft-com:mac:vml" xmlns:c="http://schemas.openxmlformats.org/drawingml/2006/chart" xmlns:dgm="http://schemas.openxmlformats.org/drawingml/2006/diagram" xmlns:o="urn:schemas-microsoft-com:office:office" xmlns:v="urn:schemas-microsoft-com:vml" xmlns:pvml="urn:schemas-microsoft-com:office:powerpoint" xmlns:com="http://schemas.openxmlformats.org/drawingml/2006/compatibility" xmlns:p14="http://schemas.microsoft.com/office/powerpoint/2010/main" xmlns:p15="http://schemas.microsoft.com/office/powerpoint/2012/main" xmlns:go="http://customooxmlschemas.google.com/" r:id="rId25" roundtripDataSignature="AMtx7mjoA08xUQFmVkTcOpqRfxDqbGkKow=="/>
     </p:ext>
   </p:extLst>
 </p:presentation>
@@ -320,54 +327,6 @@
         </pc:sldMkLst>
         <pc:spChg chg="mod">
           <ac:chgData name="Shanahan, Jon" userId="2ec754d5-76a3-4390-93c8-428635879826" providerId="ADAL" clId="{888F7783-4083-44DC-8A02-E4F62F4C3ED0}" dt="2022-10-05T14:13:14.299" v="15" actId="27636"/>
-          <ac:spMkLst>
-            <pc:docMk/>
-            <pc:sldMk cId="3325777614" sldId="268"/>
-            <ac:spMk id="61" creationId="{00000000-0000-0000-0000-000000000000}"/>
-          </ac:spMkLst>
-        </pc:spChg>
-      </pc:sldChg>
-    </pc:docChg>
-  </pc:docChgLst>
-  <pc:docChgLst>
-    <pc:chgData name="Shanahan, Jon" userId="2ec754d5-76a3-4390-93c8-428635879826" providerId="ADAL" clId="{6C0DE4B0-26B5-49C3-888B-25713DC6B07F}"/>
-    <pc:docChg chg="modSld">
-      <pc:chgData name="Shanahan, Jon" userId="2ec754d5-76a3-4390-93c8-428635879826" providerId="ADAL" clId="{6C0DE4B0-26B5-49C3-888B-25713DC6B07F}" dt="2022-07-19T19:38:24.070" v="31" actId="20577"/>
-      <pc:docMkLst>
-        <pc:docMk/>
-      </pc:docMkLst>
-      <pc:sldChg chg="modSp mod">
-        <pc:chgData name="Shanahan, Jon" userId="2ec754d5-76a3-4390-93c8-428635879826" providerId="ADAL" clId="{6C0DE4B0-26B5-49C3-888B-25713DC6B07F}" dt="2022-07-19T19:38:24.070" v="31" actId="20577"/>
-        <pc:sldMkLst>
-          <pc:docMk/>
-          <pc:sldMk cId="3325777614" sldId="268"/>
-        </pc:sldMkLst>
-        <pc:spChg chg="mod">
-          <ac:chgData name="Shanahan, Jon" userId="2ec754d5-76a3-4390-93c8-428635879826" providerId="ADAL" clId="{6C0DE4B0-26B5-49C3-888B-25713DC6B07F}" dt="2022-07-19T19:38:24.070" v="31" actId="20577"/>
-          <ac:spMkLst>
-            <pc:docMk/>
-            <pc:sldMk cId="3325777614" sldId="268"/>
-            <ac:spMk id="60" creationId="{00000000-0000-0000-0000-000000000000}"/>
-          </ac:spMkLst>
-        </pc:spChg>
-      </pc:sldChg>
-    </pc:docChg>
-  </pc:docChgLst>
-  <pc:docChgLst>
-    <pc:chgData name="Shanahan, Jon" userId="2ec754d5-76a3-4390-93c8-428635879826" providerId="ADAL" clId="{9CCA1F82-7223-4FEE-A4C8-3D9DD14BA371}"/>
-    <pc:docChg chg="undo custSel modSld">
-      <pc:chgData name="Shanahan, Jon" userId="2ec754d5-76a3-4390-93c8-428635879826" providerId="ADAL" clId="{9CCA1F82-7223-4FEE-A4C8-3D9DD14BA371}" dt="2022-05-20T13:22:20.727" v="88" actId="14100"/>
-      <pc:docMkLst>
-        <pc:docMk/>
-      </pc:docMkLst>
-      <pc:sldChg chg="modSp mod">
-        <pc:chgData name="Shanahan, Jon" userId="2ec754d5-76a3-4390-93c8-428635879826" providerId="ADAL" clId="{9CCA1F82-7223-4FEE-A4C8-3D9DD14BA371}" dt="2022-05-20T13:22:20.727" v="88" actId="14100"/>
-        <pc:sldMkLst>
-          <pc:docMk/>
-          <pc:sldMk cId="3325777614" sldId="268"/>
-        </pc:sldMkLst>
-        <pc:spChg chg="mod">
-          <ac:chgData name="Shanahan, Jon" userId="2ec754d5-76a3-4390-93c8-428635879826" providerId="ADAL" clId="{9CCA1F82-7223-4FEE-A4C8-3D9DD14BA371}" dt="2022-05-20T13:22:20.727" v="88" actId="14100"/>
           <ac:spMkLst>
             <pc:docMk/>
             <pc:sldMk cId="3325777614" sldId="268"/>
@@ -576,6 +535,54 @@
           </pc:spChg>
         </pc:sldLayoutChg>
       </pc:sldMasterChg>
+    </pc:docChg>
+  </pc:docChgLst>
+  <pc:docChgLst>
+    <pc:chgData name="Shanahan, Jon" userId="2ec754d5-76a3-4390-93c8-428635879826" providerId="ADAL" clId="{9CCA1F82-7223-4FEE-A4C8-3D9DD14BA371}"/>
+    <pc:docChg chg="undo custSel modSld">
+      <pc:chgData name="Shanahan, Jon" userId="2ec754d5-76a3-4390-93c8-428635879826" providerId="ADAL" clId="{9CCA1F82-7223-4FEE-A4C8-3D9DD14BA371}" dt="2022-05-20T13:22:20.727" v="88" actId="14100"/>
+      <pc:docMkLst>
+        <pc:docMk/>
+      </pc:docMkLst>
+      <pc:sldChg chg="modSp mod">
+        <pc:chgData name="Shanahan, Jon" userId="2ec754d5-76a3-4390-93c8-428635879826" providerId="ADAL" clId="{9CCA1F82-7223-4FEE-A4C8-3D9DD14BA371}" dt="2022-05-20T13:22:20.727" v="88" actId="14100"/>
+        <pc:sldMkLst>
+          <pc:docMk/>
+          <pc:sldMk cId="3325777614" sldId="268"/>
+        </pc:sldMkLst>
+        <pc:spChg chg="mod">
+          <ac:chgData name="Shanahan, Jon" userId="2ec754d5-76a3-4390-93c8-428635879826" providerId="ADAL" clId="{9CCA1F82-7223-4FEE-A4C8-3D9DD14BA371}" dt="2022-05-20T13:22:20.727" v="88" actId="14100"/>
+          <ac:spMkLst>
+            <pc:docMk/>
+            <pc:sldMk cId="3325777614" sldId="268"/>
+            <ac:spMk id="61" creationId="{00000000-0000-0000-0000-000000000000}"/>
+          </ac:spMkLst>
+        </pc:spChg>
+      </pc:sldChg>
+    </pc:docChg>
+  </pc:docChgLst>
+  <pc:docChgLst>
+    <pc:chgData name="Shanahan, Jon" userId="2ec754d5-76a3-4390-93c8-428635879826" providerId="ADAL" clId="{6C0DE4B0-26B5-49C3-888B-25713DC6B07F}"/>
+    <pc:docChg chg="modSld">
+      <pc:chgData name="Shanahan, Jon" userId="2ec754d5-76a3-4390-93c8-428635879826" providerId="ADAL" clId="{6C0DE4B0-26B5-49C3-888B-25713DC6B07F}" dt="2022-07-19T19:38:24.070" v="31" actId="20577"/>
+      <pc:docMkLst>
+        <pc:docMk/>
+      </pc:docMkLst>
+      <pc:sldChg chg="modSp mod">
+        <pc:chgData name="Shanahan, Jon" userId="2ec754d5-76a3-4390-93c8-428635879826" providerId="ADAL" clId="{6C0DE4B0-26B5-49C3-888B-25713DC6B07F}" dt="2022-07-19T19:38:24.070" v="31" actId="20577"/>
+        <pc:sldMkLst>
+          <pc:docMk/>
+          <pc:sldMk cId="3325777614" sldId="268"/>
+        </pc:sldMkLst>
+        <pc:spChg chg="mod">
+          <ac:chgData name="Shanahan, Jon" userId="2ec754d5-76a3-4390-93c8-428635879826" providerId="ADAL" clId="{6C0DE4B0-26B5-49C3-888B-25713DC6B07F}" dt="2022-07-19T19:38:24.070" v="31" actId="20577"/>
+          <ac:spMkLst>
+            <pc:docMk/>
+            <pc:sldMk cId="3325777614" sldId="268"/>
+            <ac:spMk id="60" creationId="{00000000-0000-0000-0000-000000000000}"/>
+          </ac:spMkLst>
+        </pc:spChg>
+      </pc:sldChg>
     </pc:docChg>
   </pc:docChgLst>
   <pc:docChgLst>
@@ -2148,6 +2155,1567 @@
   <p:cSld>
     <p:spTree>
       <p:nvGrpSpPr>
+        <p:cNvPr id="1" name="Shape 92">
+          <a:extLst>
+            <a:ext uri="{FF2B5EF4-FFF2-40B4-BE49-F238E27FC236}">
+              <a16:creationId xmlns:a16="http://schemas.microsoft.com/office/drawing/2014/main" id="{4C5E5E10-C8CF-A99D-5E5D-1A5E62ACD9FF}"/>
+            </a:ext>
+          </a:extLst>
+        </p:cNvPr>
+        <p:cNvGrpSpPr/>
+        <p:nvPr/>
+      </p:nvGrpSpPr>
+      <p:grpSpPr>
+        <a:xfrm>
+          <a:off x="0" y="0"/>
+          <a:ext cx="0" cy="0"/>
+          <a:chOff x="0" y="0"/>
+          <a:chExt cx="0" cy="0"/>
+        </a:xfrm>
+      </p:grpSpPr>
+      <p:sp>
+        <p:nvSpPr>
+          <p:cNvPr id="93" name="Google Shape;93;p7:notes">
+            <a:extLst>
+              <a:ext uri="{FF2B5EF4-FFF2-40B4-BE49-F238E27FC236}">
+                <a16:creationId xmlns:a16="http://schemas.microsoft.com/office/drawing/2014/main" id="{390C7DEB-7601-5C6F-BEE0-96F3F408F2E9}"/>
+              </a:ext>
+            </a:extLst>
+          </p:cNvPr>
+          <p:cNvSpPr txBox="1">
+            <a:spLocks noGrp="1"/>
+          </p:cNvSpPr>
+          <p:nvPr>
+            <p:ph type="body" idx="1"/>
+          </p:nvPr>
+        </p:nvSpPr>
+        <p:spPr>
+          <a:xfrm>
+            <a:off x="685800" y="4400550"/>
+            <a:ext cx="5486400" cy="3600450"/>
+          </a:xfrm>
+          <a:prstGeom prst="rect">
+            <a:avLst/>
+          </a:prstGeom>
+        </p:spPr>
+        <p:txBody>
+          <a:bodyPr spcFirstLastPara="1" wrap="square" lIns="91425" tIns="45700" rIns="91425" bIns="45700" anchor="t" anchorCtr="0">
+            <a:noAutofit/>
+          </a:bodyPr>
+          <a:lstStyle/>
+          <a:p>
+            <a:pPr marL="0" marR="0" lvl="0" indent="0" algn="l" defTabSz="914400" rtl="0" eaLnBrk="1" fontAlgn="auto" latinLnBrk="0" hangingPunct="1">
+              <a:lnSpc>
+                <a:spcPct val="100000"/>
+              </a:lnSpc>
+              <a:spcBef>
+                <a:spcPts val="0"/>
+              </a:spcBef>
+              <a:spcAft>
+                <a:spcPts val="0"/>
+              </a:spcAft>
+              <a:buClr>
+                <a:srgbClr val="000000"/>
+              </a:buClr>
+              <a:buSzPts val="1400"/>
+              <a:buFont typeface="Arial"/>
+              <a:buNone/>
+              <a:tabLst/>
+              <a:defRPr/>
+            </a:pPr>
+            <a:r>
+              <a:rPr lang="en-US" dirty="0"/>
+              <a:t>This is another slide that you may want to use frequently. This slide </a:t>
+            </a:r>
+            <a:r>
+              <a:rPr lang="en-US" baseline="0" dirty="0"/>
+              <a:t>is set up for a title and text. Do not change the fonts/colors in any way. The only adjustment you should need to make is the size of the text if your presentation has a long title. </a:t>
+            </a:r>
+          </a:p>
+          <a:p>
+            <a:pPr marL="228600" lvl="0" indent="-228600" algn="l" rtl="0">
+              <a:spcBef>
+                <a:spcPts val="0"/>
+              </a:spcBef>
+              <a:spcAft>
+                <a:spcPts val="0"/>
+              </a:spcAft>
+              <a:buAutoNum type="arabicPeriod"/>
+            </a:pPr>
+            <a:r>
+              <a:rPr lang="en-US" baseline="0" dirty="0"/>
+              <a:t>Add the Title.  </a:t>
+            </a:r>
+          </a:p>
+          <a:p>
+            <a:pPr marL="228600" lvl="0" indent="-228600" algn="l" rtl="0">
+              <a:spcBef>
+                <a:spcPts val="0"/>
+              </a:spcBef>
+              <a:spcAft>
+                <a:spcPts val="0"/>
+              </a:spcAft>
+              <a:buAutoNum type="arabicPeriod"/>
+            </a:pPr>
+            <a:r>
+              <a:rPr lang="en-US" baseline="0" dirty="0"/>
+              <a:t>Add your content to the Text box. If you copy/paste information into this slide, make sure to Clear Formatting to ensure that the formatting for accessibility remains. You can find the Clear Formatting button on the Home Tab, within the Font section.  It looks like a Capital Letter A with an eraser.  The text will increase or decrease as you type to ensure that the proper sizing is used.</a:t>
+            </a:r>
+          </a:p>
+          <a:p>
+            <a:pPr marL="228600" marR="0" lvl="0" indent="-228600" algn="l" defTabSz="914400" rtl="0" eaLnBrk="1" fontAlgn="auto" latinLnBrk="0" hangingPunct="1">
+              <a:lnSpc>
+                <a:spcPct val="100000"/>
+              </a:lnSpc>
+              <a:spcBef>
+                <a:spcPts val="0"/>
+              </a:spcBef>
+              <a:spcAft>
+                <a:spcPts val="0"/>
+              </a:spcAft>
+              <a:buClr>
+                <a:srgbClr val="000000"/>
+              </a:buClr>
+              <a:buSzPts val="1400"/>
+              <a:buFont typeface="Arial"/>
+              <a:buAutoNum type="arabicPeriod"/>
+              <a:tabLst/>
+              <a:defRPr/>
+            </a:pPr>
+            <a:r>
+              <a:rPr lang="en-US" baseline="0" dirty="0"/>
+              <a:t>Delete this text in the Notes section when you are finished.</a:t>
+            </a:r>
+          </a:p>
+          <a:p>
+            <a:pPr marL="0" lvl="0" indent="0" algn="l" rtl="0">
+              <a:spcBef>
+                <a:spcPts val="0"/>
+              </a:spcBef>
+              <a:spcAft>
+                <a:spcPts val="0"/>
+              </a:spcAft>
+              <a:buNone/>
+            </a:pPr>
+            <a:endParaRPr lang="en-US" baseline="0" dirty="0"/>
+          </a:p>
+          <a:p>
+            <a:pPr marL="0" lvl="0" indent="0" algn="l" rtl="0">
+              <a:spcBef>
+                <a:spcPts val="0"/>
+              </a:spcBef>
+              <a:spcAft>
+                <a:spcPts val="0"/>
+              </a:spcAft>
+              <a:buNone/>
+            </a:pPr>
+            <a:endParaRPr lang="en-US" dirty="0"/>
+          </a:p>
+        </p:txBody>
+      </p:sp>
+      <p:sp>
+        <p:nvSpPr>
+          <p:cNvPr id="94" name="Google Shape;94;p7:notes">
+            <a:extLst>
+              <a:ext uri="{FF2B5EF4-FFF2-40B4-BE49-F238E27FC236}">
+                <a16:creationId xmlns:a16="http://schemas.microsoft.com/office/drawing/2014/main" id="{4853AB09-D486-0D6F-E2BC-1CE21941E92A}"/>
+              </a:ext>
+            </a:extLst>
+          </p:cNvPr>
+          <p:cNvSpPr>
+            <a:spLocks noGrp="1" noRot="1" noChangeAspect="1"/>
+          </p:cNvSpPr>
+          <p:nvPr>
+            <p:ph type="sldImg" idx="2"/>
+          </p:nvPr>
+        </p:nvSpPr>
+        <p:spPr>
+          <a:xfrm>
+            <a:off x="685800" y="1143000"/>
+            <a:ext cx="5486400" cy="3086100"/>
+          </a:xfrm>
+          <a:custGeom>
+            <a:avLst/>
+            <a:gdLst/>
+            <a:ahLst/>
+            <a:cxnLst/>
+            <a:rect l="l" t="t" r="r" b="b"/>
+            <a:pathLst>
+              <a:path w="120000" h="120000" extrusionOk="0">
+                <a:moveTo>
+                  <a:pt x="0" y="0"/>
+                </a:moveTo>
+                <a:lnTo>
+                  <a:pt x="120000" y="0"/>
+                </a:lnTo>
+                <a:lnTo>
+                  <a:pt x="120000" y="120000"/>
+                </a:lnTo>
+                <a:lnTo>
+                  <a:pt x="0" y="120000"/>
+                </a:lnTo>
+                <a:close/>
+              </a:path>
+            </a:pathLst>
+          </a:custGeom>
+        </p:spPr>
+      </p:sp>
+    </p:spTree>
+    <p:extLst>
+      <p:ext uri="{BB962C8B-B14F-4D97-AF65-F5344CB8AC3E}">
+        <p14:creationId xmlns:p14="http://schemas.microsoft.com/office/powerpoint/2010/main" val="3772727320"/>
+      </p:ext>
+    </p:extLst>
+  </p:cSld>
+  <p:clrMapOvr>
+    <a:masterClrMapping/>
+  </p:clrMapOvr>
+</p:notes>
+</file>
+
+<file path=ppt/notesSlides/notesSlide11.xml><?xml version="1.0" encoding="utf-8"?>
+<p:notes xmlns:a="http://schemas.openxmlformats.org/drawingml/2006/main" xmlns:r="http://schemas.openxmlformats.org/officeDocument/2006/relationships" xmlns:p="http://schemas.openxmlformats.org/presentationml/2006/main" showMasterSp="0" showMasterPhAnim="0">
+  <p:cSld>
+    <p:spTree>
+      <p:nvGrpSpPr>
+        <p:cNvPr id="1" name="Shape 92">
+          <a:extLst>
+            <a:ext uri="{FF2B5EF4-FFF2-40B4-BE49-F238E27FC236}">
+              <a16:creationId xmlns:a16="http://schemas.microsoft.com/office/drawing/2014/main" id="{79DC43EA-7EB0-0226-F2FF-6F968FB1A67E}"/>
+            </a:ext>
+          </a:extLst>
+        </p:cNvPr>
+        <p:cNvGrpSpPr/>
+        <p:nvPr/>
+      </p:nvGrpSpPr>
+      <p:grpSpPr>
+        <a:xfrm>
+          <a:off x="0" y="0"/>
+          <a:ext cx="0" cy="0"/>
+          <a:chOff x="0" y="0"/>
+          <a:chExt cx="0" cy="0"/>
+        </a:xfrm>
+      </p:grpSpPr>
+      <p:sp>
+        <p:nvSpPr>
+          <p:cNvPr id="93" name="Google Shape;93;p7:notes">
+            <a:extLst>
+              <a:ext uri="{FF2B5EF4-FFF2-40B4-BE49-F238E27FC236}">
+                <a16:creationId xmlns:a16="http://schemas.microsoft.com/office/drawing/2014/main" id="{E067F006-E7C7-1A89-3350-57E65621CDC9}"/>
+              </a:ext>
+            </a:extLst>
+          </p:cNvPr>
+          <p:cNvSpPr txBox="1">
+            <a:spLocks noGrp="1"/>
+          </p:cNvSpPr>
+          <p:nvPr>
+            <p:ph type="body" idx="1"/>
+          </p:nvPr>
+        </p:nvSpPr>
+        <p:spPr>
+          <a:xfrm>
+            <a:off x="685800" y="4400550"/>
+            <a:ext cx="5486400" cy="3600450"/>
+          </a:xfrm>
+          <a:prstGeom prst="rect">
+            <a:avLst/>
+          </a:prstGeom>
+        </p:spPr>
+        <p:txBody>
+          <a:bodyPr spcFirstLastPara="1" wrap="square" lIns="91425" tIns="45700" rIns="91425" bIns="45700" anchor="t" anchorCtr="0">
+            <a:noAutofit/>
+          </a:bodyPr>
+          <a:lstStyle/>
+          <a:p>
+            <a:pPr marL="0" marR="0" lvl="0" indent="0" algn="l" defTabSz="914400" rtl="0" eaLnBrk="1" fontAlgn="auto" latinLnBrk="0" hangingPunct="1">
+              <a:lnSpc>
+                <a:spcPct val="100000"/>
+              </a:lnSpc>
+              <a:spcBef>
+                <a:spcPts val="0"/>
+              </a:spcBef>
+              <a:spcAft>
+                <a:spcPts val="0"/>
+              </a:spcAft>
+              <a:buClr>
+                <a:srgbClr val="000000"/>
+              </a:buClr>
+              <a:buSzPts val="1400"/>
+              <a:buFont typeface="Arial"/>
+              <a:buNone/>
+              <a:tabLst/>
+              <a:defRPr/>
+            </a:pPr>
+            <a:r>
+              <a:rPr lang="en-US" dirty="0"/>
+              <a:t>This is another slide that you may want to use frequently. This slide </a:t>
+            </a:r>
+            <a:r>
+              <a:rPr lang="en-US" baseline="0" dirty="0"/>
+              <a:t>is set up for a title and text. Do not change the fonts/colors in any way. The only adjustment you should need to make is the size of the text if your presentation has a long title. </a:t>
+            </a:r>
+          </a:p>
+          <a:p>
+            <a:pPr marL="228600" lvl="0" indent="-228600" algn="l" rtl="0">
+              <a:spcBef>
+                <a:spcPts val="0"/>
+              </a:spcBef>
+              <a:spcAft>
+                <a:spcPts val="0"/>
+              </a:spcAft>
+              <a:buAutoNum type="arabicPeriod"/>
+            </a:pPr>
+            <a:r>
+              <a:rPr lang="en-US" baseline="0" dirty="0"/>
+              <a:t>Add the Title.  </a:t>
+            </a:r>
+          </a:p>
+          <a:p>
+            <a:pPr marL="228600" lvl="0" indent="-228600" algn="l" rtl="0">
+              <a:spcBef>
+                <a:spcPts val="0"/>
+              </a:spcBef>
+              <a:spcAft>
+                <a:spcPts val="0"/>
+              </a:spcAft>
+              <a:buAutoNum type="arabicPeriod"/>
+            </a:pPr>
+            <a:r>
+              <a:rPr lang="en-US" baseline="0" dirty="0"/>
+              <a:t>Add your content to the Text box. If you copy/paste information into this slide, make sure to Clear Formatting to ensure that the formatting for accessibility remains. You can find the Clear Formatting button on the Home Tab, within the Font section.  It looks like a Capital Letter A with an eraser.  The text will increase or decrease as you type to ensure that the proper sizing is used.</a:t>
+            </a:r>
+          </a:p>
+          <a:p>
+            <a:pPr marL="228600" marR="0" lvl="0" indent="-228600" algn="l" defTabSz="914400" rtl="0" eaLnBrk="1" fontAlgn="auto" latinLnBrk="0" hangingPunct="1">
+              <a:lnSpc>
+                <a:spcPct val="100000"/>
+              </a:lnSpc>
+              <a:spcBef>
+                <a:spcPts val="0"/>
+              </a:spcBef>
+              <a:spcAft>
+                <a:spcPts val="0"/>
+              </a:spcAft>
+              <a:buClr>
+                <a:srgbClr val="000000"/>
+              </a:buClr>
+              <a:buSzPts val="1400"/>
+              <a:buFont typeface="Arial"/>
+              <a:buAutoNum type="arabicPeriod"/>
+              <a:tabLst/>
+              <a:defRPr/>
+            </a:pPr>
+            <a:r>
+              <a:rPr lang="en-US" baseline="0" dirty="0"/>
+              <a:t>Delete this text in the Notes section when you are finished.</a:t>
+            </a:r>
+          </a:p>
+          <a:p>
+            <a:pPr marL="0" lvl="0" indent="0" algn="l" rtl="0">
+              <a:spcBef>
+                <a:spcPts val="0"/>
+              </a:spcBef>
+              <a:spcAft>
+                <a:spcPts val="0"/>
+              </a:spcAft>
+              <a:buNone/>
+            </a:pPr>
+            <a:endParaRPr lang="en-US" baseline="0" dirty="0"/>
+          </a:p>
+          <a:p>
+            <a:pPr marL="0" lvl="0" indent="0" algn="l" rtl="0">
+              <a:spcBef>
+                <a:spcPts val="0"/>
+              </a:spcBef>
+              <a:spcAft>
+                <a:spcPts val="0"/>
+              </a:spcAft>
+              <a:buNone/>
+            </a:pPr>
+            <a:endParaRPr lang="en-US" dirty="0"/>
+          </a:p>
+        </p:txBody>
+      </p:sp>
+      <p:sp>
+        <p:nvSpPr>
+          <p:cNvPr id="94" name="Google Shape;94;p7:notes">
+            <a:extLst>
+              <a:ext uri="{FF2B5EF4-FFF2-40B4-BE49-F238E27FC236}">
+                <a16:creationId xmlns:a16="http://schemas.microsoft.com/office/drawing/2014/main" id="{5D2C6C0B-E07B-D3EA-5F97-4EB3C33C4246}"/>
+              </a:ext>
+            </a:extLst>
+          </p:cNvPr>
+          <p:cNvSpPr>
+            <a:spLocks noGrp="1" noRot="1" noChangeAspect="1"/>
+          </p:cNvSpPr>
+          <p:nvPr>
+            <p:ph type="sldImg" idx="2"/>
+          </p:nvPr>
+        </p:nvSpPr>
+        <p:spPr>
+          <a:xfrm>
+            <a:off x="685800" y="1143000"/>
+            <a:ext cx="5486400" cy="3086100"/>
+          </a:xfrm>
+          <a:custGeom>
+            <a:avLst/>
+            <a:gdLst/>
+            <a:ahLst/>
+            <a:cxnLst/>
+            <a:rect l="l" t="t" r="r" b="b"/>
+            <a:pathLst>
+              <a:path w="120000" h="120000" extrusionOk="0">
+                <a:moveTo>
+                  <a:pt x="0" y="0"/>
+                </a:moveTo>
+                <a:lnTo>
+                  <a:pt x="120000" y="0"/>
+                </a:lnTo>
+                <a:lnTo>
+                  <a:pt x="120000" y="120000"/>
+                </a:lnTo>
+                <a:lnTo>
+                  <a:pt x="0" y="120000"/>
+                </a:lnTo>
+                <a:close/>
+              </a:path>
+            </a:pathLst>
+          </a:custGeom>
+        </p:spPr>
+      </p:sp>
+    </p:spTree>
+    <p:extLst>
+      <p:ext uri="{BB962C8B-B14F-4D97-AF65-F5344CB8AC3E}">
+        <p14:creationId xmlns:p14="http://schemas.microsoft.com/office/powerpoint/2010/main" val="911413140"/>
+      </p:ext>
+    </p:extLst>
+  </p:cSld>
+  <p:clrMapOvr>
+    <a:masterClrMapping/>
+  </p:clrMapOvr>
+</p:notes>
+</file>
+
+<file path=ppt/notesSlides/notesSlide12.xml><?xml version="1.0" encoding="utf-8"?>
+<p:notes xmlns:a="http://schemas.openxmlformats.org/drawingml/2006/main" xmlns:r="http://schemas.openxmlformats.org/officeDocument/2006/relationships" xmlns:p="http://schemas.openxmlformats.org/presentationml/2006/main" showMasterSp="0" showMasterPhAnim="0">
+  <p:cSld>
+    <p:spTree>
+      <p:nvGrpSpPr>
+        <p:cNvPr id="1" name="Shape 92">
+          <a:extLst>
+            <a:ext uri="{FF2B5EF4-FFF2-40B4-BE49-F238E27FC236}">
+              <a16:creationId xmlns:a16="http://schemas.microsoft.com/office/drawing/2014/main" id="{7605D422-7022-41DD-9483-97E07F581E94}"/>
+            </a:ext>
+          </a:extLst>
+        </p:cNvPr>
+        <p:cNvGrpSpPr/>
+        <p:nvPr/>
+      </p:nvGrpSpPr>
+      <p:grpSpPr>
+        <a:xfrm>
+          <a:off x="0" y="0"/>
+          <a:ext cx="0" cy="0"/>
+          <a:chOff x="0" y="0"/>
+          <a:chExt cx="0" cy="0"/>
+        </a:xfrm>
+      </p:grpSpPr>
+      <p:sp>
+        <p:nvSpPr>
+          <p:cNvPr id="93" name="Google Shape;93;p7:notes">
+            <a:extLst>
+              <a:ext uri="{FF2B5EF4-FFF2-40B4-BE49-F238E27FC236}">
+                <a16:creationId xmlns:a16="http://schemas.microsoft.com/office/drawing/2014/main" id="{B9230C17-56D8-1F5E-54D7-1A2EF1788F24}"/>
+              </a:ext>
+            </a:extLst>
+          </p:cNvPr>
+          <p:cNvSpPr txBox="1">
+            <a:spLocks noGrp="1"/>
+          </p:cNvSpPr>
+          <p:nvPr>
+            <p:ph type="body" idx="1"/>
+          </p:nvPr>
+        </p:nvSpPr>
+        <p:spPr>
+          <a:xfrm>
+            <a:off x="685800" y="4400550"/>
+            <a:ext cx="5486400" cy="3600450"/>
+          </a:xfrm>
+          <a:prstGeom prst="rect">
+            <a:avLst/>
+          </a:prstGeom>
+        </p:spPr>
+        <p:txBody>
+          <a:bodyPr spcFirstLastPara="1" wrap="square" lIns="91425" tIns="45700" rIns="91425" bIns="45700" anchor="t" anchorCtr="0">
+            <a:noAutofit/>
+          </a:bodyPr>
+          <a:lstStyle/>
+          <a:p>
+            <a:pPr marL="0" marR="0" lvl="0" indent="0" algn="l" defTabSz="914400" rtl="0" eaLnBrk="1" fontAlgn="auto" latinLnBrk="0" hangingPunct="1">
+              <a:lnSpc>
+                <a:spcPct val="100000"/>
+              </a:lnSpc>
+              <a:spcBef>
+                <a:spcPts val="0"/>
+              </a:spcBef>
+              <a:spcAft>
+                <a:spcPts val="0"/>
+              </a:spcAft>
+              <a:buClr>
+                <a:srgbClr val="000000"/>
+              </a:buClr>
+              <a:buSzPts val="1400"/>
+              <a:buFont typeface="Arial"/>
+              <a:buNone/>
+              <a:tabLst/>
+              <a:defRPr/>
+            </a:pPr>
+            <a:r>
+              <a:rPr lang="en-US" dirty="0"/>
+              <a:t>This is another slide that you may want to use frequently. This slide </a:t>
+            </a:r>
+            <a:r>
+              <a:rPr lang="en-US" baseline="0" dirty="0"/>
+              <a:t>is set up for a title and text. Do not change the fonts/colors in any way. The only adjustment you should need to make is the size of the text if your presentation has a long title. </a:t>
+            </a:r>
+          </a:p>
+          <a:p>
+            <a:pPr marL="228600" lvl="0" indent="-228600" algn="l" rtl="0">
+              <a:spcBef>
+                <a:spcPts val="0"/>
+              </a:spcBef>
+              <a:spcAft>
+                <a:spcPts val="0"/>
+              </a:spcAft>
+              <a:buAutoNum type="arabicPeriod"/>
+            </a:pPr>
+            <a:r>
+              <a:rPr lang="en-US" baseline="0" dirty="0"/>
+              <a:t>Add the Title.  </a:t>
+            </a:r>
+          </a:p>
+          <a:p>
+            <a:pPr marL="228600" lvl="0" indent="-228600" algn="l" rtl="0">
+              <a:spcBef>
+                <a:spcPts val="0"/>
+              </a:spcBef>
+              <a:spcAft>
+                <a:spcPts val="0"/>
+              </a:spcAft>
+              <a:buAutoNum type="arabicPeriod"/>
+            </a:pPr>
+            <a:r>
+              <a:rPr lang="en-US" baseline="0" dirty="0"/>
+              <a:t>Add your content to the Text box. If you copy/paste information into this slide, make sure to Clear Formatting to ensure that the formatting for accessibility remains. You can find the Clear Formatting button on the Home Tab, within the Font section.  It looks like a Capital Letter A with an eraser.  The text will increase or decrease as you type to ensure that the proper sizing is used.</a:t>
+            </a:r>
+          </a:p>
+          <a:p>
+            <a:pPr marL="228600" marR="0" lvl="0" indent="-228600" algn="l" defTabSz="914400" rtl="0" eaLnBrk="1" fontAlgn="auto" latinLnBrk="0" hangingPunct="1">
+              <a:lnSpc>
+                <a:spcPct val="100000"/>
+              </a:lnSpc>
+              <a:spcBef>
+                <a:spcPts val="0"/>
+              </a:spcBef>
+              <a:spcAft>
+                <a:spcPts val="0"/>
+              </a:spcAft>
+              <a:buClr>
+                <a:srgbClr val="000000"/>
+              </a:buClr>
+              <a:buSzPts val="1400"/>
+              <a:buFont typeface="Arial"/>
+              <a:buAutoNum type="arabicPeriod"/>
+              <a:tabLst/>
+              <a:defRPr/>
+            </a:pPr>
+            <a:r>
+              <a:rPr lang="en-US" baseline="0" dirty="0"/>
+              <a:t>Delete this text in the Notes section when you are finished.</a:t>
+            </a:r>
+          </a:p>
+          <a:p>
+            <a:pPr marL="0" lvl="0" indent="0" algn="l" rtl="0">
+              <a:spcBef>
+                <a:spcPts val="0"/>
+              </a:spcBef>
+              <a:spcAft>
+                <a:spcPts val="0"/>
+              </a:spcAft>
+              <a:buNone/>
+            </a:pPr>
+            <a:endParaRPr lang="en-US" baseline="0" dirty="0"/>
+          </a:p>
+          <a:p>
+            <a:pPr marL="0" lvl="0" indent="0" algn="l" rtl="0">
+              <a:spcBef>
+                <a:spcPts val="0"/>
+              </a:spcBef>
+              <a:spcAft>
+                <a:spcPts val="0"/>
+              </a:spcAft>
+              <a:buNone/>
+            </a:pPr>
+            <a:endParaRPr lang="en-US" dirty="0"/>
+          </a:p>
+        </p:txBody>
+      </p:sp>
+      <p:sp>
+        <p:nvSpPr>
+          <p:cNvPr id="94" name="Google Shape;94;p7:notes">
+            <a:extLst>
+              <a:ext uri="{FF2B5EF4-FFF2-40B4-BE49-F238E27FC236}">
+                <a16:creationId xmlns:a16="http://schemas.microsoft.com/office/drawing/2014/main" id="{DF01F52D-8337-4420-AAA9-99443D813D7A}"/>
+              </a:ext>
+            </a:extLst>
+          </p:cNvPr>
+          <p:cNvSpPr>
+            <a:spLocks noGrp="1" noRot="1" noChangeAspect="1"/>
+          </p:cNvSpPr>
+          <p:nvPr>
+            <p:ph type="sldImg" idx="2"/>
+          </p:nvPr>
+        </p:nvSpPr>
+        <p:spPr>
+          <a:xfrm>
+            <a:off x="685800" y="1143000"/>
+            <a:ext cx="5486400" cy="3086100"/>
+          </a:xfrm>
+          <a:custGeom>
+            <a:avLst/>
+            <a:gdLst/>
+            <a:ahLst/>
+            <a:cxnLst/>
+            <a:rect l="l" t="t" r="r" b="b"/>
+            <a:pathLst>
+              <a:path w="120000" h="120000" extrusionOk="0">
+                <a:moveTo>
+                  <a:pt x="0" y="0"/>
+                </a:moveTo>
+                <a:lnTo>
+                  <a:pt x="120000" y="0"/>
+                </a:lnTo>
+                <a:lnTo>
+                  <a:pt x="120000" y="120000"/>
+                </a:lnTo>
+                <a:lnTo>
+                  <a:pt x="0" y="120000"/>
+                </a:lnTo>
+                <a:close/>
+              </a:path>
+            </a:pathLst>
+          </a:custGeom>
+        </p:spPr>
+      </p:sp>
+    </p:spTree>
+    <p:extLst>
+      <p:ext uri="{BB962C8B-B14F-4D97-AF65-F5344CB8AC3E}">
+        <p14:creationId xmlns:p14="http://schemas.microsoft.com/office/powerpoint/2010/main" val="3514416357"/>
+      </p:ext>
+    </p:extLst>
+  </p:cSld>
+  <p:clrMapOvr>
+    <a:masterClrMapping/>
+  </p:clrMapOvr>
+</p:notes>
+</file>
+
+<file path=ppt/notesSlides/notesSlide13.xml><?xml version="1.0" encoding="utf-8"?>
+<p:notes xmlns:a="http://schemas.openxmlformats.org/drawingml/2006/main" xmlns:r="http://schemas.openxmlformats.org/officeDocument/2006/relationships" xmlns:p="http://schemas.openxmlformats.org/presentationml/2006/main" showMasterSp="0" showMasterPhAnim="0">
+  <p:cSld>
+    <p:spTree>
+      <p:nvGrpSpPr>
+        <p:cNvPr id="1" name="Shape 92">
+          <a:extLst>
+            <a:ext uri="{FF2B5EF4-FFF2-40B4-BE49-F238E27FC236}">
+              <a16:creationId xmlns:a16="http://schemas.microsoft.com/office/drawing/2014/main" id="{765C2926-77EF-3A5E-1A01-66CC94718D57}"/>
+            </a:ext>
+          </a:extLst>
+        </p:cNvPr>
+        <p:cNvGrpSpPr/>
+        <p:nvPr/>
+      </p:nvGrpSpPr>
+      <p:grpSpPr>
+        <a:xfrm>
+          <a:off x="0" y="0"/>
+          <a:ext cx="0" cy="0"/>
+          <a:chOff x="0" y="0"/>
+          <a:chExt cx="0" cy="0"/>
+        </a:xfrm>
+      </p:grpSpPr>
+      <p:sp>
+        <p:nvSpPr>
+          <p:cNvPr id="93" name="Google Shape;93;p7:notes">
+            <a:extLst>
+              <a:ext uri="{FF2B5EF4-FFF2-40B4-BE49-F238E27FC236}">
+                <a16:creationId xmlns:a16="http://schemas.microsoft.com/office/drawing/2014/main" id="{855858CF-5293-302F-CD33-1E18C0A9D0CF}"/>
+              </a:ext>
+            </a:extLst>
+          </p:cNvPr>
+          <p:cNvSpPr txBox="1">
+            <a:spLocks noGrp="1"/>
+          </p:cNvSpPr>
+          <p:nvPr>
+            <p:ph type="body" idx="1"/>
+          </p:nvPr>
+        </p:nvSpPr>
+        <p:spPr>
+          <a:xfrm>
+            <a:off x="685800" y="4400550"/>
+            <a:ext cx="5486400" cy="3600450"/>
+          </a:xfrm>
+          <a:prstGeom prst="rect">
+            <a:avLst/>
+          </a:prstGeom>
+        </p:spPr>
+        <p:txBody>
+          <a:bodyPr spcFirstLastPara="1" wrap="square" lIns="91425" tIns="45700" rIns="91425" bIns="45700" anchor="t" anchorCtr="0">
+            <a:noAutofit/>
+          </a:bodyPr>
+          <a:lstStyle/>
+          <a:p>
+            <a:pPr marL="0" marR="0" lvl="0" indent="0" algn="l" defTabSz="914400" rtl="0" eaLnBrk="1" fontAlgn="auto" latinLnBrk="0" hangingPunct="1">
+              <a:lnSpc>
+                <a:spcPct val="100000"/>
+              </a:lnSpc>
+              <a:spcBef>
+                <a:spcPts val="0"/>
+              </a:spcBef>
+              <a:spcAft>
+                <a:spcPts val="0"/>
+              </a:spcAft>
+              <a:buClr>
+                <a:srgbClr val="000000"/>
+              </a:buClr>
+              <a:buSzPts val="1400"/>
+              <a:buFont typeface="Arial"/>
+              <a:buNone/>
+              <a:tabLst/>
+              <a:defRPr/>
+            </a:pPr>
+            <a:r>
+              <a:rPr lang="en-US" dirty="0"/>
+              <a:t>This is another slide that you may want to use frequently. This slide </a:t>
+            </a:r>
+            <a:r>
+              <a:rPr lang="en-US" baseline="0" dirty="0"/>
+              <a:t>is set up for a title and text. Do not change the fonts/colors in any way. The only adjustment you should need to make is the size of the text if your presentation has a long title. </a:t>
+            </a:r>
+          </a:p>
+          <a:p>
+            <a:pPr marL="228600" lvl="0" indent="-228600" algn="l" rtl="0">
+              <a:spcBef>
+                <a:spcPts val="0"/>
+              </a:spcBef>
+              <a:spcAft>
+                <a:spcPts val="0"/>
+              </a:spcAft>
+              <a:buAutoNum type="arabicPeriod"/>
+            </a:pPr>
+            <a:r>
+              <a:rPr lang="en-US" baseline="0" dirty="0"/>
+              <a:t>Add the Title.  </a:t>
+            </a:r>
+          </a:p>
+          <a:p>
+            <a:pPr marL="228600" lvl="0" indent="-228600" algn="l" rtl="0">
+              <a:spcBef>
+                <a:spcPts val="0"/>
+              </a:spcBef>
+              <a:spcAft>
+                <a:spcPts val="0"/>
+              </a:spcAft>
+              <a:buAutoNum type="arabicPeriod"/>
+            </a:pPr>
+            <a:r>
+              <a:rPr lang="en-US" baseline="0" dirty="0"/>
+              <a:t>Add your content to the Text box. If you copy/paste information into this slide, make sure to Clear Formatting to ensure that the formatting for accessibility remains. You can find the Clear Formatting button on the Home Tab, within the Font section.  It looks like a Capital Letter A with an eraser.  The text will increase or decrease as you type to ensure that the proper sizing is used.</a:t>
+            </a:r>
+          </a:p>
+          <a:p>
+            <a:pPr marL="228600" marR="0" lvl="0" indent="-228600" algn="l" defTabSz="914400" rtl="0" eaLnBrk="1" fontAlgn="auto" latinLnBrk="0" hangingPunct="1">
+              <a:lnSpc>
+                <a:spcPct val="100000"/>
+              </a:lnSpc>
+              <a:spcBef>
+                <a:spcPts val="0"/>
+              </a:spcBef>
+              <a:spcAft>
+                <a:spcPts val="0"/>
+              </a:spcAft>
+              <a:buClr>
+                <a:srgbClr val="000000"/>
+              </a:buClr>
+              <a:buSzPts val="1400"/>
+              <a:buFont typeface="Arial"/>
+              <a:buAutoNum type="arabicPeriod"/>
+              <a:tabLst/>
+              <a:defRPr/>
+            </a:pPr>
+            <a:r>
+              <a:rPr lang="en-US" baseline="0" dirty="0"/>
+              <a:t>Delete this text in the Notes section when you are finished.</a:t>
+            </a:r>
+          </a:p>
+          <a:p>
+            <a:pPr marL="0" lvl="0" indent="0" algn="l" rtl="0">
+              <a:spcBef>
+                <a:spcPts val="0"/>
+              </a:spcBef>
+              <a:spcAft>
+                <a:spcPts val="0"/>
+              </a:spcAft>
+              <a:buNone/>
+            </a:pPr>
+            <a:endParaRPr lang="en-US" baseline="0" dirty="0"/>
+          </a:p>
+          <a:p>
+            <a:pPr marL="0" lvl="0" indent="0" algn="l" rtl="0">
+              <a:spcBef>
+                <a:spcPts val="0"/>
+              </a:spcBef>
+              <a:spcAft>
+                <a:spcPts val="0"/>
+              </a:spcAft>
+              <a:buNone/>
+            </a:pPr>
+            <a:endParaRPr lang="en-US" dirty="0"/>
+          </a:p>
+        </p:txBody>
+      </p:sp>
+      <p:sp>
+        <p:nvSpPr>
+          <p:cNvPr id="94" name="Google Shape;94;p7:notes">
+            <a:extLst>
+              <a:ext uri="{FF2B5EF4-FFF2-40B4-BE49-F238E27FC236}">
+                <a16:creationId xmlns:a16="http://schemas.microsoft.com/office/drawing/2014/main" id="{6F17474E-D2A1-E7DB-7F17-427624DC7EDA}"/>
+              </a:ext>
+            </a:extLst>
+          </p:cNvPr>
+          <p:cNvSpPr>
+            <a:spLocks noGrp="1" noRot="1" noChangeAspect="1"/>
+          </p:cNvSpPr>
+          <p:nvPr>
+            <p:ph type="sldImg" idx="2"/>
+          </p:nvPr>
+        </p:nvSpPr>
+        <p:spPr>
+          <a:xfrm>
+            <a:off x="685800" y="1143000"/>
+            <a:ext cx="5486400" cy="3086100"/>
+          </a:xfrm>
+          <a:custGeom>
+            <a:avLst/>
+            <a:gdLst/>
+            <a:ahLst/>
+            <a:cxnLst/>
+            <a:rect l="l" t="t" r="r" b="b"/>
+            <a:pathLst>
+              <a:path w="120000" h="120000" extrusionOk="0">
+                <a:moveTo>
+                  <a:pt x="0" y="0"/>
+                </a:moveTo>
+                <a:lnTo>
+                  <a:pt x="120000" y="0"/>
+                </a:lnTo>
+                <a:lnTo>
+                  <a:pt x="120000" y="120000"/>
+                </a:lnTo>
+                <a:lnTo>
+                  <a:pt x="0" y="120000"/>
+                </a:lnTo>
+                <a:close/>
+              </a:path>
+            </a:pathLst>
+          </a:custGeom>
+        </p:spPr>
+      </p:sp>
+    </p:spTree>
+    <p:extLst>
+      <p:ext uri="{BB962C8B-B14F-4D97-AF65-F5344CB8AC3E}">
+        <p14:creationId xmlns:p14="http://schemas.microsoft.com/office/powerpoint/2010/main" val="691578124"/>
+      </p:ext>
+    </p:extLst>
+  </p:cSld>
+  <p:clrMapOvr>
+    <a:masterClrMapping/>
+  </p:clrMapOvr>
+</p:notes>
+</file>
+
+<file path=ppt/notesSlides/notesSlide14.xml><?xml version="1.0" encoding="utf-8"?>
+<p:notes xmlns:a="http://schemas.openxmlformats.org/drawingml/2006/main" xmlns:r="http://schemas.openxmlformats.org/officeDocument/2006/relationships" xmlns:p="http://schemas.openxmlformats.org/presentationml/2006/main" showMasterSp="0" showMasterPhAnim="0">
+  <p:cSld>
+    <p:spTree>
+      <p:nvGrpSpPr>
+        <p:cNvPr id="1" name="Shape 92">
+          <a:extLst>
+            <a:ext uri="{FF2B5EF4-FFF2-40B4-BE49-F238E27FC236}">
+              <a16:creationId xmlns:a16="http://schemas.microsoft.com/office/drawing/2014/main" id="{E0C93CB5-92F6-E684-8BF7-E9F92C97263F}"/>
+            </a:ext>
+          </a:extLst>
+        </p:cNvPr>
+        <p:cNvGrpSpPr/>
+        <p:nvPr/>
+      </p:nvGrpSpPr>
+      <p:grpSpPr>
+        <a:xfrm>
+          <a:off x="0" y="0"/>
+          <a:ext cx="0" cy="0"/>
+          <a:chOff x="0" y="0"/>
+          <a:chExt cx="0" cy="0"/>
+        </a:xfrm>
+      </p:grpSpPr>
+      <p:sp>
+        <p:nvSpPr>
+          <p:cNvPr id="93" name="Google Shape;93;p7:notes">
+            <a:extLst>
+              <a:ext uri="{FF2B5EF4-FFF2-40B4-BE49-F238E27FC236}">
+                <a16:creationId xmlns:a16="http://schemas.microsoft.com/office/drawing/2014/main" id="{0EE8E1CD-3831-F2EF-9965-75CD24CE7D24}"/>
+              </a:ext>
+            </a:extLst>
+          </p:cNvPr>
+          <p:cNvSpPr txBox="1">
+            <a:spLocks noGrp="1"/>
+          </p:cNvSpPr>
+          <p:nvPr>
+            <p:ph type="body" idx="1"/>
+          </p:nvPr>
+        </p:nvSpPr>
+        <p:spPr>
+          <a:xfrm>
+            <a:off x="685800" y="4400550"/>
+            <a:ext cx="5486400" cy="3600450"/>
+          </a:xfrm>
+          <a:prstGeom prst="rect">
+            <a:avLst/>
+          </a:prstGeom>
+        </p:spPr>
+        <p:txBody>
+          <a:bodyPr spcFirstLastPara="1" wrap="square" lIns="91425" tIns="45700" rIns="91425" bIns="45700" anchor="t" anchorCtr="0">
+            <a:noAutofit/>
+          </a:bodyPr>
+          <a:lstStyle/>
+          <a:p>
+            <a:pPr marL="0" marR="0" lvl="0" indent="0" algn="l" defTabSz="914400" rtl="0" eaLnBrk="1" fontAlgn="auto" latinLnBrk="0" hangingPunct="1">
+              <a:lnSpc>
+                <a:spcPct val="100000"/>
+              </a:lnSpc>
+              <a:spcBef>
+                <a:spcPts val="0"/>
+              </a:spcBef>
+              <a:spcAft>
+                <a:spcPts val="0"/>
+              </a:spcAft>
+              <a:buClr>
+                <a:srgbClr val="000000"/>
+              </a:buClr>
+              <a:buSzPts val="1400"/>
+              <a:buFont typeface="Arial"/>
+              <a:buNone/>
+              <a:tabLst/>
+              <a:defRPr/>
+            </a:pPr>
+            <a:r>
+              <a:rPr lang="en-US" dirty="0"/>
+              <a:t>This is another slide that you may want to use frequently. This slide </a:t>
+            </a:r>
+            <a:r>
+              <a:rPr lang="en-US" baseline="0" dirty="0"/>
+              <a:t>is set up for a title and text. Do not change the fonts/colors in any way. The only adjustment you should need to make is the size of the text if your presentation has a long title. </a:t>
+            </a:r>
+          </a:p>
+          <a:p>
+            <a:pPr marL="228600" lvl="0" indent="-228600" algn="l" rtl="0">
+              <a:spcBef>
+                <a:spcPts val="0"/>
+              </a:spcBef>
+              <a:spcAft>
+                <a:spcPts val="0"/>
+              </a:spcAft>
+              <a:buAutoNum type="arabicPeriod"/>
+            </a:pPr>
+            <a:r>
+              <a:rPr lang="en-US" baseline="0" dirty="0"/>
+              <a:t>Add the Title.  </a:t>
+            </a:r>
+          </a:p>
+          <a:p>
+            <a:pPr marL="228600" lvl="0" indent="-228600" algn="l" rtl="0">
+              <a:spcBef>
+                <a:spcPts val="0"/>
+              </a:spcBef>
+              <a:spcAft>
+                <a:spcPts val="0"/>
+              </a:spcAft>
+              <a:buAutoNum type="arabicPeriod"/>
+            </a:pPr>
+            <a:r>
+              <a:rPr lang="en-US" baseline="0" dirty="0"/>
+              <a:t>Add your content to the Text box. If you copy/paste information into this slide, make sure to Clear Formatting to ensure that the formatting for accessibility remains. You can find the Clear Formatting button on the Home Tab, within the Font section.  It looks like a Capital Letter A with an eraser.  The text will increase or decrease as you type to ensure that the proper sizing is used.</a:t>
+            </a:r>
+          </a:p>
+          <a:p>
+            <a:pPr marL="228600" marR="0" lvl="0" indent="-228600" algn="l" defTabSz="914400" rtl="0" eaLnBrk="1" fontAlgn="auto" latinLnBrk="0" hangingPunct="1">
+              <a:lnSpc>
+                <a:spcPct val="100000"/>
+              </a:lnSpc>
+              <a:spcBef>
+                <a:spcPts val="0"/>
+              </a:spcBef>
+              <a:spcAft>
+                <a:spcPts val="0"/>
+              </a:spcAft>
+              <a:buClr>
+                <a:srgbClr val="000000"/>
+              </a:buClr>
+              <a:buSzPts val="1400"/>
+              <a:buFont typeface="Arial"/>
+              <a:buAutoNum type="arabicPeriod"/>
+              <a:tabLst/>
+              <a:defRPr/>
+            </a:pPr>
+            <a:r>
+              <a:rPr lang="en-US" baseline="0" dirty="0"/>
+              <a:t>Delete this text in the Notes section when you are finished.</a:t>
+            </a:r>
+          </a:p>
+          <a:p>
+            <a:pPr marL="0" lvl="0" indent="0" algn="l" rtl="0">
+              <a:spcBef>
+                <a:spcPts val="0"/>
+              </a:spcBef>
+              <a:spcAft>
+                <a:spcPts val="0"/>
+              </a:spcAft>
+              <a:buNone/>
+            </a:pPr>
+            <a:endParaRPr lang="en-US" baseline="0" dirty="0"/>
+          </a:p>
+          <a:p>
+            <a:pPr marL="0" lvl="0" indent="0" algn="l" rtl="0">
+              <a:spcBef>
+                <a:spcPts val="0"/>
+              </a:spcBef>
+              <a:spcAft>
+                <a:spcPts val="0"/>
+              </a:spcAft>
+              <a:buNone/>
+            </a:pPr>
+            <a:endParaRPr lang="en-US" dirty="0"/>
+          </a:p>
+        </p:txBody>
+      </p:sp>
+      <p:sp>
+        <p:nvSpPr>
+          <p:cNvPr id="94" name="Google Shape;94;p7:notes">
+            <a:extLst>
+              <a:ext uri="{FF2B5EF4-FFF2-40B4-BE49-F238E27FC236}">
+                <a16:creationId xmlns:a16="http://schemas.microsoft.com/office/drawing/2014/main" id="{3AD3FE10-D7F9-7494-B4F7-0E2582BF0D67}"/>
+              </a:ext>
+            </a:extLst>
+          </p:cNvPr>
+          <p:cNvSpPr>
+            <a:spLocks noGrp="1" noRot="1" noChangeAspect="1"/>
+          </p:cNvSpPr>
+          <p:nvPr>
+            <p:ph type="sldImg" idx="2"/>
+          </p:nvPr>
+        </p:nvSpPr>
+        <p:spPr>
+          <a:xfrm>
+            <a:off x="685800" y="1143000"/>
+            <a:ext cx="5486400" cy="3086100"/>
+          </a:xfrm>
+          <a:custGeom>
+            <a:avLst/>
+            <a:gdLst/>
+            <a:ahLst/>
+            <a:cxnLst/>
+            <a:rect l="l" t="t" r="r" b="b"/>
+            <a:pathLst>
+              <a:path w="120000" h="120000" extrusionOk="0">
+                <a:moveTo>
+                  <a:pt x="0" y="0"/>
+                </a:moveTo>
+                <a:lnTo>
+                  <a:pt x="120000" y="0"/>
+                </a:lnTo>
+                <a:lnTo>
+                  <a:pt x="120000" y="120000"/>
+                </a:lnTo>
+                <a:lnTo>
+                  <a:pt x="0" y="120000"/>
+                </a:lnTo>
+                <a:close/>
+              </a:path>
+            </a:pathLst>
+          </a:custGeom>
+        </p:spPr>
+      </p:sp>
+    </p:spTree>
+    <p:extLst>
+      <p:ext uri="{BB962C8B-B14F-4D97-AF65-F5344CB8AC3E}">
+        <p14:creationId xmlns:p14="http://schemas.microsoft.com/office/powerpoint/2010/main" val="1889446406"/>
+      </p:ext>
+    </p:extLst>
+  </p:cSld>
+  <p:clrMapOvr>
+    <a:masterClrMapping/>
+  </p:clrMapOvr>
+</p:notes>
+</file>
+
+<file path=ppt/notesSlides/notesSlide15.xml><?xml version="1.0" encoding="utf-8"?>
+<p:notes xmlns:a="http://schemas.openxmlformats.org/drawingml/2006/main" xmlns:r="http://schemas.openxmlformats.org/officeDocument/2006/relationships" xmlns:p="http://schemas.openxmlformats.org/presentationml/2006/main" showMasterSp="0" showMasterPhAnim="0">
+  <p:cSld>
+    <p:spTree>
+      <p:nvGrpSpPr>
+        <p:cNvPr id="1" name="Shape 92">
+          <a:extLst>
+            <a:ext uri="{FF2B5EF4-FFF2-40B4-BE49-F238E27FC236}">
+              <a16:creationId xmlns:a16="http://schemas.microsoft.com/office/drawing/2014/main" id="{7836D930-211F-5032-262E-5B2DB8892E9C}"/>
+            </a:ext>
+          </a:extLst>
+        </p:cNvPr>
+        <p:cNvGrpSpPr/>
+        <p:nvPr/>
+      </p:nvGrpSpPr>
+      <p:grpSpPr>
+        <a:xfrm>
+          <a:off x="0" y="0"/>
+          <a:ext cx="0" cy="0"/>
+          <a:chOff x="0" y="0"/>
+          <a:chExt cx="0" cy="0"/>
+        </a:xfrm>
+      </p:grpSpPr>
+      <p:sp>
+        <p:nvSpPr>
+          <p:cNvPr id="93" name="Google Shape;93;p7:notes">
+            <a:extLst>
+              <a:ext uri="{FF2B5EF4-FFF2-40B4-BE49-F238E27FC236}">
+                <a16:creationId xmlns:a16="http://schemas.microsoft.com/office/drawing/2014/main" id="{79D9E866-E083-1C19-440E-648CFA98F9E7}"/>
+              </a:ext>
+            </a:extLst>
+          </p:cNvPr>
+          <p:cNvSpPr txBox="1">
+            <a:spLocks noGrp="1"/>
+          </p:cNvSpPr>
+          <p:nvPr>
+            <p:ph type="body" idx="1"/>
+          </p:nvPr>
+        </p:nvSpPr>
+        <p:spPr>
+          <a:xfrm>
+            <a:off x="685800" y="4400550"/>
+            <a:ext cx="5486400" cy="3600450"/>
+          </a:xfrm>
+          <a:prstGeom prst="rect">
+            <a:avLst/>
+          </a:prstGeom>
+        </p:spPr>
+        <p:txBody>
+          <a:bodyPr spcFirstLastPara="1" wrap="square" lIns="91425" tIns="45700" rIns="91425" bIns="45700" anchor="t" anchorCtr="0">
+            <a:noAutofit/>
+          </a:bodyPr>
+          <a:lstStyle/>
+          <a:p>
+            <a:pPr marL="0" marR="0" lvl="0" indent="0" algn="l" defTabSz="914400" rtl="0" eaLnBrk="1" fontAlgn="auto" latinLnBrk="0" hangingPunct="1">
+              <a:lnSpc>
+                <a:spcPct val="100000"/>
+              </a:lnSpc>
+              <a:spcBef>
+                <a:spcPts val="0"/>
+              </a:spcBef>
+              <a:spcAft>
+                <a:spcPts val="0"/>
+              </a:spcAft>
+              <a:buClr>
+                <a:srgbClr val="000000"/>
+              </a:buClr>
+              <a:buSzPts val="1400"/>
+              <a:buFont typeface="Arial"/>
+              <a:buNone/>
+              <a:tabLst/>
+              <a:defRPr/>
+            </a:pPr>
+            <a:r>
+              <a:rPr lang="en-US" dirty="0"/>
+              <a:t>This is another slide that you may want to use frequently. This slide </a:t>
+            </a:r>
+            <a:r>
+              <a:rPr lang="en-US" baseline="0" dirty="0"/>
+              <a:t>is set up for a title and text. Do not change the fonts/colors in any way. The only adjustment you should need to make is the size of the text if your presentation has a long title. </a:t>
+            </a:r>
+          </a:p>
+          <a:p>
+            <a:pPr marL="228600" lvl="0" indent="-228600" algn="l" rtl="0">
+              <a:spcBef>
+                <a:spcPts val="0"/>
+              </a:spcBef>
+              <a:spcAft>
+                <a:spcPts val="0"/>
+              </a:spcAft>
+              <a:buAutoNum type="arabicPeriod"/>
+            </a:pPr>
+            <a:r>
+              <a:rPr lang="en-US" baseline="0" dirty="0"/>
+              <a:t>Add the Title.  </a:t>
+            </a:r>
+          </a:p>
+          <a:p>
+            <a:pPr marL="228600" lvl="0" indent="-228600" algn="l" rtl="0">
+              <a:spcBef>
+                <a:spcPts val="0"/>
+              </a:spcBef>
+              <a:spcAft>
+                <a:spcPts val="0"/>
+              </a:spcAft>
+              <a:buAutoNum type="arabicPeriod"/>
+            </a:pPr>
+            <a:r>
+              <a:rPr lang="en-US" baseline="0" dirty="0"/>
+              <a:t>Add your content to the Text box. If you copy/paste information into this slide, make sure to Clear Formatting to ensure that the formatting for accessibility remains. You can find the Clear Formatting button on the Home Tab, within the Font section.  It looks like a Capital Letter A with an eraser.  The text will increase or decrease as you type to ensure that the proper sizing is used.</a:t>
+            </a:r>
+          </a:p>
+          <a:p>
+            <a:pPr marL="228600" marR="0" lvl="0" indent="-228600" algn="l" defTabSz="914400" rtl="0" eaLnBrk="1" fontAlgn="auto" latinLnBrk="0" hangingPunct="1">
+              <a:lnSpc>
+                <a:spcPct val="100000"/>
+              </a:lnSpc>
+              <a:spcBef>
+                <a:spcPts val="0"/>
+              </a:spcBef>
+              <a:spcAft>
+                <a:spcPts val="0"/>
+              </a:spcAft>
+              <a:buClr>
+                <a:srgbClr val="000000"/>
+              </a:buClr>
+              <a:buSzPts val="1400"/>
+              <a:buFont typeface="Arial"/>
+              <a:buAutoNum type="arabicPeriod"/>
+              <a:tabLst/>
+              <a:defRPr/>
+            </a:pPr>
+            <a:r>
+              <a:rPr lang="en-US" baseline="0" dirty="0"/>
+              <a:t>Delete this text in the Notes section when you are finished.</a:t>
+            </a:r>
+          </a:p>
+          <a:p>
+            <a:pPr marL="0" lvl="0" indent="0" algn="l" rtl="0">
+              <a:spcBef>
+                <a:spcPts val="0"/>
+              </a:spcBef>
+              <a:spcAft>
+                <a:spcPts val="0"/>
+              </a:spcAft>
+              <a:buNone/>
+            </a:pPr>
+            <a:endParaRPr lang="en-US" baseline="0" dirty="0"/>
+          </a:p>
+          <a:p>
+            <a:pPr marL="0" lvl="0" indent="0" algn="l" rtl="0">
+              <a:spcBef>
+                <a:spcPts val="0"/>
+              </a:spcBef>
+              <a:spcAft>
+                <a:spcPts val="0"/>
+              </a:spcAft>
+              <a:buNone/>
+            </a:pPr>
+            <a:endParaRPr lang="en-US" dirty="0"/>
+          </a:p>
+        </p:txBody>
+      </p:sp>
+      <p:sp>
+        <p:nvSpPr>
+          <p:cNvPr id="94" name="Google Shape;94;p7:notes">
+            <a:extLst>
+              <a:ext uri="{FF2B5EF4-FFF2-40B4-BE49-F238E27FC236}">
+                <a16:creationId xmlns:a16="http://schemas.microsoft.com/office/drawing/2014/main" id="{9F4E4D4D-59F7-4A00-169F-FDC368E11428}"/>
+              </a:ext>
+            </a:extLst>
+          </p:cNvPr>
+          <p:cNvSpPr>
+            <a:spLocks noGrp="1" noRot="1" noChangeAspect="1"/>
+          </p:cNvSpPr>
+          <p:nvPr>
+            <p:ph type="sldImg" idx="2"/>
+          </p:nvPr>
+        </p:nvSpPr>
+        <p:spPr>
+          <a:xfrm>
+            <a:off x="685800" y="1143000"/>
+            <a:ext cx="5486400" cy="3086100"/>
+          </a:xfrm>
+          <a:custGeom>
+            <a:avLst/>
+            <a:gdLst/>
+            <a:ahLst/>
+            <a:cxnLst/>
+            <a:rect l="l" t="t" r="r" b="b"/>
+            <a:pathLst>
+              <a:path w="120000" h="120000" extrusionOk="0">
+                <a:moveTo>
+                  <a:pt x="0" y="0"/>
+                </a:moveTo>
+                <a:lnTo>
+                  <a:pt x="120000" y="0"/>
+                </a:lnTo>
+                <a:lnTo>
+                  <a:pt x="120000" y="120000"/>
+                </a:lnTo>
+                <a:lnTo>
+                  <a:pt x="0" y="120000"/>
+                </a:lnTo>
+                <a:close/>
+              </a:path>
+            </a:pathLst>
+          </a:custGeom>
+        </p:spPr>
+      </p:sp>
+    </p:spTree>
+    <p:extLst>
+      <p:ext uri="{BB962C8B-B14F-4D97-AF65-F5344CB8AC3E}">
+        <p14:creationId xmlns:p14="http://schemas.microsoft.com/office/powerpoint/2010/main" val="1736357098"/>
+      </p:ext>
+    </p:extLst>
+  </p:cSld>
+  <p:clrMapOvr>
+    <a:masterClrMapping/>
+  </p:clrMapOvr>
+</p:notes>
+</file>
+
+<file path=ppt/notesSlides/notesSlide16.xml><?xml version="1.0" encoding="utf-8"?>
+<p:notes xmlns:a="http://schemas.openxmlformats.org/drawingml/2006/main" xmlns:r="http://schemas.openxmlformats.org/officeDocument/2006/relationships" xmlns:p="http://schemas.openxmlformats.org/presentationml/2006/main" showMasterSp="0" showMasterPhAnim="0">
+  <p:cSld>
+    <p:spTree>
+      <p:nvGrpSpPr>
+        <p:cNvPr id="1" name="Shape 92">
+          <a:extLst>
+            <a:ext uri="{FF2B5EF4-FFF2-40B4-BE49-F238E27FC236}">
+              <a16:creationId xmlns:a16="http://schemas.microsoft.com/office/drawing/2014/main" id="{C9E21695-D800-E552-7A2D-9446AFE4FA32}"/>
+            </a:ext>
+          </a:extLst>
+        </p:cNvPr>
+        <p:cNvGrpSpPr/>
+        <p:nvPr/>
+      </p:nvGrpSpPr>
+      <p:grpSpPr>
+        <a:xfrm>
+          <a:off x="0" y="0"/>
+          <a:ext cx="0" cy="0"/>
+          <a:chOff x="0" y="0"/>
+          <a:chExt cx="0" cy="0"/>
+        </a:xfrm>
+      </p:grpSpPr>
+      <p:sp>
+        <p:nvSpPr>
+          <p:cNvPr id="93" name="Google Shape;93;p7:notes">
+            <a:extLst>
+              <a:ext uri="{FF2B5EF4-FFF2-40B4-BE49-F238E27FC236}">
+                <a16:creationId xmlns:a16="http://schemas.microsoft.com/office/drawing/2014/main" id="{CEEB0279-22C3-8DBA-4851-DC4442A5B719}"/>
+              </a:ext>
+            </a:extLst>
+          </p:cNvPr>
+          <p:cNvSpPr txBox="1">
+            <a:spLocks noGrp="1"/>
+          </p:cNvSpPr>
+          <p:nvPr>
+            <p:ph type="body" idx="1"/>
+          </p:nvPr>
+        </p:nvSpPr>
+        <p:spPr>
+          <a:xfrm>
+            <a:off x="685800" y="4400550"/>
+            <a:ext cx="5486400" cy="3600450"/>
+          </a:xfrm>
+          <a:prstGeom prst="rect">
+            <a:avLst/>
+          </a:prstGeom>
+        </p:spPr>
+        <p:txBody>
+          <a:bodyPr spcFirstLastPara="1" wrap="square" lIns="91425" tIns="45700" rIns="91425" bIns="45700" anchor="t" anchorCtr="0">
+            <a:noAutofit/>
+          </a:bodyPr>
+          <a:lstStyle/>
+          <a:p>
+            <a:pPr marL="0" marR="0" lvl="0" indent="0" algn="l" defTabSz="914400" rtl="0" eaLnBrk="1" fontAlgn="auto" latinLnBrk="0" hangingPunct="1">
+              <a:lnSpc>
+                <a:spcPct val="100000"/>
+              </a:lnSpc>
+              <a:spcBef>
+                <a:spcPts val="0"/>
+              </a:spcBef>
+              <a:spcAft>
+                <a:spcPts val="0"/>
+              </a:spcAft>
+              <a:buClr>
+                <a:srgbClr val="000000"/>
+              </a:buClr>
+              <a:buSzPts val="1400"/>
+              <a:buFont typeface="Arial"/>
+              <a:buNone/>
+              <a:tabLst/>
+              <a:defRPr/>
+            </a:pPr>
+            <a:r>
+              <a:rPr lang="en-US" dirty="0"/>
+              <a:t>This is another slide that you may want to use frequently. This slide </a:t>
+            </a:r>
+            <a:r>
+              <a:rPr lang="en-US" baseline="0" dirty="0"/>
+              <a:t>is set up for a title and text. Do not change the fonts/colors in any way. The only adjustment you should need to make is the size of the text if your presentation has a long title. </a:t>
+            </a:r>
+          </a:p>
+          <a:p>
+            <a:pPr marL="228600" lvl="0" indent="-228600" algn="l" rtl="0">
+              <a:spcBef>
+                <a:spcPts val="0"/>
+              </a:spcBef>
+              <a:spcAft>
+                <a:spcPts val="0"/>
+              </a:spcAft>
+              <a:buAutoNum type="arabicPeriod"/>
+            </a:pPr>
+            <a:r>
+              <a:rPr lang="en-US" baseline="0" dirty="0"/>
+              <a:t>Add the Title.  </a:t>
+            </a:r>
+          </a:p>
+          <a:p>
+            <a:pPr marL="228600" lvl="0" indent="-228600" algn="l" rtl="0">
+              <a:spcBef>
+                <a:spcPts val="0"/>
+              </a:spcBef>
+              <a:spcAft>
+                <a:spcPts val="0"/>
+              </a:spcAft>
+              <a:buAutoNum type="arabicPeriod"/>
+            </a:pPr>
+            <a:r>
+              <a:rPr lang="en-US" baseline="0" dirty="0"/>
+              <a:t>Add your content to the Text box. If you copy/paste information into this slide, make sure to Clear Formatting to ensure that the formatting for accessibility remains. You can find the Clear Formatting button on the Home Tab, within the Font section.  It looks like a Capital Letter A with an eraser.  The text will increase or decrease as you type to ensure that the proper sizing is used.</a:t>
+            </a:r>
+          </a:p>
+          <a:p>
+            <a:pPr marL="228600" marR="0" lvl="0" indent="-228600" algn="l" defTabSz="914400" rtl="0" eaLnBrk="1" fontAlgn="auto" latinLnBrk="0" hangingPunct="1">
+              <a:lnSpc>
+                <a:spcPct val="100000"/>
+              </a:lnSpc>
+              <a:spcBef>
+                <a:spcPts val="0"/>
+              </a:spcBef>
+              <a:spcAft>
+                <a:spcPts val="0"/>
+              </a:spcAft>
+              <a:buClr>
+                <a:srgbClr val="000000"/>
+              </a:buClr>
+              <a:buSzPts val="1400"/>
+              <a:buFont typeface="Arial"/>
+              <a:buAutoNum type="arabicPeriod"/>
+              <a:tabLst/>
+              <a:defRPr/>
+            </a:pPr>
+            <a:r>
+              <a:rPr lang="en-US" baseline="0" dirty="0"/>
+              <a:t>Delete this text in the Notes section when you are finished.</a:t>
+            </a:r>
+          </a:p>
+          <a:p>
+            <a:pPr marL="0" lvl="0" indent="0" algn="l" rtl="0">
+              <a:spcBef>
+                <a:spcPts val="0"/>
+              </a:spcBef>
+              <a:spcAft>
+                <a:spcPts val="0"/>
+              </a:spcAft>
+              <a:buNone/>
+            </a:pPr>
+            <a:endParaRPr lang="en-US" baseline="0" dirty="0"/>
+          </a:p>
+          <a:p>
+            <a:pPr marL="0" lvl="0" indent="0" algn="l" rtl="0">
+              <a:spcBef>
+                <a:spcPts val="0"/>
+              </a:spcBef>
+              <a:spcAft>
+                <a:spcPts val="0"/>
+              </a:spcAft>
+              <a:buNone/>
+            </a:pPr>
+            <a:endParaRPr lang="en-US" dirty="0"/>
+          </a:p>
+        </p:txBody>
+      </p:sp>
+      <p:sp>
+        <p:nvSpPr>
+          <p:cNvPr id="94" name="Google Shape;94;p7:notes">
+            <a:extLst>
+              <a:ext uri="{FF2B5EF4-FFF2-40B4-BE49-F238E27FC236}">
+                <a16:creationId xmlns:a16="http://schemas.microsoft.com/office/drawing/2014/main" id="{ED7C4531-1744-DBD8-EB0A-E9017BDCF9E5}"/>
+              </a:ext>
+            </a:extLst>
+          </p:cNvPr>
+          <p:cNvSpPr>
+            <a:spLocks noGrp="1" noRot="1" noChangeAspect="1"/>
+          </p:cNvSpPr>
+          <p:nvPr>
+            <p:ph type="sldImg" idx="2"/>
+          </p:nvPr>
+        </p:nvSpPr>
+        <p:spPr>
+          <a:xfrm>
+            <a:off x="685800" y="1143000"/>
+            <a:ext cx="5486400" cy="3086100"/>
+          </a:xfrm>
+          <a:custGeom>
+            <a:avLst/>
+            <a:gdLst/>
+            <a:ahLst/>
+            <a:cxnLst/>
+            <a:rect l="l" t="t" r="r" b="b"/>
+            <a:pathLst>
+              <a:path w="120000" h="120000" extrusionOk="0">
+                <a:moveTo>
+                  <a:pt x="0" y="0"/>
+                </a:moveTo>
+                <a:lnTo>
+                  <a:pt x="120000" y="0"/>
+                </a:lnTo>
+                <a:lnTo>
+                  <a:pt x="120000" y="120000"/>
+                </a:lnTo>
+                <a:lnTo>
+                  <a:pt x="0" y="120000"/>
+                </a:lnTo>
+                <a:close/>
+              </a:path>
+            </a:pathLst>
+          </a:custGeom>
+        </p:spPr>
+      </p:sp>
+    </p:spTree>
+    <p:extLst>
+      <p:ext uri="{BB962C8B-B14F-4D97-AF65-F5344CB8AC3E}">
+        <p14:creationId xmlns:p14="http://schemas.microsoft.com/office/powerpoint/2010/main" val="2996476850"/>
+      </p:ext>
+    </p:extLst>
+  </p:cSld>
+  <p:clrMapOvr>
+    <a:masterClrMapping/>
+  </p:clrMapOvr>
+</p:notes>
+</file>
+
+<file path=ppt/notesSlides/notesSlide17.xml><?xml version="1.0" encoding="utf-8"?>
+<p:notes xmlns:a="http://schemas.openxmlformats.org/drawingml/2006/main" xmlns:r="http://schemas.openxmlformats.org/officeDocument/2006/relationships" xmlns:p="http://schemas.openxmlformats.org/presentationml/2006/main" showMasterSp="0" showMasterPhAnim="0">
+  <p:cSld>
+    <p:spTree>
+      <p:nvGrpSpPr>
         <p:cNvPr id="1" name="Shape 69"/>
         <p:cNvGrpSpPr/>
         <p:nvPr/>
@@ -2321,7 +3889,7 @@
 </p:notes>
 </file>
 
-<file path=ppt/notesSlides/notesSlide11.xml><?xml version="1.0" encoding="utf-8"?>
+<file path=ppt/notesSlides/notesSlide18.xml><?xml version="1.0" encoding="utf-8"?>
 <p:notes xmlns:a="http://schemas.openxmlformats.org/drawingml/2006/main" xmlns:r="http://schemas.openxmlformats.org/officeDocument/2006/relationships" xmlns:p="http://schemas.openxmlformats.org/presentationml/2006/main" showMasterSp="0" showMasterPhAnim="0">
   <p:cSld>
     <p:spTree>
@@ -2499,7 +4067,7 @@
 </p:notes>
 </file>
 
-<file path=ppt/notesSlides/notesSlide12.xml><?xml version="1.0" encoding="utf-8"?>
+<file path=ppt/notesSlides/notesSlide19.xml><?xml version="1.0" encoding="utf-8"?>
 <p:notes xmlns:a="http://schemas.openxmlformats.org/drawingml/2006/main" xmlns:r="http://schemas.openxmlformats.org/officeDocument/2006/relationships" xmlns:p="http://schemas.openxmlformats.org/presentationml/2006/main" showMasterSp="0" showMasterPhAnim="0">
   <p:cSld>
     <p:spTree>
@@ -2738,60 +4306,7 @@
               <a:tabLst/>
               <a:defRPr/>
             </a:pPr>
-            <a:r>
-              <a:rPr lang="en-US" dirty="0"/>
-              <a:t>This is the title slide</a:t>
-            </a:r>
-            <a:r>
-              <a:rPr lang="en-US" baseline="0" dirty="0"/>
-              <a:t> for your presentation. Do not add images to this slide or change the fonts/colors in any way. The only adjustment you should need to make is the size of the text if your presentation has a long title or subtitle. </a:t>
-            </a:r>
-            <a:endParaRPr lang="en-US" dirty="0"/>
-          </a:p>
-          <a:p>
-            <a:pPr marL="228600" lvl="0" indent="-228600" algn="l" rtl="0">
-              <a:spcBef>
-                <a:spcPts val="0"/>
-              </a:spcBef>
-              <a:spcAft>
-                <a:spcPts val="0"/>
-              </a:spcAft>
-              <a:buAutoNum type="arabicPeriod"/>
-            </a:pPr>
-            <a:r>
-              <a:rPr lang="en-US" baseline="0" dirty="0"/>
-              <a:t>Add your title in the top text box. </a:t>
-            </a:r>
-          </a:p>
-          <a:p>
-            <a:pPr marL="228600" lvl="0" indent="-228600" algn="l" rtl="0">
-              <a:spcBef>
-                <a:spcPts val="0"/>
-              </a:spcBef>
-              <a:spcAft>
-                <a:spcPts val="0"/>
-              </a:spcAft>
-              <a:buAutoNum type="arabicPeriod"/>
-            </a:pPr>
-            <a:r>
-              <a:rPr lang="en-US" baseline="0" dirty="0"/>
-              <a:t>Add your Subtitle.  You do not need to use the Subtitle box if you don’t want to.  You can either leave it blank or delete it.</a:t>
-            </a:r>
-          </a:p>
-          <a:p>
-            <a:pPr marL="228600" lvl="0" indent="-228600" algn="l" rtl="0">
-              <a:spcBef>
-                <a:spcPts val="0"/>
-              </a:spcBef>
-              <a:spcAft>
-                <a:spcPts val="0"/>
-              </a:spcAft>
-              <a:buAutoNum type="arabicPeriod"/>
-            </a:pPr>
-            <a:r>
-              <a:rPr lang="en-US" baseline="0" dirty="0"/>
-              <a:t>Delete this text in the Notes section when you are finished.</a:t>
-            </a:r>
+            <a:endParaRPr lang="en-US" baseline="0" dirty="0"/>
           </a:p>
         </p:txBody>
       </p:sp>
@@ -3468,7 +4983,13 @@
   <p:cSld>
     <p:spTree>
       <p:nvGrpSpPr>
-        <p:cNvPr id="1" name="Shape 98"/>
+        <p:cNvPr id="1" name="Shape 92">
+          <a:extLst>
+            <a:ext uri="{FF2B5EF4-FFF2-40B4-BE49-F238E27FC236}">
+              <a16:creationId xmlns:a16="http://schemas.microsoft.com/office/drawing/2014/main" id="{20B1AEDF-8D48-F02D-55B2-069958D3FE4B}"/>
+            </a:ext>
+          </a:extLst>
+        </p:cNvPr>
         <p:cNvGrpSpPr/>
         <p:nvPr/>
       </p:nvGrpSpPr>
@@ -3482,7 +5003,13 @@
       </p:grpSpPr>
       <p:sp>
         <p:nvSpPr>
-          <p:cNvPr id="99" name="Google Shape;99;p8:notes"/>
+          <p:cNvPr id="93" name="Google Shape;93;p7:notes">
+            <a:extLst>
+              <a:ext uri="{FF2B5EF4-FFF2-40B4-BE49-F238E27FC236}">
+                <a16:creationId xmlns:a16="http://schemas.microsoft.com/office/drawing/2014/main" id="{3544076E-02CA-A494-9323-99B0AEDDFEBA}"/>
+              </a:ext>
+            </a:extLst>
+          </p:cNvPr>
           <p:cNvSpPr txBox="1">
             <a:spLocks noGrp="1"/>
           </p:cNvSpPr>
@@ -3526,11 +5053,11 @@
             </a:pPr>
             <a:r>
               <a:rPr lang="en-US" dirty="0"/>
-              <a:t>This is a slide that</a:t>
+              <a:t>This is another slide that you may want to use frequently. This slide </a:t>
             </a:r>
             <a:r>
               <a:rPr lang="en-US" baseline="0" dirty="0"/>
-              <a:t> can display text in 2 columns.  It is set up for a title, and text. Do not change the fonts/colors in any way. The only adjustment you should need to make is the size of the text if your presentation has a long title. </a:t>
+              <a:t>is set up for a title and text. Do not change the fonts/colors in any way. The only adjustment you should need to make is the size of the text if your presentation has a long title. </a:t>
             </a:r>
           </a:p>
           <a:p>
@@ -3560,7 +5087,7 @@
             </a:pPr>
             <a:r>
               <a:rPr lang="en-US" baseline="0" dirty="0"/>
-              <a:t>Add your content to each Text box. If you copy/paste information into this slide, make sure to Clear Formatting to ensure that the formatting for accessibility remains. You can find the Clear Formatting button on the Home Tab, within the Font section.  It looks like a Capital Letter A with an eraser.  The text will increase or decrease as you type to ensure that the proper sizing is used.</a:t>
+              <a:t>Add your content to the Text box. If you copy/paste information into this slide, make sure to Clear Formatting to ensure that the formatting for accessibility remains. You can find the Clear Formatting button on the Home Tab, within the Font section.  It looks like a Capital Letter A with an eraser.  The text will increase or decrease as you type to ensure that the proper sizing is used.</a:t>
             </a:r>
           </a:p>
           <a:p>
@@ -3612,23 +5139,17 @@
             </a:pPr>
             <a:endParaRPr lang="en-US" dirty="0"/>
           </a:p>
-          <a:p>
-            <a:pPr marL="0" lvl="0" indent="0" algn="l" rtl="0">
-              <a:spcBef>
-                <a:spcPts val="0"/>
-              </a:spcBef>
-              <a:spcAft>
-                <a:spcPts val="0"/>
-              </a:spcAft>
-              <a:buNone/>
-            </a:pPr>
-            <a:endParaRPr dirty="0"/>
-          </a:p>
         </p:txBody>
       </p:sp>
       <p:sp>
         <p:nvSpPr>
-          <p:cNvPr id="100" name="Google Shape;100;p8:notes"/>
+          <p:cNvPr id="94" name="Google Shape;94;p7:notes">
+            <a:extLst>
+              <a:ext uri="{FF2B5EF4-FFF2-40B4-BE49-F238E27FC236}">
+                <a16:creationId xmlns:a16="http://schemas.microsoft.com/office/drawing/2014/main" id="{8F9B4C84-5D73-847F-6C02-477C3DEEE365}"/>
+              </a:ext>
+            </a:extLst>
+          </p:cNvPr>
           <p:cNvSpPr>
             <a:spLocks noGrp="1" noRot="1" noChangeAspect="1"/>
           </p:cNvSpPr>
@@ -3668,6 +5189,11 @@
         </p:spPr>
       </p:sp>
     </p:spTree>
+    <p:extLst>
+      <p:ext uri="{BB962C8B-B14F-4D97-AF65-F5344CB8AC3E}">
+        <p14:creationId xmlns:p14="http://schemas.microsoft.com/office/powerpoint/2010/main" val="347749694"/>
+      </p:ext>
+    </p:extLst>
   </p:cSld>
   <p:clrMapOvr>
     <a:masterClrMapping/>
@@ -3680,7 +5206,13 @@
   <p:cSld>
     <p:spTree>
       <p:nvGrpSpPr>
-        <p:cNvPr id="1" name="Shape 105"/>
+        <p:cNvPr id="1" name="Shape 92">
+          <a:extLst>
+            <a:ext uri="{FF2B5EF4-FFF2-40B4-BE49-F238E27FC236}">
+              <a16:creationId xmlns:a16="http://schemas.microsoft.com/office/drawing/2014/main" id="{D9729EAC-19EB-9041-391D-49797CDEC7E6}"/>
+            </a:ext>
+          </a:extLst>
+        </p:cNvPr>
         <p:cNvGrpSpPr/>
         <p:nvPr/>
       </p:nvGrpSpPr>
@@ -3694,7 +5226,13 @@
       </p:grpSpPr>
       <p:sp>
         <p:nvSpPr>
-          <p:cNvPr id="106" name="Google Shape;106;p9:notes"/>
+          <p:cNvPr id="93" name="Google Shape;93;p7:notes">
+            <a:extLst>
+              <a:ext uri="{FF2B5EF4-FFF2-40B4-BE49-F238E27FC236}">
+                <a16:creationId xmlns:a16="http://schemas.microsoft.com/office/drawing/2014/main" id="{ED3DEC94-AA5B-941E-F040-9E9AACC3DA0B}"/>
+              </a:ext>
+            </a:extLst>
+          </p:cNvPr>
           <p:cNvSpPr txBox="1">
             <a:spLocks noGrp="1"/>
           </p:cNvSpPr>
@@ -3738,11 +5276,11 @@
             </a:pPr>
             <a:r>
               <a:rPr lang="en-US" dirty="0"/>
-              <a:t>This is a slide that</a:t>
+              <a:t>This is another slide that you may want to use frequently. This slide </a:t>
             </a:r>
             <a:r>
               <a:rPr lang="en-US" baseline="0" dirty="0"/>
-              <a:t> can display text in 2 columns and can include Sub-Headings for each column.  It is set up for a title, and text. Do not change the fonts/colors in any way. The only adjustment you should need to make is the size of the text if your presentation has a long title. </a:t>
+              <a:t>is set up for a title and text. Do not change the fonts/colors in any way. The only adjustment you should need to make is the size of the text if your presentation has a long title. </a:t>
             </a:r>
           </a:p>
           <a:p>
@@ -3772,22 +5310,7 @@
             </a:pPr>
             <a:r>
               <a:rPr lang="en-US" baseline="0" dirty="0"/>
-              <a:t>Add Sub Headings</a:t>
-            </a:r>
-          </a:p>
-          <a:p>
-            <a:pPr marL="228600" lvl="0" indent="-228600" algn="l" rtl="0">
-              <a:spcBef>
-                <a:spcPts val="0"/>
-              </a:spcBef>
-              <a:spcAft>
-                <a:spcPts val="0"/>
-              </a:spcAft>
-              <a:buAutoNum type="arabicPeriod"/>
-            </a:pPr>
-            <a:r>
-              <a:rPr lang="en-US" baseline="0" dirty="0"/>
-              <a:t>Add your content to each Text box. If you copy/paste information into this slide, make sure to Clear Formatting to ensure that the formatting for accessibility remains. You can find the Clear Formatting button on the Home Tab, within the Font section.  It looks like a Capital Letter A with an eraser.  The text will increase or decrease as you type to ensure that the proper sizing is used.</a:t>
+              <a:t>Add your content to the Text box. If you copy/paste information into this slide, make sure to Clear Formatting to ensure that the formatting for accessibility remains. You can find the Clear Formatting button on the Home Tab, within the Font section.  It looks like a Capital Letter A with an eraser.  The text will increase or decrease as you type to ensure that the proper sizing is used.</a:t>
             </a:r>
           </a:p>
           <a:p>
@@ -3839,23 +5362,17 @@
             </a:pPr>
             <a:endParaRPr lang="en-US" dirty="0"/>
           </a:p>
-          <a:p>
-            <a:pPr marL="0" lvl="0" indent="0" algn="l" rtl="0">
-              <a:spcBef>
-                <a:spcPts val="0"/>
-              </a:spcBef>
-              <a:spcAft>
-                <a:spcPts val="0"/>
-              </a:spcAft>
-              <a:buNone/>
-            </a:pPr>
-            <a:endParaRPr lang="en-US" dirty="0"/>
-          </a:p>
         </p:txBody>
       </p:sp>
       <p:sp>
         <p:nvSpPr>
-          <p:cNvPr id="107" name="Google Shape;107;p9:notes"/>
+          <p:cNvPr id="94" name="Google Shape;94;p7:notes">
+            <a:extLst>
+              <a:ext uri="{FF2B5EF4-FFF2-40B4-BE49-F238E27FC236}">
+                <a16:creationId xmlns:a16="http://schemas.microsoft.com/office/drawing/2014/main" id="{EA096668-0FDC-4C08-0357-BCD510E20EE1}"/>
+              </a:ext>
+            </a:extLst>
+          </p:cNvPr>
           <p:cNvSpPr>
             <a:spLocks noGrp="1" noRot="1" noChangeAspect="1"/>
           </p:cNvSpPr>
@@ -3895,6 +5412,11 @@
         </p:spPr>
       </p:sp>
     </p:spTree>
+    <p:extLst>
+      <p:ext uri="{BB962C8B-B14F-4D97-AF65-F5344CB8AC3E}">
+        <p14:creationId xmlns:p14="http://schemas.microsoft.com/office/powerpoint/2010/main" val="2806124492"/>
+      </p:ext>
+    </p:extLst>
   </p:cSld>
   <p:clrMapOvr>
     <a:masterClrMapping/>
@@ -3907,7 +5429,13 @@
   <p:cSld>
     <p:spTree>
       <p:nvGrpSpPr>
-        <p:cNvPr id="1" name="Shape 119"/>
+        <p:cNvPr id="1" name="Shape 92">
+          <a:extLst>
+            <a:ext uri="{FF2B5EF4-FFF2-40B4-BE49-F238E27FC236}">
+              <a16:creationId xmlns:a16="http://schemas.microsoft.com/office/drawing/2014/main" id="{1093E49E-0B64-0785-0307-8A54C004626E}"/>
+            </a:ext>
+          </a:extLst>
+        </p:cNvPr>
         <p:cNvGrpSpPr/>
         <p:nvPr/>
       </p:nvGrpSpPr>
@@ -3921,7 +5449,13 @@
       </p:grpSpPr>
       <p:sp>
         <p:nvSpPr>
-          <p:cNvPr id="120" name="Google Shape;120;p11:notes"/>
+          <p:cNvPr id="93" name="Google Shape;93;p7:notes">
+            <a:extLst>
+              <a:ext uri="{FF2B5EF4-FFF2-40B4-BE49-F238E27FC236}">
+                <a16:creationId xmlns:a16="http://schemas.microsoft.com/office/drawing/2014/main" id="{09661981-4BDE-C4B5-CFBD-2D939DC96F0F}"/>
+              </a:ext>
+            </a:extLst>
+          </p:cNvPr>
           <p:cNvSpPr txBox="1">
             <a:spLocks noGrp="1"/>
           </p:cNvSpPr>
@@ -3965,11 +5499,11 @@
             </a:pPr>
             <a:r>
               <a:rPr lang="en-US" dirty="0"/>
-              <a:t>This is a slide that</a:t>
+              <a:t>This is another slide that you may want to use frequently. This slide </a:t>
             </a:r>
             <a:r>
               <a:rPr lang="en-US" baseline="0" dirty="0"/>
-              <a:t> can display text in 2 columns.  It is set up for a title, and text. Do not change the fonts/colors in any way. The only adjustment you should need to make is the size of the text if your presentation has a long title. </a:t>
+              <a:t>is set up for a title and text. Do not change the fonts/colors in any way. The only adjustment you should need to make is the size of the text if your presentation has a long title. </a:t>
             </a:r>
           </a:p>
           <a:p>
@@ -3999,7 +5533,7 @@
             </a:pPr>
             <a:r>
               <a:rPr lang="en-US" baseline="0" dirty="0"/>
-              <a:t>Add your content to each Text box. If you copy/paste information into this slide, make sure to Clear Formatting to ensure that the formatting for accessibility remains. You can find the Clear Formatting button on the Home Tab, within the Font section.  It looks like a Capital Letter A with an eraser.  The text will increase or decrease as you type to ensure that the proper sizing is used.</a:t>
+              <a:t>Add your content to the Text box. If you copy/paste information into this slide, make sure to Clear Formatting to ensure that the formatting for accessibility remains. You can find the Clear Formatting button on the Home Tab, within the Font section.  It looks like a Capital Letter A with an eraser.  The text will increase or decrease as you type to ensure that the proper sizing is used.</a:t>
             </a:r>
           </a:p>
           <a:p>
@@ -4051,35 +5585,17 @@
             </a:pPr>
             <a:endParaRPr lang="en-US" dirty="0"/>
           </a:p>
-          <a:p>
-            <a:pPr marL="0" lvl="0" indent="0" algn="l" rtl="0">
-              <a:spcBef>
-                <a:spcPts val="0"/>
-              </a:spcBef>
-              <a:spcAft>
-                <a:spcPts val="0"/>
-              </a:spcAft>
-              <a:buNone/>
-            </a:pPr>
-            <a:endParaRPr lang="en-US" dirty="0"/>
-          </a:p>
-          <a:p>
-            <a:pPr marL="0" lvl="0" indent="0" algn="l" rtl="0">
-              <a:spcBef>
-                <a:spcPts val="0"/>
-              </a:spcBef>
-              <a:spcAft>
-                <a:spcPts val="0"/>
-              </a:spcAft>
-              <a:buNone/>
-            </a:pPr>
-            <a:endParaRPr dirty="0"/>
-          </a:p>
         </p:txBody>
       </p:sp>
       <p:sp>
         <p:nvSpPr>
-          <p:cNvPr id="121" name="Google Shape;121;p11:notes"/>
+          <p:cNvPr id="94" name="Google Shape;94;p7:notes">
+            <a:extLst>
+              <a:ext uri="{FF2B5EF4-FFF2-40B4-BE49-F238E27FC236}">
+                <a16:creationId xmlns:a16="http://schemas.microsoft.com/office/drawing/2014/main" id="{3A36DE25-DE82-3CF8-C4D9-066BFFE4ED0C}"/>
+              </a:ext>
+            </a:extLst>
+          </p:cNvPr>
           <p:cNvSpPr>
             <a:spLocks noGrp="1" noRot="1" noChangeAspect="1"/>
           </p:cNvSpPr>
@@ -4119,6 +5635,11 @@
         </p:spPr>
       </p:sp>
     </p:spTree>
+    <p:extLst>
+      <p:ext uri="{BB962C8B-B14F-4D97-AF65-F5344CB8AC3E}">
+        <p14:creationId xmlns:p14="http://schemas.microsoft.com/office/powerpoint/2010/main" val="2259616221"/>
+      </p:ext>
+    </p:extLst>
   </p:cSld>
   <p:clrMapOvr>
     <a:masterClrMapping/>
@@ -4131,7 +5652,13 @@
   <p:cSld>
     <p:spTree>
       <p:nvGrpSpPr>
-        <p:cNvPr id="1" name="Shape 126"/>
+        <p:cNvPr id="1" name="Shape 92">
+          <a:extLst>
+            <a:ext uri="{FF2B5EF4-FFF2-40B4-BE49-F238E27FC236}">
+              <a16:creationId xmlns:a16="http://schemas.microsoft.com/office/drawing/2014/main" id="{90F2C582-6DB9-C5C5-050E-A79CD9765F54}"/>
+            </a:ext>
+          </a:extLst>
+        </p:cNvPr>
         <p:cNvGrpSpPr/>
         <p:nvPr/>
       </p:nvGrpSpPr>
@@ -4145,7 +5672,13 @@
       </p:grpSpPr>
       <p:sp>
         <p:nvSpPr>
-          <p:cNvPr id="127" name="Google Shape;127;p12:notes"/>
+          <p:cNvPr id="93" name="Google Shape;93;p7:notes">
+            <a:extLst>
+              <a:ext uri="{FF2B5EF4-FFF2-40B4-BE49-F238E27FC236}">
+                <a16:creationId xmlns:a16="http://schemas.microsoft.com/office/drawing/2014/main" id="{801A10D8-CBAB-2D90-750C-DFFB8384E2DB}"/>
+              </a:ext>
+            </a:extLst>
+          </p:cNvPr>
           <p:cNvSpPr txBox="1">
             <a:spLocks noGrp="1"/>
           </p:cNvSpPr>
@@ -4189,11 +5722,11 @@
             </a:pPr>
             <a:r>
               <a:rPr lang="en-US" dirty="0"/>
-              <a:t>This is a slide that</a:t>
+              <a:t>This is another slide that you may want to use frequently. This slide </a:t>
             </a:r>
             <a:r>
               <a:rPr lang="en-US" baseline="0" dirty="0"/>
-              <a:t> can display information in 2 columns, one for text and for an image, table, or other type of item. Do not change the fonts/colors in any way. The only adjustment you should need to make is the size of the text if your presentation has a long title. </a:t>
+              <a:t>is set up for a title and text. Do not change the fonts/colors in any way. The only adjustment you should need to make is the size of the text if your presentation has a long title. </a:t>
             </a:r>
           </a:p>
           <a:p>
@@ -4224,21 +5757,6 @@
             <a:r>
               <a:rPr lang="en-US" baseline="0" dirty="0"/>
               <a:t>Add your content to the Text box. If you copy/paste information into this slide, make sure to Clear Formatting to ensure that the formatting for accessibility remains. You can find the Clear Formatting button on the Home Tab, within the Font section.  It looks like a Capital Letter A with an eraser.  The text will increase or decrease as you type to ensure that the proper sizing is used.</a:t>
-            </a:r>
-          </a:p>
-          <a:p>
-            <a:pPr marL="228600" lvl="0" indent="-228600" algn="l" rtl="0">
-              <a:spcBef>
-                <a:spcPts val="0"/>
-              </a:spcBef>
-              <a:spcAft>
-                <a:spcPts val="0"/>
-              </a:spcAft>
-              <a:buAutoNum type="arabicPeriod"/>
-            </a:pPr>
-            <a:r>
-              <a:rPr lang="en-US" baseline="0" dirty="0"/>
-              <a:t>Add your image to the Image box.  Select the icon in the middle of the image box to locate the image that you want to upload to that image box.  Remember, if you add an image, you must also add the ALT Text for that image.  More information on ALT Text can be located in the Faculty Guide for this Template.</a:t>
             </a:r>
           </a:p>
           <a:p>
@@ -4290,35 +5808,17 @@
             </a:pPr>
             <a:endParaRPr lang="en-US" dirty="0"/>
           </a:p>
-          <a:p>
-            <a:pPr marL="0" lvl="0" indent="0" algn="l" rtl="0">
-              <a:spcBef>
-                <a:spcPts val="0"/>
-              </a:spcBef>
-              <a:spcAft>
-                <a:spcPts val="0"/>
-              </a:spcAft>
-              <a:buNone/>
-            </a:pPr>
-            <a:endParaRPr lang="en-US" dirty="0"/>
-          </a:p>
-          <a:p>
-            <a:pPr marL="0" lvl="0" indent="0" algn="l" rtl="0">
-              <a:spcBef>
-                <a:spcPts val="0"/>
-              </a:spcBef>
-              <a:spcAft>
-                <a:spcPts val="0"/>
-              </a:spcAft>
-              <a:buNone/>
-            </a:pPr>
-            <a:endParaRPr dirty="0"/>
-          </a:p>
         </p:txBody>
       </p:sp>
       <p:sp>
         <p:nvSpPr>
-          <p:cNvPr id="128" name="Google Shape;128;p12:notes"/>
+          <p:cNvPr id="94" name="Google Shape;94;p7:notes">
+            <a:extLst>
+              <a:ext uri="{FF2B5EF4-FFF2-40B4-BE49-F238E27FC236}">
+                <a16:creationId xmlns:a16="http://schemas.microsoft.com/office/drawing/2014/main" id="{2F7CD7A8-6323-940E-2201-8E60B9076616}"/>
+              </a:ext>
+            </a:extLst>
+          </p:cNvPr>
           <p:cNvSpPr>
             <a:spLocks noGrp="1" noRot="1" noChangeAspect="1"/>
           </p:cNvSpPr>
@@ -4358,6 +5858,11 @@
         </p:spPr>
       </p:sp>
     </p:spTree>
+    <p:extLst>
+      <p:ext uri="{BB962C8B-B14F-4D97-AF65-F5344CB8AC3E}">
+        <p14:creationId xmlns:p14="http://schemas.microsoft.com/office/powerpoint/2010/main" val="3837253857"/>
+      </p:ext>
+    </p:extLst>
   </p:cSld>
   <p:clrMapOvr>
     <a:masterClrMapping/>
@@ -4723,926 +6228,6 @@
 </p:sldLayout>
 </file>
 
-<file path=ppt/slideLayouts/slideLayout10.xml><?xml version="1.0" encoding="utf-8"?>
-<p:sldLayout xmlns:a="http://schemas.openxmlformats.org/drawingml/2006/main" xmlns:r="http://schemas.openxmlformats.org/officeDocument/2006/relationships" xmlns:p="http://schemas.openxmlformats.org/presentationml/2006/main" matchingName="1_Section Header">
-  <p:cSld name="1_Section Header">
-    <p:bg>
-      <p:bgPr>
-        <a:blipFill>
-          <a:blip r:embed="rId2">
-            <a:alphaModFix/>
-          </a:blip>
-          <a:stretch>
-            <a:fillRect/>
-          </a:stretch>
-        </a:blipFill>
-        <a:effectLst/>
-      </p:bgPr>
-    </p:bg>
-    <p:spTree>
-      <p:nvGrpSpPr>
-        <p:cNvPr id="1" name="Shape 48"/>
-        <p:cNvGrpSpPr/>
-        <p:nvPr/>
-      </p:nvGrpSpPr>
-      <p:grpSpPr>
-        <a:xfrm>
-          <a:off x="0" y="0"/>
-          <a:ext cx="0" cy="0"/>
-          <a:chOff x="0" y="0"/>
-          <a:chExt cx="0" cy="0"/>
-        </a:xfrm>
-      </p:grpSpPr>
-      <p:sp>
-        <p:nvSpPr>
-          <p:cNvPr id="49" name="Google Shape;49;p24"/>
-          <p:cNvSpPr txBox="1">
-            <a:spLocks noGrp="1"/>
-          </p:cNvSpPr>
-          <p:nvPr>
-            <p:ph type="body" idx="1"/>
-          </p:nvPr>
-        </p:nvSpPr>
-        <p:spPr>
-          <a:xfrm>
-            <a:off x="838200" y="4864295"/>
-            <a:ext cx="7504134" cy="1500187"/>
-          </a:xfrm>
-          <a:prstGeom prst="rect">
-            <a:avLst/>
-          </a:prstGeom>
-          <a:noFill/>
-          <a:ln>
-            <a:noFill/>
-          </a:ln>
-        </p:spPr>
-        <p:txBody>
-          <a:bodyPr spcFirstLastPara="1" wrap="square" lIns="91425" tIns="45700" rIns="91425" bIns="45700" anchor="t" anchorCtr="0">
-            <a:normAutofit/>
-          </a:bodyPr>
-          <a:lstStyle>
-            <a:lvl1pPr marL="457200" marR="0" lvl="0" indent="-228600" algn="l">
-              <a:lnSpc>
-                <a:spcPct val="100000"/>
-              </a:lnSpc>
-              <a:spcBef>
-                <a:spcPts val="400"/>
-              </a:spcBef>
-              <a:spcAft>
-                <a:spcPts val="0"/>
-              </a:spcAft>
-              <a:buClr>
-                <a:schemeClr val="dk1"/>
-              </a:buClr>
-              <a:buSzPts val="2000"/>
-              <a:buFont typeface="Calibri"/>
-              <a:buNone/>
-              <a:defRPr sz="2000">
-                <a:solidFill>
-                  <a:schemeClr val="dk1"/>
-                </a:solidFill>
-              </a:defRPr>
-            </a:lvl1pPr>
-            <a:lvl2pPr marL="914400" lvl="1" indent="-228600" algn="l">
-              <a:lnSpc>
-                <a:spcPct val="90000"/>
-              </a:lnSpc>
-              <a:spcBef>
-                <a:spcPts val="500"/>
-              </a:spcBef>
-              <a:spcAft>
-                <a:spcPts val="0"/>
-              </a:spcAft>
-              <a:buSzPts val="1500"/>
-              <a:buNone/>
-              <a:defRPr sz="2000">
-                <a:solidFill>
-                  <a:srgbClr val="888888"/>
-                </a:solidFill>
-              </a:defRPr>
-            </a:lvl2pPr>
-            <a:lvl3pPr marL="1371600" lvl="2" indent="-228600" algn="l">
-              <a:lnSpc>
-                <a:spcPct val="90000"/>
-              </a:lnSpc>
-              <a:spcBef>
-                <a:spcPts val="500"/>
-              </a:spcBef>
-              <a:spcAft>
-                <a:spcPts val="0"/>
-              </a:spcAft>
-              <a:buSzPts val="1350"/>
-              <a:buNone/>
-              <a:defRPr sz="1800">
-                <a:solidFill>
-                  <a:srgbClr val="888888"/>
-                </a:solidFill>
-              </a:defRPr>
-            </a:lvl3pPr>
-            <a:lvl4pPr marL="1828800" lvl="3" indent="-228600" algn="l">
-              <a:lnSpc>
-                <a:spcPct val="90000"/>
-              </a:lnSpc>
-              <a:spcBef>
-                <a:spcPts val="500"/>
-              </a:spcBef>
-              <a:spcAft>
-                <a:spcPts val="0"/>
-              </a:spcAft>
-              <a:buSzPts val="1200"/>
-              <a:buNone/>
-              <a:defRPr sz="1600">
-                <a:solidFill>
-                  <a:srgbClr val="888888"/>
-                </a:solidFill>
-              </a:defRPr>
-            </a:lvl4pPr>
-            <a:lvl5pPr marL="2286000" lvl="4" indent="-228600" algn="l">
-              <a:lnSpc>
-                <a:spcPct val="90000"/>
-              </a:lnSpc>
-              <a:spcBef>
-                <a:spcPts val="500"/>
-              </a:spcBef>
-              <a:spcAft>
-                <a:spcPts val="0"/>
-              </a:spcAft>
-              <a:buSzPts val="1200"/>
-              <a:buNone/>
-              <a:defRPr sz="1600">
-                <a:solidFill>
-                  <a:srgbClr val="888888"/>
-                </a:solidFill>
-              </a:defRPr>
-            </a:lvl5pPr>
-            <a:lvl6pPr marL="2743200" lvl="5" indent="-228600" algn="l">
-              <a:lnSpc>
-                <a:spcPct val="90000"/>
-              </a:lnSpc>
-              <a:spcBef>
-                <a:spcPts val="500"/>
-              </a:spcBef>
-              <a:spcAft>
-                <a:spcPts val="0"/>
-              </a:spcAft>
-              <a:buClr>
-                <a:srgbClr val="888888"/>
-              </a:buClr>
-              <a:buSzPts val="1600"/>
-              <a:buNone/>
-              <a:defRPr sz="1600">
-                <a:solidFill>
-                  <a:srgbClr val="888888"/>
-                </a:solidFill>
-              </a:defRPr>
-            </a:lvl6pPr>
-            <a:lvl7pPr marL="3200400" lvl="6" indent="-228600" algn="l">
-              <a:lnSpc>
-                <a:spcPct val="90000"/>
-              </a:lnSpc>
-              <a:spcBef>
-                <a:spcPts val="500"/>
-              </a:spcBef>
-              <a:spcAft>
-                <a:spcPts val="0"/>
-              </a:spcAft>
-              <a:buClr>
-                <a:srgbClr val="888888"/>
-              </a:buClr>
-              <a:buSzPts val="1600"/>
-              <a:buNone/>
-              <a:defRPr sz="1600">
-                <a:solidFill>
-                  <a:srgbClr val="888888"/>
-                </a:solidFill>
-              </a:defRPr>
-            </a:lvl7pPr>
-            <a:lvl8pPr marL="3657600" lvl="7" indent="-228600" algn="l">
-              <a:lnSpc>
-                <a:spcPct val="90000"/>
-              </a:lnSpc>
-              <a:spcBef>
-                <a:spcPts val="500"/>
-              </a:spcBef>
-              <a:spcAft>
-                <a:spcPts val="0"/>
-              </a:spcAft>
-              <a:buClr>
-                <a:srgbClr val="888888"/>
-              </a:buClr>
-              <a:buSzPts val="1600"/>
-              <a:buNone/>
-              <a:defRPr sz="1600">
-                <a:solidFill>
-                  <a:srgbClr val="888888"/>
-                </a:solidFill>
-              </a:defRPr>
-            </a:lvl8pPr>
-            <a:lvl9pPr marL="4114800" lvl="8" indent="-228600" algn="l">
-              <a:lnSpc>
-                <a:spcPct val="90000"/>
-              </a:lnSpc>
-              <a:spcBef>
-                <a:spcPts val="500"/>
-              </a:spcBef>
-              <a:spcAft>
-                <a:spcPts val="0"/>
-              </a:spcAft>
-              <a:buClr>
-                <a:srgbClr val="888888"/>
-              </a:buClr>
-              <a:buSzPts val="1600"/>
-              <a:buNone/>
-              <a:defRPr sz="1600">
-                <a:solidFill>
-                  <a:srgbClr val="888888"/>
-                </a:solidFill>
-              </a:defRPr>
-            </a:lvl9pPr>
-          </a:lstStyle>
-          <a:p>
-            <a:endParaRPr dirty="0"/>
-          </a:p>
-        </p:txBody>
-      </p:sp>
-      <p:sp>
-        <p:nvSpPr>
-          <p:cNvPr id="50" name="Google Shape;50;p24"/>
-          <p:cNvSpPr txBox="1">
-            <a:spLocks noGrp="1"/>
-          </p:cNvSpPr>
-          <p:nvPr>
-            <p:ph type="title"/>
-          </p:nvPr>
-        </p:nvSpPr>
-        <p:spPr>
-          <a:xfrm>
-            <a:off x="122724" y="4057812"/>
-            <a:ext cx="10515600" cy="531651"/>
-          </a:xfrm>
-          <a:prstGeom prst="rect">
-            <a:avLst/>
-          </a:prstGeom>
-          <a:noFill/>
-          <a:ln>
-            <a:noFill/>
-          </a:ln>
-        </p:spPr>
-        <p:txBody>
-          <a:bodyPr spcFirstLastPara="1" wrap="square" lIns="91425" tIns="45700" rIns="91425" bIns="45700" anchor="b" anchorCtr="0">
-            <a:normAutofit/>
-          </a:bodyPr>
-          <a:lstStyle>
-            <a:lvl1pPr lvl="0" algn="l">
-              <a:lnSpc>
-                <a:spcPct val="90000"/>
-              </a:lnSpc>
-              <a:spcBef>
-                <a:spcPts val="0"/>
-              </a:spcBef>
-              <a:spcAft>
-                <a:spcPts val="0"/>
-              </a:spcAft>
-              <a:buClr>
-                <a:schemeClr val="lt1"/>
-              </a:buClr>
-              <a:buSzPts val="2800"/>
-              <a:buFont typeface="Calibri"/>
-              <a:buNone/>
-              <a:defRPr sz="2800" b="1">
-                <a:solidFill>
-                  <a:schemeClr val="lt1"/>
-                </a:solidFill>
-                <a:latin typeface="Calibri"/>
-                <a:ea typeface="Calibri"/>
-                <a:cs typeface="Calibri"/>
-                <a:sym typeface="Calibri"/>
-              </a:defRPr>
-            </a:lvl1pPr>
-            <a:lvl2pPr lvl="1">
-              <a:spcBef>
-                <a:spcPts val="0"/>
-              </a:spcBef>
-              <a:spcAft>
-                <a:spcPts val="0"/>
-              </a:spcAft>
-              <a:buSzPts val="1400"/>
-              <a:buNone/>
-              <a:defRPr/>
-            </a:lvl2pPr>
-            <a:lvl3pPr lvl="2">
-              <a:spcBef>
-                <a:spcPts val="0"/>
-              </a:spcBef>
-              <a:spcAft>
-                <a:spcPts val="0"/>
-              </a:spcAft>
-              <a:buSzPts val="1400"/>
-              <a:buNone/>
-              <a:defRPr/>
-            </a:lvl3pPr>
-            <a:lvl4pPr lvl="3">
-              <a:spcBef>
-                <a:spcPts val="0"/>
-              </a:spcBef>
-              <a:spcAft>
-                <a:spcPts val="0"/>
-              </a:spcAft>
-              <a:buSzPts val="1400"/>
-              <a:buNone/>
-              <a:defRPr/>
-            </a:lvl4pPr>
-            <a:lvl5pPr lvl="4">
-              <a:spcBef>
-                <a:spcPts val="0"/>
-              </a:spcBef>
-              <a:spcAft>
-                <a:spcPts val="0"/>
-              </a:spcAft>
-              <a:buSzPts val="1400"/>
-              <a:buNone/>
-              <a:defRPr/>
-            </a:lvl5pPr>
-            <a:lvl6pPr lvl="5">
-              <a:spcBef>
-                <a:spcPts val="0"/>
-              </a:spcBef>
-              <a:spcAft>
-                <a:spcPts val="0"/>
-              </a:spcAft>
-              <a:buSzPts val="1400"/>
-              <a:buNone/>
-              <a:defRPr/>
-            </a:lvl6pPr>
-            <a:lvl7pPr lvl="6">
-              <a:spcBef>
-                <a:spcPts val="0"/>
-              </a:spcBef>
-              <a:spcAft>
-                <a:spcPts val="0"/>
-              </a:spcAft>
-              <a:buSzPts val="1400"/>
-              <a:buNone/>
-              <a:defRPr/>
-            </a:lvl7pPr>
-            <a:lvl8pPr lvl="7">
-              <a:spcBef>
-                <a:spcPts val="0"/>
-              </a:spcBef>
-              <a:spcAft>
-                <a:spcPts val="0"/>
-              </a:spcAft>
-              <a:buSzPts val="1400"/>
-              <a:buNone/>
-              <a:defRPr/>
-            </a:lvl8pPr>
-            <a:lvl9pPr lvl="8">
-              <a:spcBef>
-                <a:spcPts val="0"/>
-              </a:spcBef>
-              <a:spcAft>
-                <a:spcPts val="0"/>
-              </a:spcAft>
-              <a:buSzPts val="1400"/>
-              <a:buNone/>
-              <a:defRPr/>
-            </a:lvl9pPr>
-          </a:lstStyle>
-          <a:p>
-            <a:endParaRPr/>
-          </a:p>
-        </p:txBody>
-      </p:sp>
-    </p:spTree>
-  </p:cSld>
-  <p:clrMapOvr>
-    <a:masterClrMapping/>
-  </p:clrMapOvr>
-</p:sldLayout>
-</file>
-
-<file path=ppt/slideLayouts/slideLayout11.xml><?xml version="1.0" encoding="utf-8"?>
-<p:sldLayout xmlns:a="http://schemas.openxmlformats.org/drawingml/2006/main" xmlns:r="http://schemas.openxmlformats.org/officeDocument/2006/relationships" xmlns:p="http://schemas.openxmlformats.org/presentationml/2006/main" matchingName="2_Section Header">
-  <p:cSld name="2_Section Header">
-    <p:bg>
-      <p:bgPr>
-        <a:blipFill>
-          <a:blip r:embed="rId2">
-            <a:alphaModFix/>
-          </a:blip>
-          <a:stretch>
-            <a:fillRect/>
-          </a:stretch>
-        </a:blipFill>
-        <a:effectLst/>
-      </p:bgPr>
-    </p:bg>
-    <p:spTree>
-      <p:nvGrpSpPr>
-        <p:cNvPr id="1" name="Shape 51"/>
-        <p:cNvGrpSpPr/>
-        <p:nvPr/>
-      </p:nvGrpSpPr>
-      <p:grpSpPr>
-        <a:xfrm>
-          <a:off x="0" y="0"/>
-          <a:ext cx="0" cy="0"/>
-          <a:chOff x="0" y="0"/>
-          <a:chExt cx="0" cy="0"/>
-        </a:xfrm>
-      </p:grpSpPr>
-      <p:sp>
-        <p:nvSpPr>
-          <p:cNvPr id="52" name="Google Shape;52;p25"/>
-          <p:cNvSpPr txBox="1">
-            <a:spLocks noGrp="1"/>
-          </p:cNvSpPr>
-          <p:nvPr>
-            <p:ph type="title"/>
-          </p:nvPr>
-        </p:nvSpPr>
-        <p:spPr>
-          <a:xfrm>
-            <a:off x="0" y="493518"/>
-            <a:ext cx="10515600" cy="531651"/>
-          </a:xfrm>
-          <a:prstGeom prst="rect">
-            <a:avLst/>
-          </a:prstGeom>
-          <a:noFill/>
-          <a:ln>
-            <a:noFill/>
-          </a:ln>
-        </p:spPr>
-        <p:txBody>
-          <a:bodyPr spcFirstLastPara="1" wrap="square" lIns="91425" tIns="45700" rIns="91425" bIns="45700" anchor="b" anchorCtr="0">
-            <a:normAutofit/>
-          </a:bodyPr>
-          <a:lstStyle>
-            <a:lvl1pPr lvl="0" algn="l">
-              <a:lnSpc>
-                <a:spcPct val="90000"/>
-              </a:lnSpc>
-              <a:spcBef>
-                <a:spcPts val="0"/>
-              </a:spcBef>
-              <a:spcAft>
-                <a:spcPts val="0"/>
-              </a:spcAft>
-              <a:buClr>
-                <a:schemeClr val="lt1"/>
-              </a:buClr>
-              <a:buSzPts val="2800"/>
-              <a:buFont typeface="Calibri"/>
-              <a:buNone/>
-              <a:defRPr sz="2800" b="1">
-                <a:solidFill>
-                  <a:schemeClr val="lt1"/>
-                </a:solidFill>
-                <a:latin typeface="Calibri"/>
-                <a:ea typeface="Calibri"/>
-                <a:cs typeface="Calibri"/>
-                <a:sym typeface="Calibri"/>
-              </a:defRPr>
-            </a:lvl1pPr>
-            <a:lvl2pPr lvl="1">
-              <a:spcBef>
-                <a:spcPts val="0"/>
-              </a:spcBef>
-              <a:spcAft>
-                <a:spcPts val="0"/>
-              </a:spcAft>
-              <a:buSzPts val="1400"/>
-              <a:buNone/>
-              <a:defRPr/>
-            </a:lvl2pPr>
-            <a:lvl3pPr lvl="2">
-              <a:spcBef>
-                <a:spcPts val="0"/>
-              </a:spcBef>
-              <a:spcAft>
-                <a:spcPts val="0"/>
-              </a:spcAft>
-              <a:buSzPts val="1400"/>
-              <a:buNone/>
-              <a:defRPr/>
-            </a:lvl3pPr>
-            <a:lvl4pPr lvl="3">
-              <a:spcBef>
-                <a:spcPts val="0"/>
-              </a:spcBef>
-              <a:spcAft>
-                <a:spcPts val="0"/>
-              </a:spcAft>
-              <a:buSzPts val="1400"/>
-              <a:buNone/>
-              <a:defRPr/>
-            </a:lvl4pPr>
-            <a:lvl5pPr lvl="4">
-              <a:spcBef>
-                <a:spcPts val="0"/>
-              </a:spcBef>
-              <a:spcAft>
-                <a:spcPts val="0"/>
-              </a:spcAft>
-              <a:buSzPts val="1400"/>
-              <a:buNone/>
-              <a:defRPr/>
-            </a:lvl5pPr>
-            <a:lvl6pPr lvl="5">
-              <a:spcBef>
-                <a:spcPts val="0"/>
-              </a:spcBef>
-              <a:spcAft>
-                <a:spcPts val="0"/>
-              </a:spcAft>
-              <a:buSzPts val="1400"/>
-              <a:buNone/>
-              <a:defRPr/>
-            </a:lvl6pPr>
-            <a:lvl7pPr lvl="6">
-              <a:spcBef>
-                <a:spcPts val="0"/>
-              </a:spcBef>
-              <a:spcAft>
-                <a:spcPts val="0"/>
-              </a:spcAft>
-              <a:buSzPts val="1400"/>
-              <a:buNone/>
-              <a:defRPr/>
-            </a:lvl7pPr>
-            <a:lvl8pPr lvl="7">
-              <a:spcBef>
-                <a:spcPts val="0"/>
-              </a:spcBef>
-              <a:spcAft>
-                <a:spcPts val="0"/>
-              </a:spcAft>
-              <a:buSzPts val="1400"/>
-              <a:buNone/>
-              <a:defRPr/>
-            </a:lvl8pPr>
-            <a:lvl9pPr lvl="8">
-              <a:spcBef>
-                <a:spcPts val="0"/>
-              </a:spcBef>
-              <a:spcAft>
-                <a:spcPts val="0"/>
-              </a:spcAft>
-              <a:buSzPts val="1400"/>
-              <a:buNone/>
-              <a:defRPr/>
-            </a:lvl9pPr>
-          </a:lstStyle>
-          <a:p>
-            <a:endParaRPr/>
-          </a:p>
-        </p:txBody>
-      </p:sp>
-    </p:spTree>
-  </p:cSld>
-  <p:clrMapOvr>
-    <a:masterClrMapping/>
-  </p:clrMapOvr>
-</p:sldLayout>
-</file>
-
-<file path=ppt/slideLayouts/slideLayout12.xml><?xml version="1.0" encoding="utf-8"?>
-<p:sldLayout xmlns:a="http://schemas.openxmlformats.org/drawingml/2006/main" xmlns:r="http://schemas.openxmlformats.org/officeDocument/2006/relationships" xmlns:p="http://schemas.openxmlformats.org/presentationml/2006/main" matchingName="Title and Vertical Text" type="vertTx">
-  <p:cSld name="VERTICAL_TEXT">
-    <p:spTree>
-      <p:nvGrpSpPr>
-        <p:cNvPr id="1" name="Shape 53"/>
-        <p:cNvGrpSpPr/>
-        <p:nvPr/>
-      </p:nvGrpSpPr>
-      <p:grpSpPr>
-        <a:xfrm>
-          <a:off x="0" y="0"/>
-          <a:ext cx="0" cy="0"/>
-          <a:chOff x="0" y="0"/>
-          <a:chExt cx="0" cy="0"/>
-        </a:xfrm>
-      </p:grpSpPr>
-      <p:sp>
-        <p:nvSpPr>
-          <p:cNvPr id="54" name="Google Shape;54;p26"/>
-          <p:cNvSpPr txBox="1">
-            <a:spLocks noGrp="1"/>
-          </p:cNvSpPr>
-          <p:nvPr>
-            <p:ph type="body" idx="1"/>
-          </p:nvPr>
-        </p:nvSpPr>
-        <p:spPr>
-          <a:xfrm rot="5400000">
-            <a:off x="4038600" y="-1371600"/>
-            <a:ext cx="4114800" cy="10515600"/>
-          </a:xfrm>
-          <a:prstGeom prst="rect">
-            <a:avLst/>
-          </a:prstGeom>
-          <a:noFill/>
-          <a:ln>
-            <a:noFill/>
-          </a:ln>
-        </p:spPr>
-        <p:txBody>
-          <a:bodyPr spcFirstLastPara="1" wrap="square" lIns="91425" tIns="45700" rIns="91425" bIns="45700" anchor="t" anchorCtr="0">
-            <a:normAutofit/>
-          </a:bodyPr>
-          <a:lstStyle>
-            <a:lvl1pPr marL="457200" lvl="0" indent="-314325" algn="l">
-              <a:lnSpc>
-                <a:spcPct val="100000"/>
-              </a:lnSpc>
-              <a:spcBef>
-                <a:spcPts val="600"/>
-              </a:spcBef>
-              <a:spcAft>
-                <a:spcPts val="0"/>
-              </a:spcAft>
-              <a:buSzPts val="1350"/>
-              <a:buChar char="•"/>
-              <a:defRPr/>
-            </a:lvl1pPr>
-            <a:lvl2pPr marL="914400" lvl="1" indent="-314325" algn="l">
-              <a:lnSpc>
-                <a:spcPct val="90000"/>
-              </a:lnSpc>
-              <a:spcBef>
-                <a:spcPts val="500"/>
-              </a:spcBef>
-              <a:spcAft>
-                <a:spcPts val="0"/>
-              </a:spcAft>
-              <a:buSzPts val="1350"/>
-              <a:buChar char="•"/>
-              <a:defRPr/>
-            </a:lvl2pPr>
-            <a:lvl3pPr marL="1371600" lvl="2" indent="-314325" algn="l">
-              <a:lnSpc>
-                <a:spcPct val="90000"/>
-              </a:lnSpc>
-              <a:spcBef>
-                <a:spcPts val="500"/>
-              </a:spcBef>
-              <a:spcAft>
-                <a:spcPts val="0"/>
-              </a:spcAft>
-              <a:buSzPts val="1350"/>
-              <a:buChar char="•"/>
-              <a:defRPr/>
-            </a:lvl3pPr>
-            <a:lvl4pPr marL="1828800" lvl="3" indent="-314325" algn="l">
-              <a:lnSpc>
-                <a:spcPct val="90000"/>
-              </a:lnSpc>
-              <a:spcBef>
-                <a:spcPts val="500"/>
-              </a:spcBef>
-              <a:spcAft>
-                <a:spcPts val="0"/>
-              </a:spcAft>
-              <a:buSzPts val="1350"/>
-              <a:buChar char="•"/>
-              <a:defRPr/>
-            </a:lvl4pPr>
-            <a:lvl5pPr marL="2286000" lvl="4" indent="-314325" algn="l">
-              <a:lnSpc>
-                <a:spcPct val="90000"/>
-              </a:lnSpc>
-              <a:spcBef>
-                <a:spcPts val="500"/>
-              </a:spcBef>
-              <a:spcAft>
-                <a:spcPts val="0"/>
-              </a:spcAft>
-              <a:buSzPts val="1350"/>
-              <a:buChar char="•"/>
-              <a:defRPr/>
-            </a:lvl5pPr>
-            <a:lvl6pPr marL="2743200" lvl="5" indent="-342900" algn="l">
-              <a:lnSpc>
-                <a:spcPct val="90000"/>
-              </a:lnSpc>
-              <a:spcBef>
-                <a:spcPts val="500"/>
-              </a:spcBef>
-              <a:spcAft>
-                <a:spcPts val="0"/>
-              </a:spcAft>
-              <a:buClr>
-                <a:schemeClr val="dk1"/>
-              </a:buClr>
-              <a:buSzPts val="1800"/>
-              <a:buChar char="•"/>
-              <a:defRPr/>
-            </a:lvl6pPr>
-            <a:lvl7pPr marL="3200400" lvl="6" indent="-342900" algn="l">
-              <a:lnSpc>
-                <a:spcPct val="90000"/>
-              </a:lnSpc>
-              <a:spcBef>
-                <a:spcPts val="500"/>
-              </a:spcBef>
-              <a:spcAft>
-                <a:spcPts val="0"/>
-              </a:spcAft>
-              <a:buClr>
-                <a:schemeClr val="dk1"/>
-              </a:buClr>
-              <a:buSzPts val="1800"/>
-              <a:buChar char="•"/>
-              <a:defRPr/>
-            </a:lvl7pPr>
-            <a:lvl8pPr marL="3657600" lvl="7" indent="-342900" algn="l">
-              <a:lnSpc>
-                <a:spcPct val="90000"/>
-              </a:lnSpc>
-              <a:spcBef>
-                <a:spcPts val="500"/>
-              </a:spcBef>
-              <a:spcAft>
-                <a:spcPts val="0"/>
-              </a:spcAft>
-              <a:buClr>
-                <a:schemeClr val="dk1"/>
-              </a:buClr>
-              <a:buSzPts val="1800"/>
-              <a:buChar char="•"/>
-              <a:defRPr/>
-            </a:lvl8pPr>
-            <a:lvl9pPr marL="4114800" lvl="8" indent="-342900" algn="l">
-              <a:lnSpc>
-                <a:spcPct val="90000"/>
-              </a:lnSpc>
-              <a:spcBef>
-                <a:spcPts val="500"/>
-              </a:spcBef>
-              <a:spcAft>
-                <a:spcPts val="0"/>
-              </a:spcAft>
-              <a:buClr>
-                <a:schemeClr val="dk1"/>
-              </a:buClr>
-              <a:buSzPts val="1800"/>
-              <a:buChar char="•"/>
-              <a:defRPr/>
-            </a:lvl9pPr>
-          </a:lstStyle>
-          <a:p>
-            <a:endParaRPr/>
-          </a:p>
-        </p:txBody>
-      </p:sp>
-      <p:sp>
-        <p:nvSpPr>
-          <p:cNvPr id="55" name="Google Shape;55;p26"/>
-          <p:cNvSpPr txBox="1">
-            <a:spLocks noGrp="1"/>
-          </p:cNvSpPr>
-          <p:nvPr>
-            <p:ph type="title"/>
-          </p:nvPr>
-        </p:nvSpPr>
-        <p:spPr>
-          <a:xfrm>
-            <a:off x="838200" y="0"/>
-            <a:ext cx="10515600" cy="1371600"/>
-          </a:xfrm>
-          <a:prstGeom prst="rect">
-            <a:avLst/>
-          </a:prstGeom>
-          <a:noFill/>
-          <a:ln>
-            <a:noFill/>
-          </a:ln>
-        </p:spPr>
-        <p:txBody>
-          <a:bodyPr spcFirstLastPara="1" wrap="square" lIns="91425" tIns="45700" rIns="91425" bIns="45700" anchor="ctr" anchorCtr="0">
-            <a:normAutofit/>
-          </a:bodyPr>
-          <a:lstStyle>
-            <a:lvl1pPr lvl="0" algn="l">
-              <a:lnSpc>
-                <a:spcPct val="90000"/>
-              </a:lnSpc>
-              <a:spcBef>
-                <a:spcPts val="0"/>
-              </a:spcBef>
-              <a:spcAft>
-                <a:spcPts val="0"/>
-              </a:spcAft>
-              <a:buClr>
-                <a:srgbClr val="006633"/>
-              </a:buClr>
-              <a:buSzPts val="1800"/>
-              <a:buNone/>
-              <a:defRPr/>
-            </a:lvl1pPr>
-            <a:lvl2pPr lvl="1">
-              <a:spcBef>
-                <a:spcPts val="0"/>
-              </a:spcBef>
-              <a:spcAft>
-                <a:spcPts val="0"/>
-              </a:spcAft>
-              <a:buSzPts val="1400"/>
-              <a:buNone/>
-              <a:defRPr/>
-            </a:lvl2pPr>
-            <a:lvl3pPr lvl="2">
-              <a:spcBef>
-                <a:spcPts val="0"/>
-              </a:spcBef>
-              <a:spcAft>
-                <a:spcPts val="0"/>
-              </a:spcAft>
-              <a:buSzPts val="1400"/>
-              <a:buNone/>
-              <a:defRPr/>
-            </a:lvl3pPr>
-            <a:lvl4pPr lvl="3">
-              <a:spcBef>
-                <a:spcPts val="0"/>
-              </a:spcBef>
-              <a:spcAft>
-                <a:spcPts val="0"/>
-              </a:spcAft>
-              <a:buSzPts val="1400"/>
-              <a:buNone/>
-              <a:defRPr/>
-            </a:lvl4pPr>
-            <a:lvl5pPr lvl="4">
-              <a:spcBef>
-                <a:spcPts val="0"/>
-              </a:spcBef>
-              <a:spcAft>
-                <a:spcPts val="0"/>
-              </a:spcAft>
-              <a:buSzPts val="1400"/>
-              <a:buNone/>
-              <a:defRPr/>
-            </a:lvl5pPr>
-            <a:lvl6pPr lvl="5">
-              <a:spcBef>
-                <a:spcPts val="0"/>
-              </a:spcBef>
-              <a:spcAft>
-                <a:spcPts val="0"/>
-              </a:spcAft>
-              <a:buSzPts val="1400"/>
-              <a:buNone/>
-              <a:defRPr/>
-            </a:lvl6pPr>
-            <a:lvl7pPr lvl="6">
-              <a:spcBef>
-                <a:spcPts val="0"/>
-              </a:spcBef>
-              <a:spcAft>
-                <a:spcPts val="0"/>
-              </a:spcAft>
-              <a:buSzPts val="1400"/>
-              <a:buNone/>
-              <a:defRPr/>
-            </a:lvl7pPr>
-            <a:lvl8pPr lvl="7">
-              <a:spcBef>
-                <a:spcPts val="0"/>
-              </a:spcBef>
-              <a:spcAft>
-                <a:spcPts val="0"/>
-              </a:spcAft>
-              <a:buSzPts val="1400"/>
-              <a:buNone/>
-              <a:defRPr/>
-            </a:lvl8pPr>
-            <a:lvl9pPr lvl="8">
-              <a:spcBef>
-                <a:spcPts val="0"/>
-              </a:spcBef>
-              <a:spcAft>
-                <a:spcPts val="0"/>
-              </a:spcAft>
-              <a:buSzPts val="1400"/>
-              <a:buNone/>
-              <a:defRPr/>
-            </a:lvl9pPr>
-          </a:lstStyle>
-          <a:p>
-            <a:endParaRPr/>
-          </a:p>
-        </p:txBody>
-      </p:sp>
-    </p:spTree>
-  </p:cSld>
-  <p:clrMapOvr>
-    <a:masterClrMapping/>
-  </p:clrMapOvr>
-</p:sldLayout>
-</file>
-
 <file path=ppt/slideLayouts/slideLayout2.xml><?xml version="1.0" encoding="utf-8"?>
 <p:sldLayout xmlns:a="http://schemas.openxmlformats.org/drawingml/2006/main" xmlns:r="http://schemas.openxmlformats.org/officeDocument/2006/relationships" xmlns:p="http://schemas.openxmlformats.org/presentationml/2006/main" matchingName="Title Subtitle and Content">
   <p:cSld name="Title Subtitle and Content">
@@ -6660,2480 +7245,6 @@
 </file>
 
 <file path=ppt/slideLayouts/slideLayout5.xml><?xml version="1.0" encoding="utf-8"?>
-<p:sldLayout xmlns:a="http://schemas.openxmlformats.org/drawingml/2006/main" xmlns:r="http://schemas.openxmlformats.org/officeDocument/2006/relationships" xmlns:p="http://schemas.openxmlformats.org/presentationml/2006/main" matchingName="Two Content" type="twoObj">
-  <p:cSld name="TWO_OBJECTS">
-    <p:spTree>
-      <p:nvGrpSpPr>
-        <p:cNvPr id="1" name="Shape 25"/>
-        <p:cNvGrpSpPr/>
-        <p:nvPr/>
-      </p:nvGrpSpPr>
-      <p:grpSpPr>
-        <a:xfrm>
-          <a:off x="0" y="0"/>
-          <a:ext cx="0" cy="0"/>
-          <a:chOff x="0" y="0"/>
-          <a:chExt cx="0" cy="0"/>
-        </a:xfrm>
-      </p:grpSpPr>
-      <p:sp>
-        <p:nvSpPr>
-          <p:cNvPr id="26" name="Google Shape;26;p18"/>
-          <p:cNvSpPr txBox="1">
-            <a:spLocks noGrp="1"/>
-          </p:cNvSpPr>
-          <p:nvPr>
-            <p:ph type="body" idx="1"/>
-          </p:nvPr>
-        </p:nvSpPr>
-        <p:spPr>
-          <a:xfrm>
-            <a:off x="6172200" y="1825624"/>
-            <a:ext cx="5181600" cy="4793837"/>
-          </a:xfrm>
-          <a:prstGeom prst="rect">
-            <a:avLst/>
-          </a:prstGeom>
-          <a:noFill/>
-          <a:ln>
-            <a:noFill/>
-          </a:ln>
-        </p:spPr>
-        <p:txBody>
-          <a:bodyPr spcFirstLastPara="1" wrap="square" lIns="91425" tIns="45700" rIns="91425" bIns="45700" anchor="t" anchorCtr="0">
-            <a:normAutofit/>
-          </a:bodyPr>
-          <a:lstStyle>
-            <a:lvl1pPr marL="457200" lvl="0" indent="-314325" algn="l">
-              <a:lnSpc>
-                <a:spcPct val="100000"/>
-              </a:lnSpc>
-              <a:spcBef>
-                <a:spcPts val="1000"/>
-              </a:spcBef>
-              <a:spcAft>
-                <a:spcPts val="0"/>
-              </a:spcAft>
-              <a:buSzPts val="1350"/>
-              <a:buChar char="•"/>
-              <a:defRPr/>
-            </a:lvl1pPr>
-            <a:lvl2pPr marL="914400" lvl="1" indent="-314325" algn="l">
-              <a:lnSpc>
-                <a:spcPct val="90000"/>
-              </a:lnSpc>
-              <a:spcBef>
-                <a:spcPts val="500"/>
-              </a:spcBef>
-              <a:spcAft>
-                <a:spcPts val="0"/>
-              </a:spcAft>
-              <a:buSzPts val="1350"/>
-              <a:buChar char="•"/>
-              <a:defRPr/>
-            </a:lvl2pPr>
-            <a:lvl3pPr marL="1371600" lvl="2" indent="-314325" algn="l">
-              <a:lnSpc>
-                <a:spcPct val="90000"/>
-              </a:lnSpc>
-              <a:spcBef>
-                <a:spcPts val="500"/>
-              </a:spcBef>
-              <a:spcAft>
-                <a:spcPts val="0"/>
-              </a:spcAft>
-              <a:buSzPts val="1350"/>
-              <a:buChar char="•"/>
-              <a:defRPr/>
-            </a:lvl3pPr>
-            <a:lvl4pPr marL="1828800" lvl="3" indent="-314325" algn="l">
-              <a:lnSpc>
-                <a:spcPct val="90000"/>
-              </a:lnSpc>
-              <a:spcBef>
-                <a:spcPts val="500"/>
-              </a:spcBef>
-              <a:spcAft>
-                <a:spcPts val="0"/>
-              </a:spcAft>
-              <a:buSzPts val="1350"/>
-              <a:buChar char="•"/>
-              <a:defRPr/>
-            </a:lvl4pPr>
-            <a:lvl5pPr marL="2286000" lvl="4" indent="-314325" algn="l">
-              <a:lnSpc>
-                <a:spcPct val="90000"/>
-              </a:lnSpc>
-              <a:spcBef>
-                <a:spcPts val="500"/>
-              </a:spcBef>
-              <a:spcAft>
-                <a:spcPts val="0"/>
-              </a:spcAft>
-              <a:buSzPts val="1350"/>
-              <a:buChar char="•"/>
-              <a:defRPr/>
-            </a:lvl5pPr>
-            <a:lvl6pPr marL="2743200" lvl="5" indent="-342900" algn="l">
-              <a:lnSpc>
-                <a:spcPct val="90000"/>
-              </a:lnSpc>
-              <a:spcBef>
-                <a:spcPts val="500"/>
-              </a:spcBef>
-              <a:spcAft>
-                <a:spcPts val="0"/>
-              </a:spcAft>
-              <a:buClr>
-                <a:schemeClr val="dk1"/>
-              </a:buClr>
-              <a:buSzPts val="1800"/>
-              <a:buChar char="•"/>
-              <a:defRPr/>
-            </a:lvl6pPr>
-            <a:lvl7pPr marL="3200400" lvl="6" indent="-342900" algn="l">
-              <a:lnSpc>
-                <a:spcPct val="90000"/>
-              </a:lnSpc>
-              <a:spcBef>
-                <a:spcPts val="500"/>
-              </a:spcBef>
-              <a:spcAft>
-                <a:spcPts val="0"/>
-              </a:spcAft>
-              <a:buClr>
-                <a:schemeClr val="dk1"/>
-              </a:buClr>
-              <a:buSzPts val="1800"/>
-              <a:buChar char="•"/>
-              <a:defRPr/>
-            </a:lvl7pPr>
-            <a:lvl8pPr marL="3657600" lvl="7" indent="-342900" algn="l">
-              <a:lnSpc>
-                <a:spcPct val="90000"/>
-              </a:lnSpc>
-              <a:spcBef>
-                <a:spcPts val="500"/>
-              </a:spcBef>
-              <a:spcAft>
-                <a:spcPts val="0"/>
-              </a:spcAft>
-              <a:buClr>
-                <a:schemeClr val="dk1"/>
-              </a:buClr>
-              <a:buSzPts val="1800"/>
-              <a:buChar char="•"/>
-              <a:defRPr/>
-            </a:lvl8pPr>
-            <a:lvl9pPr marL="4114800" lvl="8" indent="-342900" algn="l">
-              <a:lnSpc>
-                <a:spcPct val="90000"/>
-              </a:lnSpc>
-              <a:spcBef>
-                <a:spcPts val="500"/>
-              </a:spcBef>
-              <a:spcAft>
-                <a:spcPts val="0"/>
-              </a:spcAft>
-              <a:buClr>
-                <a:schemeClr val="dk1"/>
-              </a:buClr>
-              <a:buSzPts val="1800"/>
-              <a:buChar char="•"/>
-              <a:defRPr/>
-            </a:lvl9pPr>
-          </a:lstStyle>
-          <a:p>
-            <a:endParaRPr dirty="0"/>
-          </a:p>
-        </p:txBody>
-      </p:sp>
-      <p:sp>
-        <p:nvSpPr>
-          <p:cNvPr id="27" name="Google Shape;27;p18"/>
-          <p:cNvSpPr txBox="1">
-            <a:spLocks noGrp="1"/>
-          </p:cNvSpPr>
-          <p:nvPr>
-            <p:ph type="body" idx="2"/>
-          </p:nvPr>
-        </p:nvSpPr>
-        <p:spPr>
-          <a:xfrm>
-            <a:off x="838200" y="1825624"/>
-            <a:ext cx="5181600" cy="4793837"/>
-          </a:xfrm>
-          <a:prstGeom prst="rect">
-            <a:avLst/>
-          </a:prstGeom>
-          <a:noFill/>
-          <a:ln>
-            <a:noFill/>
-          </a:ln>
-        </p:spPr>
-        <p:txBody>
-          <a:bodyPr spcFirstLastPara="1" wrap="square" lIns="91425" tIns="45700" rIns="91425" bIns="45700" anchor="t" anchorCtr="0">
-            <a:normAutofit/>
-          </a:bodyPr>
-          <a:lstStyle>
-            <a:lvl1pPr marL="457200" lvl="0" indent="-314325" algn="l">
-              <a:lnSpc>
-                <a:spcPct val="90000"/>
-              </a:lnSpc>
-              <a:spcBef>
-                <a:spcPts val="1000"/>
-              </a:spcBef>
-              <a:spcAft>
-                <a:spcPts val="0"/>
-              </a:spcAft>
-              <a:buSzPts val="1350"/>
-              <a:buChar char="•"/>
-              <a:defRPr/>
-            </a:lvl1pPr>
-            <a:lvl2pPr marL="914400" lvl="1" indent="-314325" algn="l">
-              <a:lnSpc>
-                <a:spcPct val="90000"/>
-              </a:lnSpc>
-              <a:spcBef>
-                <a:spcPts val="500"/>
-              </a:spcBef>
-              <a:spcAft>
-                <a:spcPts val="0"/>
-              </a:spcAft>
-              <a:buSzPts val="1350"/>
-              <a:buChar char="•"/>
-              <a:defRPr/>
-            </a:lvl2pPr>
-            <a:lvl3pPr marL="1371600" lvl="2" indent="-314325" algn="l">
-              <a:lnSpc>
-                <a:spcPct val="90000"/>
-              </a:lnSpc>
-              <a:spcBef>
-                <a:spcPts val="500"/>
-              </a:spcBef>
-              <a:spcAft>
-                <a:spcPts val="0"/>
-              </a:spcAft>
-              <a:buSzPts val="1350"/>
-              <a:buChar char="•"/>
-              <a:defRPr/>
-            </a:lvl3pPr>
-            <a:lvl4pPr marL="1828800" lvl="3" indent="-314325" algn="l">
-              <a:lnSpc>
-                <a:spcPct val="90000"/>
-              </a:lnSpc>
-              <a:spcBef>
-                <a:spcPts val="500"/>
-              </a:spcBef>
-              <a:spcAft>
-                <a:spcPts val="0"/>
-              </a:spcAft>
-              <a:buSzPts val="1350"/>
-              <a:buChar char="•"/>
-              <a:defRPr/>
-            </a:lvl4pPr>
-            <a:lvl5pPr marL="2286000" lvl="4" indent="-314325" algn="l">
-              <a:lnSpc>
-                <a:spcPct val="90000"/>
-              </a:lnSpc>
-              <a:spcBef>
-                <a:spcPts val="500"/>
-              </a:spcBef>
-              <a:spcAft>
-                <a:spcPts val="0"/>
-              </a:spcAft>
-              <a:buSzPts val="1350"/>
-              <a:buChar char="•"/>
-              <a:defRPr/>
-            </a:lvl5pPr>
-            <a:lvl6pPr marL="2743200" lvl="5" indent="-342900" algn="l">
-              <a:lnSpc>
-                <a:spcPct val="90000"/>
-              </a:lnSpc>
-              <a:spcBef>
-                <a:spcPts val="500"/>
-              </a:spcBef>
-              <a:spcAft>
-                <a:spcPts val="0"/>
-              </a:spcAft>
-              <a:buClr>
-                <a:schemeClr val="dk1"/>
-              </a:buClr>
-              <a:buSzPts val="1800"/>
-              <a:buChar char="•"/>
-              <a:defRPr/>
-            </a:lvl6pPr>
-            <a:lvl7pPr marL="3200400" lvl="6" indent="-342900" algn="l">
-              <a:lnSpc>
-                <a:spcPct val="90000"/>
-              </a:lnSpc>
-              <a:spcBef>
-                <a:spcPts val="500"/>
-              </a:spcBef>
-              <a:spcAft>
-                <a:spcPts val="0"/>
-              </a:spcAft>
-              <a:buClr>
-                <a:schemeClr val="dk1"/>
-              </a:buClr>
-              <a:buSzPts val="1800"/>
-              <a:buChar char="•"/>
-              <a:defRPr/>
-            </a:lvl7pPr>
-            <a:lvl8pPr marL="3657600" lvl="7" indent="-342900" algn="l">
-              <a:lnSpc>
-                <a:spcPct val="90000"/>
-              </a:lnSpc>
-              <a:spcBef>
-                <a:spcPts val="500"/>
-              </a:spcBef>
-              <a:spcAft>
-                <a:spcPts val="0"/>
-              </a:spcAft>
-              <a:buClr>
-                <a:schemeClr val="dk1"/>
-              </a:buClr>
-              <a:buSzPts val="1800"/>
-              <a:buChar char="•"/>
-              <a:defRPr/>
-            </a:lvl8pPr>
-            <a:lvl9pPr marL="4114800" lvl="8" indent="-342900" algn="l">
-              <a:lnSpc>
-                <a:spcPct val="90000"/>
-              </a:lnSpc>
-              <a:spcBef>
-                <a:spcPts val="500"/>
-              </a:spcBef>
-              <a:spcAft>
-                <a:spcPts val="0"/>
-              </a:spcAft>
-              <a:buClr>
-                <a:schemeClr val="dk1"/>
-              </a:buClr>
-              <a:buSzPts val="1800"/>
-              <a:buChar char="•"/>
-              <a:defRPr/>
-            </a:lvl9pPr>
-          </a:lstStyle>
-          <a:p>
-            <a:endParaRPr dirty="0"/>
-          </a:p>
-        </p:txBody>
-      </p:sp>
-      <p:sp>
-        <p:nvSpPr>
-          <p:cNvPr id="28" name="Google Shape;28;p18"/>
-          <p:cNvSpPr txBox="1">
-            <a:spLocks noGrp="1"/>
-          </p:cNvSpPr>
-          <p:nvPr>
-            <p:ph type="title"/>
-          </p:nvPr>
-        </p:nvSpPr>
-        <p:spPr>
-          <a:xfrm>
-            <a:off x="838200" y="0"/>
-            <a:ext cx="10515600" cy="1371600"/>
-          </a:xfrm>
-          <a:prstGeom prst="rect">
-            <a:avLst/>
-          </a:prstGeom>
-          <a:noFill/>
-          <a:ln>
-            <a:noFill/>
-          </a:ln>
-        </p:spPr>
-        <p:txBody>
-          <a:bodyPr spcFirstLastPara="1" wrap="square" lIns="91425" tIns="45700" rIns="91425" bIns="45700" anchor="ctr" anchorCtr="0">
-            <a:normAutofit/>
-          </a:bodyPr>
-          <a:lstStyle>
-            <a:lvl1pPr lvl="0" algn="l">
-              <a:lnSpc>
-                <a:spcPct val="90000"/>
-              </a:lnSpc>
-              <a:spcBef>
-                <a:spcPts val="0"/>
-              </a:spcBef>
-              <a:spcAft>
-                <a:spcPts val="0"/>
-              </a:spcAft>
-              <a:buClr>
-                <a:srgbClr val="006633"/>
-              </a:buClr>
-              <a:buSzPts val="1800"/>
-              <a:buNone/>
-              <a:defRPr/>
-            </a:lvl1pPr>
-            <a:lvl2pPr lvl="1">
-              <a:spcBef>
-                <a:spcPts val="0"/>
-              </a:spcBef>
-              <a:spcAft>
-                <a:spcPts val="0"/>
-              </a:spcAft>
-              <a:buSzPts val="1400"/>
-              <a:buNone/>
-              <a:defRPr/>
-            </a:lvl2pPr>
-            <a:lvl3pPr lvl="2">
-              <a:spcBef>
-                <a:spcPts val="0"/>
-              </a:spcBef>
-              <a:spcAft>
-                <a:spcPts val="0"/>
-              </a:spcAft>
-              <a:buSzPts val="1400"/>
-              <a:buNone/>
-              <a:defRPr/>
-            </a:lvl3pPr>
-            <a:lvl4pPr lvl="3">
-              <a:spcBef>
-                <a:spcPts val="0"/>
-              </a:spcBef>
-              <a:spcAft>
-                <a:spcPts val="0"/>
-              </a:spcAft>
-              <a:buSzPts val="1400"/>
-              <a:buNone/>
-              <a:defRPr/>
-            </a:lvl4pPr>
-            <a:lvl5pPr lvl="4">
-              <a:spcBef>
-                <a:spcPts val="0"/>
-              </a:spcBef>
-              <a:spcAft>
-                <a:spcPts val="0"/>
-              </a:spcAft>
-              <a:buSzPts val="1400"/>
-              <a:buNone/>
-              <a:defRPr/>
-            </a:lvl5pPr>
-            <a:lvl6pPr lvl="5">
-              <a:spcBef>
-                <a:spcPts val="0"/>
-              </a:spcBef>
-              <a:spcAft>
-                <a:spcPts val="0"/>
-              </a:spcAft>
-              <a:buSzPts val="1400"/>
-              <a:buNone/>
-              <a:defRPr/>
-            </a:lvl6pPr>
-            <a:lvl7pPr lvl="6">
-              <a:spcBef>
-                <a:spcPts val="0"/>
-              </a:spcBef>
-              <a:spcAft>
-                <a:spcPts val="0"/>
-              </a:spcAft>
-              <a:buSzPts val="1400"/>
-              <a:buNone/>
-              <a:defRPr/>
-            </a:lvl7pPr>
-            <a:lvl8pPr lvl="7">
-              <a:spcBef>
-                <a:spcPts val="0"/>
-              </a:spcBef>
-              <a:spcAft>
-                <a:spcPts val="0"/>
-              </a:spcAft>
-              <a:buSzPts val="1400"/>
-              <a:buNone/>
-              <a:defRPr/>
-            </a:lvl8pPr>
-            <a:lvl9pPr lvl="8">
-              <a:spcBef>
-                <a:spcPts val="0"/>
-              </a:spcBef>
-              <a:spcAft>
-                <a:spcPts val="0"/>
-              </a:spcAft>
-              <a:buSzPts val="1400"/>
-              <a:buNone/>
-              <a:defRPr/>
-            </a:lvl9pPr>
-          </a:lstStyle>
-          <a:p>
-            <a:endParaRPr/>
-          </a:p>
-        </p:txBody>
-      </p:sp>
-    </p:spTree>
-  </p:cSld>
-  <p:clrMapOvr>
-    <a:masterClrMapping/>
-  </p:clrMapOvr>
-</p:sldLayout>
-</file>
-
-<file path=ppt/slideLayouts/slideLayout6.xml><?xml version="1.0" encoding="utf-8"?>
-<p:sldLayout xmlns:a="http://schemas.openxmlformats.org/drawingml/2006/main" xmlns:r="http://schemas.openxmlformats.org/officeDocument/2006/relationships" xmlns:p="http://schemas.openxmlformats.org/presentationml/2006/main" matchingName="Comparison" type="twoTxTwoObj">
-  <p:cSld name="TWO_OBJECTS_WITH_TEXT">
-    <p:spTree>
-      <p:nvGrpSpPr>
-        <p:cNvPr id="1" name="Shape 29"/>
-        <p:cNvGrpSpPr/>
-        <p:nvPr/>
-      </p:nvGrpSpPr>
-      <p:grpSpPr>
-        <a:xfrm>
-          <a:off x="0" y="0"/>
-          <a:ext cx="0" cy="0"/>
-          <a:chOff x="0" y="0"/>
-          <a:chExt cx="0" cy="0"/>
-        </a:xfrm>
-      </p:grpSpPr>
-      <p:sp>
-        <p:nvSpPr>
-          <p:cNvPr id="30" name="Google Shape;30;p19"/>
-          <p:cNvSpPr txBox="1">
-            <a:spLocks noGrp="1"/>
-          </p:cNvSpPr>
-          <p:nvPr>
-            <p:ph type="body" idx="1"/>
-          </p:nvPr>
-        </p:nvSpPr>
-        <p:spPr>
-          <a:xfrm>
-            <a:off x="6172200" y="2771333"/>
-            <a:ext cx="5183188" cy="3828249"/>
-          </a:xfrm>
-          <a:prstGeom prst="rect">
-            <a:avLst/>
-          </a:prstGeom>
-          <a:noFill/>
-          <a:ln>
-            <a:noFill/>
-          </a:ln>
-        </p:spPr>
-        <p:txBody>
-          <a:bodyPr spcFirstLastPara="1" wrap="square" lIns="91425" tIns="45700" rIns="91425" bIns="45700" anchor="t" anchorCtr="0">
-            <a:normAutofit/>
-          </a:bodyPr>
-          <a:lstStyle>
-            <a:lvl1pPr marL="457200" lvl="0" indent="-314325" algn="l">
-              <a:lnSpc>
-                <a:spcPct val="100000"/>
-              </a:lnSpc>
-              <a:spcBef>
-                <a:spcPts val="1000"/>
-              </a:spcBef>
-              <a:spcAft>
-                <a:spcPts val="0"/>
-              </a:spcAft>
-              <a:buSzPts val="1350"/>
-              <a:buChar char="•"/>
-              <a:defRPr/>
-            </a:lvl1pPr>
-            <a:lvl2pPr marL="914400" lvl="1" indent="-314325" algn="l">
-              <a:lnSpc>
-                <a:spcPct val="90000"/>
-              </a:lnSpc>
-              <a:spcBef>
-                <a:spcPts val="500"/>
-              </a:spcBef>
-              <a:spcAft>
-                <a:spcPts val="0"/>
-              </a:spcAft>
-              <a:buSzPts val="1350"/>
-              <a:buChar char="•"/>
-              <a:defRPr/>
-            </a:lvl2pPr>
-            <a:lvl3pPr marL="1371600" lvl="2" indent="-314325" algn="l">
-              <a:lnSpc>
-                <a:spcPct val="90000"/>
-              </a:lnSpc>
-              <a:spcBef>
-                <a:spcPts val="500"/>
-              </a:spcBef>
-              <a:spcAft>
-                <a:spcPts val="0"/>
-              </a:spcAft>
-              <a:buSzPts val="1350"/>
-              <a:buChar char="•"/>
-              <a:defRPr/>
-            </a:lvl3pPr>
-            <a:lvl4pPr marL="1828800" lvl="3" indent="-314325" algn="l">
-              <a:lnSpc>
-                <a:spcPct val="90000"/>
-              </a:lnSpc>
-              <a:spcBef>
-                <a:spcPts val="500"/>
-              </a:spcBef>
-              <a:spcAft>
-                <a:spcPts val="0"/>
-              </a:spcAft>
-              <a:buSzPts val="1350"/>
-              <a:buChar char="•"/>
-              <a:defRPr/>
-            </a:lvl4pPr>
-            <a:lvl5pPr marL="2286000" lvl="4" indent="-314325" algn="l">
-              <a:lnSpc>
-                <a:spcPct val="90000"/>
-              </a:lnSpc>
-              <a:spcBef>
-                <a:spcPts val="500"/>
-              </a:spcBef>
-              <a:spcAft>
-                <a:spcPts val="0"/>
-              </a:spcAft>
-              <a:buSzPts val="1350"/>
-              <a:buChar char="•"/>
-              <a:defRPr/>
-            </a:lvl5pPr>
-            <a:lvl6pPr marL="2743200" lvl="5" indent="-342900" algn="l">
-              <a:lnSpc>
-                <a:spcPct val="90000"/>
-              </a:lnSpc>
-              <a:spcBef>
-                <a:spcPts val="500"/>
-              </a:spcBef>
-              <a:spcAft>
-                <a:spcPts val="0"/>
-              </a:spcAft>
-              <a:buClr>
-                <a:schemeClr val="dk1"/>
-              </a:buClr>
-              <a:buSzPts val="1800"/>
-              <a:buChar char="•"/>
-              <a:defRPr/>
-            </a:lvl6pPr>
-            <a:lvl7pPr marL="3200400" lvl="6" indent="-342900" algn="l">
-              <a:lnSpc>
-                <a:spcPct val="90000"/>
-              </a:lnSpc>
-              <a:spcBef>
-                <a:spcPts val="500"/>
-              </a:spcBef>
-              <a:spcAft>
-                <a:spcPts val="0"/>
-              </a:spcAft>
-              <a:buClr>
-                <a:schemeClr val="dk1"/>
-              </a:buClr>
-              <a:buSzPts val="1800"/>
-              <a:buChar char="•"/>
-              <a:defRPr/>
-            </a:lvl7pPr>
-            <a:lvl8pPr marL="3657600" lvl="7" indent="-342900" algn="l">
-              <a:lnSpc>
-                <a:spcPct val="90000"/>
-              </a:lnSpc>
-              <a:spcBef>
-                <a:spcPts val="500"/>
-              </a:spcBef>
-              <a:spcAft>
-                <a:spcPts val="0"/>
-              </a:spcAft>
-              <a:buClr>
-                <a:schemeClr val="dk1"/>
-              </a:buClr>
-              <a:buSzPts val="1800"/>
-              <a:buChar char="•"/>
-              <a:defRPr/>
-            </a:lvl8pPr>
-            <a:lvl9pPr marL="4114800" lvl="8" indent="-342900" algn="l">
-              <a:lnSpc>
-                <a:spcPct val="90000"/>
-              </a:lnSpc>
-              <a:spcBef>
-                <a:spcPts val="500"/>
-              </a:spcBef>
-              <a:spcAft>
-                <a:spcPts val="0"/>
-              </a:spcAft>
-              <a:buClr>
-                <a:schemeClr val="dk1"/>
-              </a:buClr>
-              <a:buSzPts val="1800"/>
-              <a:buChar char="•"/>
-              <a:defRPr/>
-            </a:lvl9pPr>
-          </a:lstStyle>
-          <a:p>
-            <a:endParaRPr dirty="0"/>
-          </a:p>
-        </p:txBody>
-      </p:sp>
-      <p:sp>
-        <p:nvSpPr>
-          <p:cNvPr id="31" name="Google Shape;31;p19"/>
-          <p:cNvSpPr txBox="1">
-            <a:spLocks noGrp="1"/>
-          </p:cNvSpPr>
-          <p:nvPr>
-            <p:ph type="body" idx="2"/>
-          </p:nvPr>
-        </p:nvSpPr>
-        <p:spPr>
-          <a:xfrm>
-            <a:off x="6172200" y="1828800"/>
-            <a:ext cx="5183188" cy="823912"/>
-          </a:xfrm>
-          <a:prstGeom prst="rect">
-            <a:avLst/>
-          </a:prstGeom>
-          <a:noFill/>
-          <a:ln>
-            <a:noFill/>
-          </a:ln>
-        </p:spPr>
-        <p:txBody>
-          <a:bodyPr spcFirstLastPara="1" wrap="square" lIns="91425" tIns="45700" rIns="91425" bIns="45700" anchor="t" anchorCtr="0">
-            <a:normAutofit/>
-          </a:bodyPr>
-          <a:lstStyle>
-            <a:lvl1pPr marL="457200" lvl="0" indent="-228600" algn="l">
-              <a:lnSpc>
-                <a:spcPct val="90000"/>
-              </a:lnSpc>
-              <a:spcBef>
-                <a:spcPts val="1000"/>
-              </a:spcBef>
-              <a:spcAft>
-                <a:spcPts val="0"/>
-              </a:spcAft>
-              <a:buSzPts val="2100"/>
-              <a:buNone/>
-              <a:defRPr sz="2800" b="1"/>
-            </a:lvl1pPr>
-            <a:lvl2pPr marL="914400" lvl="1" indent="-228600" algn="l">
-              <a:lnSpc>
-                <a:spcPct val="90000"/>
-              </a:lnSpc>
-              <a:spcBef>
-                <a:spcPts val="500"/>
-              </a:spcBef>
-              <a:spcAft>
-                <a:spcPts val="0"/>
-              </a:spcAft>
-              <a:buSzPts val="1500"/>
-              <a:buNone/>
-              <a:defRPr sz="2000" b="1"/>
-            </a:lvl2pPr>
-            <a:lvl3pPr marL="1371600" lvl="2" indent="-228600" algn="l">
-              <a:lnSpc>
-                <a:spcPct val="90000"/>
-              </a:lnSpc>
-              <a:spcBef>
-                <a:spcPts val="500"/>
-              </a:spcBef>
-              <a:spcAft>
-                <a:spcPts val="0"/>
-              </a:spcAft>
-              <a:buSzPts val="1350"/>
-              <a:buNone/>
-              <a:defRPr sz="1800" b="1"/>
-            </a:lvl3pPr>
-            <a:lvl4pPr marL="1828800" lvl="3" indent="-228600" algn="l">
-              <a:lnSpc>
-                <a:spcPct val="90000"/>
-              </a:lnSpc>
-              <a:spcBef>
-                <a:spcPts val="500"/>
-              </a:spcBef>
-              <a:spcAft>
-                <a:spcPts val="0"/>
-              </a:spcAft>
-              <a:buSzPts val="1200"/>
-              <a:buNone/>
-              <a:defRPr sz="1600" b="1"/>
-            </a:lvl4pPr>
-            <a:lvl5pPr marL="2286000" lvl="4" indent="-228600" algn="l">
-              <a:lnSpc>
-                <a:spcPct val="90000"/>
-              </a:lnSpc>
-              <a:spcBef>
-                <a:spcPts val="500"/>
-              </a:spcBef>
-              <a:spcAft>
-                <a:spcPts val="0"/>
-              </a:spcAft>
-              <a:buSzPts val="1200"/>
-              <a:buNone/>
-              <a:defRPr sz="1600" b="1"/>
-            </a:lvl5pPr>
-            <a:lvl6pPr marL="2743200" lvl="5" indent="-228600" algn="l">
-              <a:lnSpc>
-                <a:spcPct val="90000"/>
-              </a:lnSpc>
-              <a:spcBef>
-                <a:spcPts val="500"/>
-              </a:spcBef>
-              <a:spcAft>
-                <a:spcPts val="0"/>
-              </a:spcAft>
-              <a:buClr>
-                <a:schemeClr val="dk1"/>
-              </a:buClr>
-              <a:buSzPts val="1600"/>
-              <a:buNone/>
-              <a:defRPr sz="1600" b="1"/>
-            </a:lvl6pPr>
-            <a:lvl7pPr marL="3200400" lvl="6" indent="-228600" algn="l">
-              <a:lnSpc>
-                <a:spcPct val="90000"/>
-              </a:lnSpc>
-              <a:spcBef>
-                <a:spcPts val="500"/>
-              </a:spcBef>
-              <a:spcAft>
-                <a:spcPts val="0"/>
-              </a:spcAft>
-              <a:buClr>
-                <a:schemeClr val="dk1"/>
-              </a:buClr>
-              <a:buSzPts val="1600"/>
-              <a:buNone/>
-              <a:defRPr sz="1600" b="1"/>
-            </a:lvl7pPr>
-            <a:lvl8pPr marL="3657600" lvl="7" indent="-228600" algn="l">
-              <a:lnSpc>
-                <a:spcPct val="90000"/>
-              </a:lnSpc>
-              <a:spcBef>
-                <a:spcPts val="500"/>
-              </a:spcBef>
-              <a:spcAft>
-                <a:spcPts val="0"/>
-              </a:spcAft>
-              <a:buClr>
-                <a:schemeClr val="dk1"/>
-              </a:buClr>
-              <a:buSzPts val="1600"/>
-              <a:buNone/>
-              <a:defRPr sz="1600" b="1"/>
-            </a:lvl8pPr>
-            <a:lvl9pPr marL="4114800" lvl="8" indent="-228600" algn="l">
-              <a:lnSpc>
-                <a:spcPct val="90000"/>
-              </a:lnSpc>
-              <a:spcBef>
-                <a:spcPts val="500"/>
-              </a:spcBef>
-              <a:spcAft>
-                <a:spcPts val="0"/>
-              </a:spcAft>
-              <a:buClr>
-                <a:schemeClr val="dk1"/>
-              </a:buClr>
-              <a:buSzPts val="1600"/>
-              <a:buNone/>
-              <a:defRPr sz="1600" b="1"/>
-            </a:lvl9pPr>
-          </a:lstStyle>
-          <a:p>
-            <a:endParaRPr/>
-          </a:p>
-        </p:txBody>
-      </p:sp>
-      <p:sp>
-        <p:nvSpPr>
-          <p:cNvPr id="32" name="Google Shape;32;p19"/>
-          <p:cNvSpPr txBox="1">
-            <a:spLocks noGrp="1"/>
-          </p:cNvSpPr>
-          <p:nvPr>
-            <p:ph type="body" idx="3"/>
-          </p:nvPr>
-        </p:nvSpPr>
-        <p:spPr>
-          <a:xfrm>
-            <a:off x="839788" y="2771334"/>
-            <a:ext cx="5157787" cy="3828248"/>
-          </a:xfrm>
-          <a:prstGeom prst="rect">
-            <a:avLst/>
-          </a:prstGeom>
-          <a:noFill/>
-          <a:ln>
-            <a:noFill/>
-          </a:ln>
-        </p:spPr>
-        <p:txBody>
-          <a:bodyPr spcFirstLastPara="1" wrap="square" lIns="91425" tIns="45700" rIns="91425" bIns="45700" anchor="t" anchorCtr="0">
-            <a:normAutofit/>
-          </a:bodyPr>
-          <a:lstStyle>
-            <a:lvl1pPr marL="457200" lvl="0" indent="-314325" algn="l">
-              <a:lnSpc>
-                <a:spcPct val="100000"/>
-              </a:lnSpc>
-              <a:spcBef>
-                <a:spcPts val="1000"/>
-              </a:spcBef>
-              <a:spcAft>
-                <a:spcPts val="0"/>
-              </a:spcAft>
-              <a:buSzPts val="1350"/>
-              <a:buChar char="•"/>
-              <a:defRPr/>
-            </a:lvl1pPr>
-            <a:lvl2pPr marL="914400" lvl="1" indent="-314325" algn="l">
-              <a:lnSpc>
-                <a:spcPct val="90000"/>
-              </a:lnSpc>
-              <a:spcBef>
-                <a:spcPts val="500"/>
-              </a:spcBef>
-              <a:spcAft>
-                <a:spcPts val="0"/>
-              </a:spcAft>
-              <a:buSzPts val="1350"/>
-              <a:buChar char="•"/>
-              <a:defRPr/>
-            </a:lvl2pPr>
-            <a:lvl3pPr marL="1371600" lvl="2" indent="-314325" algn="l">
-              <a:lnSpc>
-                <a:spcPct val="90000"/>
-              </a:lnSpc>
-              <a:spcBef>
-                <a:spcPts val="500"/>
-              </a:spcBef>
-              <a:spcAft>
-                <a:spcPts val="0"/>
-              </a:spcAft>
-              <a:buSzPts val="1350"/>
-              <a:buChar char="•"/>
-              <a:defRPr/>
-            </a:lvl3pPr>
-            <a:lvl4pPr marL="1828800" lvl="3" indent="-314325" algn="l">
-              <a:lnSpc>
-                <a:spcPct val="90000"/>
-              </a:lnSpc>
-              <a:spcBef>
-                <a:spcPts val="500"/>
-              </a:spcBef>
-              <a:spcAft>
-                <a:spcPts val="0"/>
-              </a:spcAft>
-              <a:buSzPts val="1350"/>
-              <a:buChar char="•"/>
-              <a:defRPr/>
-            </a:lvl4pPr>
-            <a:lvl5pPr marL="2286000" lvl="4" indent="-314325" algn="l">
-              <a:lnSpc>
-                <a:spcPct val="90000"/>
-              </a:lnSpc>
-              <a:spcBef>
-                <a:spcPts val="500"/>
-              </a:spcBef>
-              <a:spcAft>
-                <a:spcPts val="0"/>
-              </a:spcAft>
-              <a:buSzPts val="1350"/>
-              <a:buChar char="•"/>
-              <a:defRPr/>
-            </a:lvl5pPr>
-            <a:lvl6pPr marL="2743200" lvl="5" indent="-342900" algn="l">
-              <a:lnSpc>
-                <a:spcPct val="90000"/>
-              </a:lnSpc>
-              <a:spcBef>
-                <a:spcPts val="500"/>
-              </a:spcBef>
-              <a:spcAft>
-                <a:spcPts val="0"/>
-              </a:spcAft>
-              <a:buClr>
-                <a:schemeClr val="dk1"/>
-              </a:buClr>
-              <a:buSzPts val="1800"/>
-              <a:buChar char="•"/>
-              <a:defRPr/>
-            </a:lvl6pPr>
-            <a:lvl7pPr marL="3200400" lvl="6" indent="-342900" algn="l">
-              <a:lnSpc>
-                <a:spcPct val="90000"/>
-              </a:lnSpc>
-              <a:spcBef>
-                <a:spcPts val="500"/>
-              </a:spcBef>
-              <a:spcAft>
-                <a:spcPts val="0"/>
-              </a:spcAft>
-              <a:buClr>
-                <a:schemeClr val="dk1"/>
-              </a:buClr>
-              <a:buSzPts val="1800"/>
-              <a:buChar char="•"/>
-              <a:defRPr/>
-            </a:lvl7pPr>
-            <a:lvl8pPr marL="3657600" lvl="7" indent="-342900" algn="l">
-              <a:lnSpc>
-                <a:spcPct val="90000"/>
-              </a:lnSpc>
-              <a:spcBef>
-                <a:spcPts val="500"/>
-              </a:spcBef>
-              <a:spcAft>
-                <a:spcPts val="0"/>
-              </a:spcAft>
-              <a:buClr>
-                <a:schemeClr val="dk1"/>
-              </a:buClr>
-              <a:buSzPts val="1800"/>
-              <a:buChar char="•"/>
-              <a:defRPr/>
-            </a:lvl8pPr>
-            <a:lvl9pPr marL="4114800" lvl="8" indent="-342900" algn="l">
-              <a:lnSpc>
-                <a:spcPct val="90000"/>
-              </a:lnSpc>
-              <a:spcBef>
-                <a:spcPts val="500"/>
-              </a:spcBef>
-              <a:spcAft>
-                <a:spcPts val="0"/>
-              </a:spcAft>
-              <a:buClr>
-                <a:schemeClr val="dk1"/>
-              </a:buClr>
-              <a:buSzPts val="1800"/>
-              <a:buChar char="•"/>
-              <a:defRPr/>
-            </a:lvl9pPr>
-          </a:lstStyle>
-          <a:p>
-            <a:endParaRPr dirty="0"/>
-          </a:p>
-        </p:txBody>
-      </p:sp>
-      <p:sp>
-        <p:nvSpPr>
-          <p:cNvPr id="33" name="Google Shape;33;p19"/>
-          <p:cNvSpPr txBox="1">
-            <a:spLocks noGrp="1"/>
-          </p:cNvSpPr>
-          <p:nvPr>
-            <p:ph type="body" idx="4"/>
-          </p:nvPr>
-        </p:nvSpPr>
-        <p:spPr>
-          <a:xfrm>
-            <a:off x="839788" y="1828800"/>
-            <a:ext cx="5157787" cy="823912"/>
-          </a:xfrm>
-          <a:prstGeom prst="rect">
-            <a:avLst/>
-          </a:prstGeom>
-          <a:noFill/>
-          <a:ln>
-            <a:noFill/>
-          </a:ln>
-        </p:spPr>
-        <p:txBody>
-          <a:bodyPr spcFirstLastPara="1" wrap="square" lIns="91425" tIns="45700" rIns="91425" bIns="45700" anchor="t" anchorCtr="0">
-            <a:normAutofit/>
-          </a:bodyPr>
-          <a:lstStyle>
-            <a:lvl1pPr marL="457200" lvl="0" indent="-228600" algn="l">
-              <a:lnSpc>
-                <a:spcPct val="90000"/>
-              </a:lnSpc>
-              <a:spcBef>
-                <a:spcPts val="1000"/>
-              </a:spcBef>
-              <a:spcAft>
-                <a:spcPts val="0"/>
-              </a:spcAft>
-              <a:buSzPts val="2100"/>
-              <a:buNone/>
-              <a:defRPr sz="2800" b="1"/>
-            </a:lvl1pPr>
-            <a:lvl2pPr marL="914400" lvl="1" indent="-228600" algn="l">
-              <a:lnSpc>
-                <a:spcPct val="90000"/>
-              </a:lnSpc>
-              <a:spcBef>
-                <a:spcPts val="500"/>
-              </a:spcBef>
-              <a:spcAft>
-                <a:spcPts val="0"/>
-              </a:spcAft>
-              <a:buSzPts val="1500"/>
-              <a:buNone/>
-              <a:defRPr sz="2000" b="1"/>
-            </a:lvl2pPr>
-            <a:lvl3pPr marL="1371600" lvl="2" indent="-228600" algn="l">
-              <a:lnSpc>
-                <a:spcPct val="90000"/>
-              </a:lnSpc>
-              <a:spcBef>
-                <a:spcPts val="500"/>
-              </a:spcBef>
-              <a:spcAft>
-                <a:spcPts val="0"/>
-              </a:spcAft>
-              <a:buSzPts val="1350"/>
-              <a:buNone/>
-              <a:defRPr sz="1800" b="1"/>
-            </a:lvl3pPr>
-            <a:lvl4pPr marL="1828800" lvl="3" indent="-228600" algn="l">
-              <a:lnSpc>
-                <a:spcPct val="90000"/>
-              </a:lnSpc>
-              <a:spcBef>
-                <a:spcPts val="500"/>
-              </a:spcBef>
-              <a:spcAft>
-                <a:spcPts val="0"/>
-              </a:spcAft>
-              <a:buSzPts val="1200"/>
-              <a:buNone/>
-              <a:defRPr sz="1600" b="1"/>
-            </a:lvl4pPr>
-            <a:lvl5pPr marL="2286000" lvl="4" indent="-228600" algn="l">
-              <a:lnSpc>
-                <a:spcPct val="90000"/>
-              </a:lnSpc>
-              <a:spcBef>
-                <a:spcPts val="500"/>
-              </a:spcBef>
-              <a:spcAft>
-                <a:spcPts val="0"/>
-              </a:spcAft>
-              <a:buSzPts val="1200"/>
-              <a:buNone/>
-              <a:defRPr sz="1600" b="1"/>
-            </a:lvl5pPr>
-            <a:lvl6pPr marL="2743200" lvl="5" indent="-228600" algn="l">
-              <a:lnSpc>
-                <a:spcPct val="90000"/>
-              </a:lnSpc>
-              <a:spcBef>
-                <a:spcPts val="500"/>
-              </a:spcBef>
-              <a:spcAft>
-                <a:spcPts val="0"/>
-              </a:spcAft>
-              <a:buClr>
-                <a:schemeClr val="dk1"/>
-              </a:buClr>
-              <a:buSzPts val="1600"/>
-              <a:buNone/>
-              <a:defRPr sz="1600" b="1"/>
-            </a:lvl6pPr>
-            <a:lvl7pPr marL="3200400" lvl="6" indent="-228600" algn="l">
-              <a:lnSpc>
-                <a:spcPct val="90000"/>
-              </a:lnSpc>
-              <a:spcBef>
-                <a:spcPts val="500"/>
-              </a:spcBef>
-              <a:spcAft>
-                <a:spcPts val="0"/>
-              </a:spcAft>
-              <a:buClr>
-                <a:schemeClr val="dk1"/>
-              </a:buClr>
-              <a:buSzPts val="1600"/>
-              <a:buNone/>
-              <a:defRPr sz="1600" b="1"/>
-            </a:lvl7pPr>
-            <a:lvl8pPr marL="3657600" lvl="7" indent="-228600" algn="l">
-              <a:lnSpc>
-                <a:spcPct val="90000"/>
-              </a:lnSpc>
-              <a:spcBef>
-                <a:spcPts val="500"/>
-              </a:spcBef>
-              <a:spcAft>
-                <a:spcPts val="0"/>
-              </a:spcAft>
-              <a:buClr>
-                <a:schemeClr val="dk1"/>
-              </a:buClr>
-              <a:buSzPts val="1600"/>
-              <a:buNone/>
-              <a:defRPr sz="1600" b="1"/>
-            </a:lvl8pPr>
-            <a:lvl9pPr marL="4114800" lvl="8" indent="-228600" algn="l">
-              <a:lnSpc>
-                <a:spcPct val="90000"/>
-              </a:lnSpc>
-              <a:spcBef>
-                <a:spcPts val="500"/>
-              </a:spcBef>
-              <a:spcAft>
-                <a:spcPts val="0"/>
-              </a:spcAft>
-              <a:buClr>
-                <a:schemeClr val="dk1"/>
-              </a:buClr>
-              <a:buSzPts val="1600"/>
-              <a:buNone/>
-              <a:defRPr sz="1600" b="1"/>
-            </a:lvl9pPr>
-          </a:lstStyle>
-          <a:p>
-            <a:endParaRPr/>
-          </a:p>
-        </p:txBody>
-      </p:sp>
-      <p:sp>
-        <p:nvSpPr>
-          <p:cNvPr id="34" name="Google Shape;34;p19"/>
-          <p:cNvSpPr txBox="1">
-            <a:spLocks noGrp="1"/>
-          </p:cNvSpPr>
-          <p:nvPr>
-            <p:ph type="title"/>
-          </p:nvPr>
-        </p:nvSpPr>
-        <p:spPr>
-          <a:xfrm>
-            <a:off x="839788" y="0"/>
-            <a:ext cx="10515600" cy="1371600"/>
-          </a:xfrm>
-          <a:prstGeom prst="rect">
-            <a:avLst/>
-          </a:prstGeom>
-          <a:noFill/>
-          <a:ln>
-            <a:noFill/>
-          </a:ln>
-        </p:spPr>
-        <p:txBody>
-          <a:bodyPr spcFirstLastPara="1" wrap="square" lIns="91425" tIns="45700" rIns="91425" bIns="45700" anchor="ctr" anchorCtr="0">
-            <a:normAutofit/>
-          </a:bodyPr>
-          <a:lstStyle>
-            <a:lvl1pPr lvl="0" algn="l">
-              <a:lnSpc>
-                <a:spcPct val="90000"/>
-              </a:lnSpc>
-              <a:spcBef>
-                <a:spcPts val="0"/>
-              </a:spcBef>
-              <a:spcAft>
-                <a:spcPts val="0"/>
-              </a:spcAft>
-              <a:buClr>
-                <a:srgbClr val="006633"/>
-              </a:buClr>
-              <a:buSzPts val="1800"/>
-              <a:buNone/>
-              <a:defRPr/>
-            </a:lvl1pPr>
-            <a:lvl2pPr lvl="1">
-              <a:spcBef>
-                <a:spcPts val="0"/>
-              </a:spcBef>
-              <a:spcAft>
-                <a:spcPts val="0"/>
-              </a:spcAft>
-              <a:buSzPts val="1400"/>
-              <a:buNone/>
-              <a:defRPr/>
-            </a:lvl2pPr>
-            <a:lvl3pPr lvl="2">
-              <a:spcBef>
-                <a:spcPts val="0"/>
-              </a:spcBef>
-              <a:spcAft>
-                <a:spcPts val="0"/>
-              </a:spcAft>
-              <a:buSzPts val="1400"/>
-              <a:buNone/>
-              <a:defRPr/>
-            </a:lvl3pPr>
-            <a:lvl4pPr lvl="3">
-              <a:spcBef>
-                <a:spcPts val="0"/>
-              </a:spcBef>
-              <a:spcAft>
-                <a:spcPts val="0"/>
-              </a:spcAft>
-              <a:buSzPts val="1400"/>
-              <a:buNone/>
-              <a:defRPr/>
-            </a:lvl4pPr>
-            <a:lvl5pPr lvl="4">
-              <a:spcBef>
-                <a:spcPts val="0"/>
-              </a:spcBef>
-              <a:spcAft>
-                <a:spcPts val="0"/>
-              </a:spcAft>
-              <a:buSzPts val="1400"/>
-              <a:buNone/>
-              <a:defRPr/>
-            </a:lvl5pPr>
-            <a:lvl6pPr lvl="5">
-              <a:spcBef>
-                <a:spcPts val="0"/>
-              </a:spcBef>
-              <a:spcAft>
-                <a:spcPts val="0"/>
-              </a:spcAft>
-              <a:buSzPts val="1400"/>
-              <a:buNone/>
-              <a:defRPr/>
-            </a:lvl6pPr>
-            <a:lvl7pPr lvl="6">
-              <a:spcBef>
-                <a:spcPts val="0"/>
-              </a:spcBef>
-              <a:spcAft>
-                <a:spcPts val="0"/>
-              </a:spcAft>
-              <a:buSzPts val="1400"/>
-              <a:buNone/>
-              <a:defRPr/>
-            </a:lvl7pPr>
-            <a:lvl8pPr lvl="7">
-              <a:spcBef>
-                <a:spcPts val="0"/>
-              </a:spcBef>
-              <a:spcAft>
-                <a:spcPts val="0"/>
-              </a:spcAft>
-              <a:buSzPts val="1400"/>
-              <a:buNone/>
-              <a:defRPr/>
-            </a:lvl8pPr>
-            <a:lvl9pPr lvl="8">
-              <a:spcBef>
-                <a:spcPts val="0"/>
-              </a:spcBef>
-              <a:spcAft>
-                <a:spcPts val="0"/>
-              </a:spcAft>
-              <a:buSzPts val="1400"/>
-              <a:buNone/>
-              <a:defRPr/>
-            </a:lvl9pPr>
-          </a:lstStyle>
-          <a:p>
-            <a:endParaRPr/>
-          </a:p>
-        </p:txBody>
-      </p:sp>
-    </p:spTree>
-  </p:cSld>
-  <p:clrMapOvr>
-    <a:masterClrMapping/>
-  </p:clrMapOvr>
-</p:sldLayout>
-</file>
-
-<file path=ppt/slideLayouts/slideLayout7.xml><?xml version="1.0" encoding="utf-8"?>
-<p:sldLayout xmlns:a="http://schemas.openxmlformats.org/drawingml/2006/main" xmlns:r="http://schemas.openxmlformats.org/officeDocument/2006/relationships" xmlns:p="http://schemas.openxmlformats.org/presentationml/2006/main" matchingName="Content with Caption" type="objTx">
-  <p:cSld name="OBJECT_WITH_CAPTION_TEXT">
-    <p:spTree>
-      <p:nvGrpSpPr>
-        <p:cNvPr id="1" name="Shape 37"/>
-        <p:cNvGrpSpPr/>
-        <p:nvPr/>
-      </p:nvGrpSpPr>
-      <p:grpSpPr>
-        <a:xfrm>
-          <a:off x="0" y="0"/>
-          <a:ext cx="0" cy="0"/>
-          <a:chOff x="0" y="0"/>
-          <a:chExt cx="0" cy="0"/>
-        </a:xfrm>
-      </p:grpSpPr>
-      <p:sp>
-        <p:nvSpPr>
-          <p:cNvPr id="38" name="Google Shape;38;p21"/>
-          <p:cNvSpPr txBox="1">
-            <a:spLocks noGrp="1"/>
-          </p:cNvSpPr>
-          <p:nvPr>
-            <p:ph type="body" idx="1"/>
-          </p:nvPr>
-        </p:nvSpPr>
-        <p:spPr>
-          <a:xfrm>
-            <a:off x="5183188" y="1828799"/>
-            <a:ext cx="6172200" cy="4850295"/>
-          </a:xfrm>
-          <a:prstGeom prst="rect">
-            <a:avLst/>
-          </a:prstGeom>
-          <a:noFill/>
-          <a:ln>
-            <a:noFill/>
-          </a:ln>
-        </p:spPr>
-        <p:txBody>
-          <a:bodyPr spcFirstLastPara="1" wrap="square" lIns="91425" tIns="45700" rIns="91425" bIns="45700" anchor="t" anchorCtr="0">
-            <a:normAutofit/>
-          </a:bodyPr>
-          <a:lstStyle>
-            <a:lvl1pPr marL="457200" lvl="0" indent="-381000" algn="l">
-              <a:lnSpc>
-                <a:spcPct val="100000"/>
-              </a:lnSpc>
-              <a:spcBef>
-                <a:spcPts val="1000"/>
-              </a:spcBef>
-              <a:spcAft>
-                <a:spcPts val="0"/>
-              </a:spcAft>
-              <a:buSzPts val="2400"/>
-              <a:buChar char="•"/>
-              <a:defRPr sz="3200"/>
-            </a:lvl1pPr>
-            <a:lvl2pPr marL="914400" lvl="1" indent="-361950" algn="l">
-              <a:lnSpc>
-                <a:spcPct val="90000"/>
-              </a:lnSpc>
-              <a:spcBef>
-                <a:spcPts val="500"/>
-              </a:spcBef>
-              <a:spcAft>
-                <a:spcPts val="0"/>
-              </a:spcAft>
-              <a:buSzPts val="2100"/>
-              <a:buChar char="•"/>
-              <a:defRPr sz="2800"/>
-            </a:lvl2pPr>
-            <a:lvl3pPr marL="1371600" lvl="2" indent="-342900" algn="l">
-              <a:lnSpc>
-                <a:spcPct val="90000"/>
-              </a:lnSpc>
-              <a:spcBef>
-                <a:spcPts val="500"/>
-              </a:spcBef>
-              <a:spcAft>
-                <a:spcPts val="0"/>
-              </a:spcAft>
-              <a:buSzPts val="1800"/>
-              <a:buChar char="•"/>
-              <a:defRPr sz="2400"/>
-            </a:lvl3pPr>
-            <a:lvl4pPr marL="1828800" lvl="3" indent="-323850" algn="l">
-              <a:lnSpc>
-                <a:spcPct val="90000"/>
-              </a:lnSpc>
-              <a:spcBef>
-                <a:spcPts val="500"/>
-              </a:spcBef>
-              <a:spcAft>
-                <a:spcPts val="0"/>
-              </a:spcAft>
-              <a:buSzPts val="1500"/>
-              <a:buChar char="•"/>
-              <a:defRPr sz="2000"/>
-            </a:lvl4pPr>
-            <a:lvl5pPr marL="2286000" lvl="4" indent="-323850" algn="l">
-              <a:lnSpc>
-                <a:spcPct val="90000"/>
-              </a:lnSpc>
-              <a:spcBef>
-                <a:spcPts val="500"/>
-              </a:spcBef>
-              <a:spcAft>
-                <a:spcPts val="0"/>
-              </a:spcAft>
-              <a:buSzPts val="1500"/>
-              <a:buChar char="•"/>
-              <a:defRPr sz="2000"/>
-            </a:lvl5pPr>
-            <a:lvl6pPr marL="2743200" lvl="5" indent="-355600" algn="l">
-              <a:lnSpc>
-                <a:spcPct val="90000"/>
-              </a:lnSpc>
-              <a:spcBef>
-                <a:spcPts val="500"/>
-              </a:spcBef>
-              <a:spcAft>
-                <a:spcPts val="0"/>
-              </a:spcAft>
-              <a:buClr>
-                <a:schemeClr val="dk1"/>
-              </a:buClr>
-              <a:buSzPts val="2000"/>
-              <a:buChar char="•"/>
-              <a:defRPr sz="2000"/>
-            </a:lvl6pPr>
-            <a:lvl7pPr marL="3200400" lvl="6" indent="-355600" algn="l">
-              <a:lnSpc>
-                <a:spcPct val="90000"/>
-              </a:lnSpc>
-              <a:spcBef>
-                <a:spcPts val="500"/>
-              </a:spcBef>
-              <a:spcAft>
-                <a:spcPts val="0"/>
-              </a:spcAft>
-              <a:buClr>
-                <a:schemeClr val="dk1"/>
-              </a:buClr>
-              <a:buSzPts val="2000"/>
-              <a:buChar char="•"/>
-              <a:defRPr sz="2000"/>
-            </a:lvl7pPr>
-            <a:lvl8pPr marL="3657600" lvl="7" indent="-355600" algn="l">
-              <a:lnSpc>
-                <a:spcPct val="90000"/>
-              </a:lnSpc>
-              <a:spcBef>
-                <a:spcPts val="500"/>
-              </a:spcBef>
-              <a:spcAft>
-                <a:spcPts val="0"/>
-              </a:spcAft>
-              <a:buClr>
-                <a:schemeClr val="dk1"/>
-              </a:buClr>
-              <a:buSzPts val="2000"/>
-              <a:buChar char="•"/>
-              <a:defRPr sz="2000"/>
-            </a:lvl8pPr>
-            <a:lvl9pPr marL="4114800" lvl="8" indent="-355600" algn="l">
-              <a:lnSpc>
-                <a:spcPct val="90000"/>
-              </a:lnSpc>
-              <a:spcBef>
-                <a:spcPts val="500"/>
-              </a:spcBef>
-              <a:spcAft>
-                <a:spcPts val="0"/>
-              </a:spcAft>
-              <a:buClr>
-                <a:schemeClr val="dk1"/>
-              </a:buClr>
-              <a:buSzPts val="2000"/>
-              <a:buChar char="•"/>
-              <a:defRPr sz="2000"/>
-            </a:lvl9pPr>
-          </a:lstStyle>
-          <a:p>
-            <a:endParaRPr dirty="0"/>
-          </a:p>
-        </p:txBody>
-      </p:sp>
-      <p:sp>
-        <p:nvSpPr>
-          <p:cNvPr id="39" name="Google Shape;39;p21"/>
-          <p:cNvSpPr txBox="1">
-            <a:spLocks noGrp="1"/>
-          </p:cNvSpPr>
-          <p:nvPr>
-            <p:ph type="body" idx="2"/>
-          </p:nvPr>
-        </p:nvSpPr>
-        <p:spPr>
-          <a:xfrm>
-            <a:off x="839788" y="1828800"/>
-            <a:ext cx="3932237" cy="4850296"/>
-          </a:xfrm>
-          <a:prstGeom prst="rect">
-            <a:avLst/>
-          </a:prstGeom>
-          <a:noFill/>
-          <a:ln>
-            <a:noFill/>
-          </a:ln>
-        </p:spPr>
-        <p:txBody>
-          <a:bodyPr spcFirstLastPara="1" wrap="square" lIns="91425" tIns="45700" rIns="91425" bIns="45700" anchor="t" anchorCtr="0">
-            <a:normAutofit/>
-          </a:bodyPr>
-          <a:lstStyle>
-            <a:lvl1pPr marL="457200" lvl="0" indent="-228600" algn="l">
-              <a:lnSpc>
-                <a:spcPct val="100000"/>
-              </a:lnSpc>
-              <a:spcBef>
-                <a:spcPts val="1000"/>
-              </a:spcBef>
-              <a:spcAft>
-                <a:spcPts val="0"/>
-              </a:spcAft>
-              <a:buSzPts val="1200"/>
-              <a:buNone/>
-              <a:defRPr sz="1600"/>
-            </a:lvl1pPr>
-            <a:lvl2pPr marL="914400" lvl="1" indent="-228600" algn="l">
-              <a:lnSpc>
-                <a:spcPct val="90000"/>
-              </a:lnSpc>
-              <a:spcBef>
-                <a:spcPts val="500"/>
-              </a:spcBef>
-              <a:spcAft>
-                <a:spcPts val="0"/>
-              </a:spcAft>
-              <a:buSzPts val="1050"/>
-              <a:buNone/>
-              <a:defRPr sz="1400"/>
-            </a:lvl2pPr>
-            <a:lvl3pPr marL="1371600" lvl="2" indent="-228600" algn="l">
-              <a:lnSpc>
-                <a:spcPct val="90000"/>
-              </a:lnSpc>
-              <a:spcBef>
-                <a:spcPts val="500"/>
-              </a:spcBef>
-              <a:spcAft>
-                <a:spcPts val="0"/>
-              </a:spcAft>
-              <a:buSzPts val="900"/>
-              <a:buNone/>
-              <a:defRPr sz="1200"/>
-            </a:lvl3pPr>
-            <a:lvl4pPr marL="1828800" lvl="3" indent="-228600" algn="l">
-              <a:lnSpc>
-                <a:spcPct val="90000"/>
-              </a:lnSpc>
-              <a:spcBef>
-                <a:spcPts val="500"/>
-              </a:spcBef>
-              <a:spcAft>
-                <a:spcPts val="0"/>
-              </a:spcAft>
-              <a:buSzPts val="750"/>
-              <a:buNone/>
-              <a:defRPr sz="1000"/>
-            </a:lvl4pPr>
-            <a:lvl5pPr marL="2286000" lvl="4" indent="-228600" algn="l">
-              <a:lnSpc>
-                <a:spcPct val="90000"/>
-              </a:lnSpc>
-              <a:spcBef>
-                <a:spcPts val="500"/>
-              </a:spcBef>
-              <a:spcAft>
-                <a:spcPts val="0"/>
-              </a:spcAft>
-              <a:buSzPts val="750"/>
-              <a:buNone/>
-              <a:defRPr sz="1000"/>
-            </a:lvl5pPr>
-            <a:lvl6pPr marL="2743200" lvl="5" indent="-228600" algn="l">
-              <a:lnSpc>
-                <a:spcPct val="90000"/>
-              </a:lnSpc>
-              <a:spcBef>
-                <a:spcPts val="500"/>
-              </a:spcBef>
-              <a:spcAft>
-                <a:spcPts val="0"/>
-              </a:spcAft>
-              <a:buClr>
-                <a:schemeClr val="dk1"/>
-              </a:buClr>
-              <a:buSzPts val="1000"/>
-              <a:buNone/>
-              <a:defRPr sz="1000"/>
-            </a:lvl6pPr>
-            <a:lvl7pPr marL="3200400" lvl="6" indent="-228600" algn="l">
-              <a:lnSpc>
-                <a:spcPct val="90000"/>
-              </a:lnSpc>
-              <a:spcBef>
-                <a:spcPts val="500"/>
-              </a:spcBef>
-              <a:spcAft>
-                <a:spcPts val="0"/>
-              </a:spcAft>
-              <a:buClr>
-                <a:schemeClr val="dk1"/>
-              </a:buClr>
-              <a:buSzPts val="1000"/>
-              <a:buNone/>
-              <a:defRPr sz="1000"/>
-            </a:lvl7pPr>
-            <a:lvl8pPr marL="3657600" lvl="7" indent="-228600" algn="l">
-              <a:lnSpc>
-                <a:spcPct val="90000"/>
-              </a:lnSpc>
-              <a:spcBef>
-                <a:spcPts val="500"/>
-              </a:spcBef>
-              <a:spcAft>
-                <a:spcPts val="0"/>
-              </a:spcAft>
-              <a:buClr>
-                <a:schemeClr val="dk1"/>
-              </a:buClr>
-              <a:buSzPts val="1000"/>
-              <a:buNone/>
-              <a:defRPr sz="1000"/>
-            </a:lvl8pPr>
-            <a:lvl9pPr marL="4114800" lvl="8" indent="-228600" algn="l">
-              <a:lnSpc>
-                <a:spcPct val="90000"/>
-              </a:lnSpc>
-              <a:spcBef>
-                <a:spcPts val="500"/>
-              </a:spcBef>
-              <a:spcAft>
-                <a:spcPts val="0"/>
-              </a:spcAft>
-              <a:buClr>
-                <a:schemeClr val="dk1"/>
-              </a:buClr>
-              <a:buSzPts val="1000"/>
-              <a:buNone/>
-              <a:defRPr sz="1000"/>
-            </a:lvl9pPr>
-          </a:lstStyle>
-          <a:p>
-            <a:endParaRPr dirty="0"/>
-          </a:p>
-        </p:txBody>
-      </p:sp>
-      <p:sp>
-        <p:nvSpPr>
-          <p:cNvPr id="40" name="Google Shape;40;p21"/>
-          <p:cNvSpPr txBox="1">
-            <a:spLocks noGrp="1"/>
-          </p:cNvSpPr>
-          <p:nvPr>
-            <p:ph type="title"/>
-          </p:nvPr>
-        </p:nvSpPr>
-        <p:spPr>
-          <a:xfrm>
-            <a:off x="836612" y="0"/>
-            <a:ext cx="10515600" cy="1371600"/>
-          </a:xfrm>
-          <a:prstGeom prst="rect">
-            <a:avLst/>
-          </a:prstGeom>
-          <a:noFill/>
-          <a:ln>
-            <a:noFill/>
-          </a:ln>
-        </p:spPr>
-        <p:txBody>
-          <a:bodyPr spcFirstLastPara="1" wrap="square" lIns="91425" tIns="45700" rIns="91425" bIns="45700" anchor="ctr" anchorCtr="0">
-            <a:normAutofit/>
-          </a:bodyPr>
-          <a:lstStyle>
-            <a:lvl1pPr lvl="0" algn="l">
-              <a:lnSpc>
-                <a:spcPct val="90000"/>
-              </a:lnSpc>
-              <a:spcBef>
-                <a:spcPts val="0"/>
-              </a:spcBef>
-              <a:spcAft>
-                <a:spcPts val="0"/>
-              </a:spcAft>
-              <a:buClr>
-                <a:srgbClr val="006633"/>
-              </a:buClr>
-              <a:buSzPts val="4400"/>
-              <a:buFont typeface="Calibri"/>
-              <a:buNone/>
-              <a:defRPr sz="4400"/>
-            </a:lvl1pPr>
-            <a:lvl2pPr lvl="1">
-              <a:spcBef>
-                <a:spcPts val="0"/>
-              </a:spcBef>
-              <a:spcAft>
-                <a:spcPts val="0"/>
-              </a:spcAft>
-              <a:buSzPts val="1400"/>
-              <a:buNone/>
-              <a:defRPr/>
-            </a:lvl2pPr>
-            <a:lvl3pPr lvl="2">
-              <a:spcBef>
-                <a:spcPts val="0"/>
-              </a:spcBef>
-              <a:spcAft>
-                <a:spcPts val="0"/>
-              </a:spcAft>
-              <a:buSzPts val="1400"/>
-              <a:buNone/>
-              <a:defRPr/>
-            </a:lvl3pPr>
-            <a:lvl4pPr lvl="3">
-              <a:spcBef>
-                <a:spcPts val="0"/>
-              </a:spcBef>
-              <a:spcAft>
-                <a:spcPts val="0"/>
-              </a:spcAft>
-              <a:buSzPts val="1400"/>
-              <a:buNone/>
-              <a:defRPr/>
-            </a:lvl4pPr>
-            <a:lvl5pPr lvl="4">
-              <a:spcBef>
-                <a:spcPts val="0"/>
-              </a:spcBef>
-              <a:spcAft>
-                <a:spcPts val="0"/>
-              </a:spcAft>
-              <a:buSzPts val="1400"/>
-              <a:buNone/>
-              <a:defRPr/>
-            </a:lvl5pPr>
-            <a:lvl6pPr lvl="5">
-              <a:spcBef>
-                <a:spcPts val="0"/>
-              </a:spcBef>
-              <a:spcAft>
-                <a:spcPts val="0"/>
-              </a:spcAft>
-              <a:buSzPts val="1400"/>
-              <a:buNone/>
-              <a:defRPr/>
-            </a:lvl6pPr>
-            <a:lvl7pPr lvl="6">
-              <a:spcBef>
-                <a:spcPts val="0"/>
-              </a:spcBef>
-              <a:spcAft>
-                <a:spcPts val="0"/>
-              </a:spcAft>
-              <a:buSzPts val="1400"/>
-              <a:buNone/>
-              <a:defRPr/>
-            </a:lvl7pPr>
-            <a:lvl8pPr lvl="7">
-              <a:spcBef>
-                <a:spcPts val="0"/>
-              </a:spcBef>
-              <a:spcAft>
-                <a:spcPts val="0"/>
-              </a:spcAft>
-              <a:buSzPts val="1400"/>
-              <a:buNone/>
-              <a:defRPr/>
-            </a:lvl8pPr>
-            <a:lvl9pPr lvl="8">
-              <a:spcBef>
-                <a:spcPts val="0"/>
-              </a:spcBef>
-              <a:spcAft>
-                <a:spcPts val="0"/>
-              </a:spcAft>
-              <a:buSzPts val="1400"/>
-              <a:buNone/>
-              <a:defRPr/>
-            </a:lvl9pPr>
-          </a:lstStyle>
-          <a:p>
-            <a:endParaRPr/>
-          </a:p>
-        </p:txBody>
-      </p:sp>
-    </p:spTree>
-  </p:cSld>
-  <p:clrMapOvr>
-    <a:masterClrMapping/>
-  </p:clrMapOvr>
-</p:sldLayout>
-</file>
-
-<file path=ppt/slideLayouts/slideLayout8.xml><?xml version="1.0" encoding="utf-8"?>
-<p:sldLayout xmlns:a="http://schemas.openxmlformats.org/drawingml/2006/main" xmlns:r="http://schemas.openxmlformats.org/officeDocument/2006/relationships" xmlns:p="http://schemas.openxmlformats.org/presentationml/2006/main" matchingName="Picture with Caption" type="picTx">
-  <p:cSld name="PICTURE_WITH_CAPTION_TEXT">
-    <p:spTree>
-      <p:nvGrpSpPr>
-        <p:cNvPr id="1" name="Shape 41"/>
-        <p:cNvGrpSpPr/>
-        <p:nvPr/>
-      </p:nvGrpSpPr>
-      <p:grpSpPr>
-        <a:xfrm>
-          <a:off x="0" y="0"/>
-          <a:ext cx="0" cy="0"/>
-          <a:chOff x="0" y="0"/>
-          <a:chExt cx="0" cy="0"/>
-        </a:xfrm>
-      </p:grpSpPr>
-      <p:sp>
-        <p:nvSpPr>
-          <p:cNvPr id="42" name="Google Shape;42;p22"/>
-          <p:cNvSpPr>
-            <a:spLocks noGrp="1"/>
-          </p:cNvSpPr>
-          <p:nvPr>
-            <p:ph type="pic" idx="2"/>
-          </p:nvPr>
-        </p:nvSpPr>
-        <p:spPr>
-          <a:xfrm>
-            <a:off x="5225392" y="1747800"/>
-            <a:ext cx="6128408" cy="4188766"/>
-          </a:xfrm>
-          <a:prstGeom prst="rect">
-            <a:avLst/>
-          </a:prstGeom>
-          <a:noFill/>
-          <a:ln>
-            <a:noFill/>
-          </a:ln>
-        </p:spPr>
-        <p:txBody>
-          <a:bodyPr spcFirstLastPara="1" wrap="square" lIns="91425" tIns="45700" rIns="91425" bIns="45700" anchor="t" anchorCtr="0">
-            <a:normAutofit/>
-          </a:bodyPr>
-          <a:lstStyle>
-            <a:lvl1pPr marR="0" lvl="0" algn="l" rtl="0">
-              <a:lnSpc>
-                <a:spcPct val="90000"/>
-              </a:lnSpc>
-              <a:spcBef>
-                <a:spcPts val="1000"/>
-              </a:spcBef>
-              <a:spcAft>
-                <a:spcPts val="0"/>
-              </a:spcAft>
-              <a:buClr>
-                <a:srgbClr val="006633"/>
-              </a:buClr>
-              <a:buSzPts val="2400"/>
-              <a:buFont typeface="Arial"/>
-              <a:buNone/>
-              <a:defRPr sz="3200" b="0" i="0" u="none" strike="noStrike" cap="none">
-                <a:solidFill>
-                  <a:schemeClr val="dk1"/>
-                </a:solidFill>
-                <a:latin typeface="Calibri"/>
-                <a:ea typeface="Calibri"/>
-                <a:cs typeface="Calibri"/>
-                <a:sym typeface="Calibri"/>
-              </a:defRPr>
-            </a:lvl1pPr>
-            <a:lvl2pPr marR="0" lvl="1" algn="l" rtl="0">
-              <a:lnSpc>
-                <a:spcPct val="90000"/>
-              </a:lnSpc>
-              <a:spcBef>
-                <a:spcPts val="500"/>
-              </a:spcBef>
-              <a:spcAft>
-                <a:spcPts val="0"/>
-              </a:spcAft>
-              <a:buClr>
-                <a:srgbClr val="006633"/>
-              </a:buClr>
-              <a:buSzPts val="2100"/>
-              <a:buFont typeface="Arial"/>
-              <a:buNone/>
-              <a:defRPr sz="2800" b="0" i="0" u="none" strike="noStrike" cap="none">
-                <a:solidFill>
-                  <a:schemeClr val="dk1"/>
-                </a:solidFill>
-                <a:latin typeface="Calibri"/>
-                <a:ea typeface="Calibri"/>
-                <a:cs typeface="Calibri"/>
-                <a:sym typeface="Calibri"/>
-              </a:defRPr>
-            </a:lvl2pPr>
-            <a:lvl3pPr marR="0" lvl="2" algn="l" rtl="0">
-              <a:lnSpc>
-                <a:spcPct val="90000"/>
-              </a:lnSpc>
-              <a:spcBef>
-                <a:spcPts val="500"/>
-              </a:spcBef>
-              <a:spcAft>
-                <a:spcPts val="0"/>
-              </a:spcAft>
-              <a:buClr>
-                <a:srgbClr val="006633"/>
-              </a:buClr>
-              <a:buSzPts val="1800"/>
-              <a:buFont typeface="Arial"/>
-              <a:buNone/>
-              <a:defRPr sz="2400" b="0" i="0" u="none" strike="noStrike" cap="none">
-                <a:solidFill>
-                  <a:schemeClr val="dk1"/>
-                </a:solidFill>
-                <a:latin typeface="Calibri"/>
-                <a:ea typeface="Calibri"/>
-                <a:cs typeface="Calibri"/>
-                <a:sym typeface="Calibri"/>
-              </a:defRPr>
-            </a:lvl3pPr>
-            <a:lvl4pPr marR="0" lvl="3" algn="l" rtl="0">
-              <a:lnSpc>
-                <a:spcPct val="90000"/>
-              </a:lnSpc>
-              <a:spcBef>
-                <a:spcPts val="500"/>
-              </a:spcBef>
-              <a:spcAft>
-                <a:spcPts val="0"/>
-              </a:spcAft>
-              <a:buClr>
-                <a:srgbClr val="006633"/>
-              </a:buClr>
-              <a:buSzPts val="1500"/>
-              <a:buFont typeface="Arial"/>
-              <a:buNone/>
-              <a:defRPr sz="2000" b="0" i="0" u="none" strike="noStrike" cap="none">
-                <a:solidFill>
-                  <a:schemeClr val="dk1"/>
-                </a:solidFill>
-                <a:latin typeface="Calibri"/>
-                <a:ea typeface="Calibri"/>
-                <a:cs typeface="Calibri"/>
-                <a:sym typeface="Calibri"/>
-              </a:defRPr>
-            </a:lvl4pPr>
-            <a:lvl5pPr marR="0" lvl="4" algn="l" rtl="0">
-              <a:lnSpc>
-                <a:spcPct val="90000"/>
-              </a:lnSpc>
-              <a:spcBef>
-                <a:spcPts val="500"/>
-              </a:spcBef>
-              <a:spcAft>
-                <a:spcPts val="0"/>
-              </a:spcAft>
-              <a:buClr>
-                <a:srgbClr val="006633"/>
-              </a:buClr>
-              <a:buSzPts val="1500"/>
-              <a:buFont typeface="Arial"/>
-              <a:buNone/>
-              <a:defRPr sz="2000" b="0" i="0" u="none" strike="noStrike" cap="none">
-                <a:solidFill>
-                  <a:schemeClr val="dk1"/>
-                </a:solidFill>
-                <a:latin typeface="Calibri"/>
-                <a:ea typeface="Calibri"/>
-                <a:cs typeface="Calibri"/>
-                <a:sym typeface="Calibri"/>
-              </a:defRPr>
-            </a:lvl5pPr>
-            <a:lvl6pPr marR="0" lvl="5" algn="l" rtl="0">
-              <a:lnSpc>
-                <a:spcPct val="90000"/>
-              </a:lnSpc>
-              <a:spcBef>
-                <a:spcPts val="500"/>
-              </a:spcBef>
-              <a:spcAft>
-                <a:spcPts val="0"/>
-              </a:spcAft>
-              <a:buClr>
-                <a:schemeClr val="dk1"/>
-              </a:buClr>
-              <a:buSzPts val="2000"/>
-              <a:buFont typeface="Arial"/>
-              <a:buNone/>
-              <a:defRPr sz="2000" b="0" i="0" u="none" strike="noStrike" cap="none">
-                <a:solidFill>
-                  <a:schemeClr val="dk1"/>
-                </a:solidFill>
-                <a:latin typeface="Calibri"/>
-                <a:ea typeface="Calibri"/>
-                <a:cs typeface="Calibri"/>
-                <a:sym typeface="Calibri"/>
-              </a:defRPr>
-            </a:lvl6pPr>
-            <a:lvl7pPr marR="0" lvl="6" algn="l" rtl="0">
-              <a:lnSpc>
-                <a:spcPct val="90000"/>
-              </a:lnSpc>
-              <a:spcBef>
-                <a:spcPts val="500"/>
-              </a:spcBef>
-              <a:spcAft>
-                <a:spcPts val="0"/>
-              </a:spcAft>
-              <a:buClr>
-                <a:schemeClr val="dk1"/>
-              </a:buClr>
-              <a:buSzPts val="2000"/>
-              <a:buFont typeface="Arial"/>
-              <a:buNone/>
-              <a:defRPr sz="2000" b="0" i="0" u="none" strike="noStrike" cap="none">
-                <a:solidFill>
-                  <a:schemeClr val="dk1"/>
-                </a:solidFill>
-                <a:latin typeface="Calibri"/>
-                <a:ea typeface="Calibri"/>
-                <a:cs typeface="Calibri"/>
-                <a:sym typeface="Calibri"/>
-              </a:defRPr>
-            </a:lvl7pPr>
-            <a:lvl8pPr marR="0" lvl="7" algn="l" rtl="0">
-              <a:lnSpc>
-                <a:spcPct val="90000"/>
-              </a:lnSpc>
-              <a:spcBef>
-                <a:spcPts val="500"/>
-              </a:spcBef>
-              <a:spcAft>
-                <a:spcPts val="0"/>
-              </a:spcAft>
-              <a:buClr>
-                <a:schemeClr val="dk1"/>
-              </a:buClr>
-              <a:buSzPts val="2000"/>
-              <a:buFont typeface="Arial"/>
-              <a:buNone/>
-              <a:defRPr sz="2000" b="0" i="0" u="none" strike="noStrike" cap="none">
-                <a:solidFill>
-                  <a:schemeClr val="dk1"/>
-                </a:solidFill>
-                <a:latin typeface="Calibri"/>
-                <a:ea typeface="Calibri"/>
-                <a:cs typeface="Calibri"/>
-                <a:sym typeface="Calibri"/>
-              </a:defRPr>
-            </a:lvl8pPr>
-            <a:lvl9pPr marR="0" lvl="8" algn="l" rtl="0">
-              <a:lnSpc>
-                <a:spcPct val="90000"/>
-              </a:lnSpc>
-              <a:spcBef>
-                <a:spcPts val="500"/>
-              </a:spcBef>
-              <a:spcAft>
-                <a:spcPts val="0"/>
-              </a:spcAft>
-              <a:buClr>
-                <a:schemeClr val="dk1"/>
-              </a:buClr>
-              <a:buSzPts val="2000"/>
-              <a:buFont typeface="Arial"/>
-              <a:buNone/>
-              <a:defRPr sz="2000" b="0" i="0" u="none" strike="noStrike" cap="none">
-                <a:solidFill>
-                  <a:schemeClr val="dk1"/>
-                </a:solidFill>
-                <a:latin typeface="Calibri"/>
-                <a:ea typeface="Calibri"/>
-                <a:cs typeface="Calibri"/>
-                <a:sym typeface="Calibri"/>
-              </a:defRPr>
-            </a:lvl9pPr>
-          </a:lstStyle>
-          <a:p>
-            <a:endParaRPr dirty="0"/>
-          </a:p>
-        </p:txBody>
-      </p:sp>
-      <p:sp>
-        <p:nvSpPr>
-          <p:cNvPr id="43" name="Google Shape;43;p22"/>
-          <p:cNvSpPr txBox="1">
-            <a:spLocks noGrp="1"/>
-          </p:cNvSpPr>
-          <p:nvPr>
-            <p:ph type="body" idx="1"/>
-          </p:nvPr>
-        </p:nvSpPr>
-        <p:spPr>
-          <a:xfrm>
-            <a:off x="838200" y="1737249"/>
-            <a:ext cx="3932237" cy="5120751"/>
-          </a:xfrm>
-          <a:prstGeom prst="rect">
-            <a:avLst/>
-          </a:prstGeom>
-          <a:noFill/>
-          <a:ln>
-            <a:noFill/>
-          </a:ln>
-        </p:spPr>
-        <p:txBody>
-          <a:bodyPr spcFirstLastPara="1" wrap="square" lIns="91425" tIns="45700" rIns="91425" bIns="45700" anchor="t" anchorCtr="0">
-            <a:normAutofit/>
-          </a:bodyPr>
-          <a:lstStyle>
-            <a:lvl1pPr marL="457200" lvl="0" indent="-228600" algn="l">
-              <a:lnSpc>
-                <a:spcPct val="100000"/>
-              </a:lnSpc>
-              <a:spcBef>
-                <a:spcPts val="1000"/>
-              </a:spcBef>
-              <a:spcAft>
-                <a:spcPts val="0"/>
-              </a:spcAft>
-              <a:buSzPts val="1200"/>
-              <a:buNone/>
-              <a:defRPr sz="1600"/>
-            </a:lvl1pPr>
-            <a:lvl2pPr marL="914400" lvl="1" indent="-228600" algn="l">
-              <a:lnSpc>
-                <a:spcPct val="90000"/>
-              </a:lnSpc>
-              <a:spcBef>
-                <a:spcPts val="500"/>
-              </a:spcBef>
-              <a:spcAft>
-                <a:spcPts val="0"/>
-              </a:spcAft>
-              <a:buSzPts val="1050"/>
-              <a:buNone/>
-              <a:defRPr sz="1400"/>
-            </a:lvl2pPr>
-            <a:lvl3pPr marL="1371600" lvl="2" indent="-228600" algn="l">
-              <a:lnSpc>
-                <a:spcPct val="90000"/>
-              </a:lnSpc>
-              <a:spcBef>
-                <a:spcPts val="500"/>
-              </a:spcBef>
-              <a:spcAft>
-                <a:spcPts val="0"/>
-              </a:spcAft>
-              <a:buSzPts val="900"/>
-              <a:buNone/>
-              <a:defRPr sz="1200"/>
-            </a:lvl3pPr>
-            <a:lvl4pPr marL="1828800" lvl="3" indent="-228600" algn="l">
-              <a:lnSpc>
-                <a:spcPct val="90000"/>
-              </a:lnSpc>
-              <a:spcBef>
-                <a:spcPts val="500"/>
-              </a:spcBef>
-              <a:spcAft>
-                <a:spcPts val="0"/>
-              </a:spcAft>
-              <a:buSzPts val="750"/>
-              <a:buNone/>
-              <a:defRPr sz="1000"/>
-            </a:lvl4pPr>
-            <a:lvl5pPr marL="2286000" lvl="4" indent="-228600" algn="l">
-              <a:lnSpc>
-                <a:spcPct val="90000"/>
-              </a:lnSpc>
-              <a:spcBef>
-                <a:spcPts val="500"/>
-              </a:spcBef>
-              <a:spcAft>
-                <a:spcPts val="0"/>
-              </a:spcAft>
-              <a:buSzPts val="750"/>
-              <a:buNone/>
-              <a:defRPr sz="1000"/>
-            </a:lvl5pPr>
-            <a:lvl6pPr marL="2743200" lvl="5" indent="-228600" algn="l">
-              <a:lnSpc>
-                <a:spcPct val="90000"/>
-              </a:lnSpc>
-              <a:spcBef>
-                <a:spcPts val="500"/>
-              </a:spcBef>
-              <a:spcAft>
-                <a:spcPts val="0"/>
-              </a:spcAft>
-              <a:buClr>
-                <a:schemeClr val="dk1"/>
-              </a:buClr>
-              <a:buSzPts val="1000"/>
-              <a:buNone/>
-              <a:defRPr sz="1000"/>
-            </a:lvl6pPr>
-            <a:lvl7pPr marL="3200400" lvl="6" indent="-228600" algn="l">
-              <a:lnSpc>
-                <a:spcPct val="90000"/>
-              </a:lnSpc>
-              <a:spcBef>
-                <a:spcPts val="500"/>
-              </a:spcBef>
-              <a:spcAft>
-                <a:spcPts val="0"/>
-              </a:spcAft>
-              <a:buClr>
-                <a:schemeClr val="dk1"/>
-              </a:buClr>
-              <a:buSzPts val="1000"/>
-              <a:buNone/>
-              <a:defRPr sz="1000"/>
-            </a:lvl7pPr>
-            <a:lvl8pPr marL="3657600" lvl="7" indent="-228600" algn="l">
-              <a:lnSpc>
-                <a:spcPct val="90000"/>
-              </a:lnSpc>
-              <a:spcBef>
-                <a:spcPts val="500"/>
-              </a:spcBef>
-              <a:spcAft>
-                <a:spcPts val="0"/>
-              </a:spcAft>
-              <a:buClr>
-                <a:schemeClr val="dk1"/>
-              </a:buClr>
-              <a:buSzPts val="1000"/>
-              <a:buNone/>
-              <a:defRPr sz="1000"/>
-            </a:lvl8pPr>
-            <a:lvl9pPr marL="4114800" lvl="8" indent="-228600" algn="l">
-              <a:lnSpc>
-                <a:spcPct val="90000"/>
-              </a:lnSpc>
-              <a:spcBef>
-                <a:spcPts val="500"/>
-              </a:spcBef>
-              <a:spcAft>
-                <a:spcPts val="0"/>
-              </a:spcAft>
-              <a:buClr>
-                <a:schemeClr val="dk1"/>
-              </a:buClr>
-              <a:buSzPts val="1000"/>
-              <a:buNone/>
-              <a:defRPr sz="1000"/>
-            </a:lvl9pPr>
-          </a:lstStyle>
-          <a:p>
-            <a:endParaRPr dirty="0"/>
-          </a:p>
-        </p:txBody>
-      </p:sp>
-      <p:sp>
-        <p:nvSpPr>
-          <p:cNvPr id="44" name="Google Shape;44;p22"/>
-          <p:cNvSpPr txBox="1">
-            <a:spLocks noGrp="1"/>
-          </p:cNvSpPr>
-          <p:nvPr>
-            <p:ph type="title"/>
-          </p:nvPr>
-        </p:nvSpPr>
-        <p:spPr>
-          <a:xfrm>
-            <a:off x="839788" y="0"/>
-            <a:ext cx="10515600" cy="1371600"/>
-          </a:xfrm>
-          <a:prstGeom prst="rect">
-            <a:avLst/>
-          </a:prstGeom>
-          <a:noFill/>
-          <a:ln>
-            <a:noFill/>
-          </a:ln>
-        </p:spPr>
-        <p:txBody>
-          <a:bodyPr spcFirstLastPara="1" wrap="square" lIns="91425" tIns="45700" rIns="91425" bIns="45700" anchor="ctr" anchorCtr="0">
-            <a:normAutofit/>
-          </a:bodyPr>
-          <a:lstStyle>
-            <a:lvl1pPr lvl="0" algn="l">
-              <a:lnSpc>
-                <a:spcPct val="90000"/>
-              </a:lnSpc>
-              <a:spcBef>
-                <a:spcPts val="0"/>
-              </a:spcBef>
-              <a:spcAft>
-                <a:spcPts val="0"/>
-              </a:spcAft>
-              <a:buClr>
-                <a:srgbClr val="006633"/>
-              </a:buClr>
-              <a:buSzPts val="4400"/>
-              <a:buFont typeface="Calibri"/>
-              <a:buNone/>
-              <a:defRPr sz="4400"/>
-            </a:lvl1pPr>
-            <a:lvl2pPr lvl="1">
-              <a:spcBef>
-                <a:spcPts val="0"/>
-              </a:spcBef>
-              <a:spcAft>
-                <a:spcPts val="0"/>
-              </a:spcAft>
-              <a:buSzPts val="1400"/>
-              <a:buNone/>
-              <a:defRPr/>
-            </a:lvl2pPr>
-            <a:lvl3pPr lvl="2">
-              <a:spcBef>
-                <a:spcPts val="0"/>
-              </a:spcBef>
-              <a:spcAft>
-                <a:spcPts val="0"/>
-              </a:spcAft>
-              <a:buSzPts val="1400"/>
-              <a:buNone/>
-              <a:defRPr/>
-            </a:lvl3pPr>
-            <a:lvl4pPr lvl="3">
-              <a:spcBef>
-                <a:spcPts val="0"/>
-              </a:spcBef>
-              <a:spcAft>
-                <a:spcPts val="0"/>
-              </a:spcAft>
-              <a:buSzPts val="1400"/>
-              <a:buNone/>
-              <a:defRPr/>
-            </a:lvl4pPr>
-            <a:lvl5pPr lvl="4">
-              <a:spcBef>
-                <a:spcPts val="0"/>
-              </a:spcBef>
-              <a:spcAft>
-                <a:spcPts val="0"/>
-              </a:spcAft>
-              <a:buSzPts val="1400"/>
-              <a:buNone/>
-              <a:defRPr/>
-            </a:lvl5pPr>
-            <a:lvl6pPr lvl="5">
-              <a:spcBef>
-                <a:spcPts val="0"/>
-              </a:spcBef>
-              <a:spcAft>
-                <a:spcPts val="0"/>
-              </a:spcAft>
-              <a:buSzPts val="1400"/>
-              <a:buNone/>
-              <a:defRPr/>
-            </a:lvl6pPr>
-            <a:lvl7pPr lvl="6">
-              <a:spcBef>
-                <a:spcPts val="0"/>
-              </a:spcBef>
-              <a:spcAft>
-                <a:spcPts val="0"/>
-              </a:spcAft>
-              <a:buSzPts val="1400"/>
-              <a:buNone/>
-              <a:defRPr/>
-            </a:lvl7pPr>
-            <a:lvl8pPr lvl="7">
-              <a:spcBef>
-                <a:spcPts val="0"/>
-              </a:spcBef>
-              <a:spcAft>
-                <a:spcPts val="0"/>
-              </a:spcAft>
-              <a:buSzPts val="1400"/>
-              <a:buNone/>
-              <a:defRPr/>
-            </a:lvl8pPr>
-            <a:lvl9pPr lvl="8">
-              <a:spcBef>
-                <a:spcPts val="0"/>
-              </a:spcBef>
-              <a:spcAft>
-                <a:spcPts val="0"/>
-              </a:spcAft>
-              <a:buSzPts val="1400"/>
-              <a:buNone/>
-              <a:defRPr/>
-            </a:lvl9pPr>
-          </a:lstStyle>
-          <a:p>
-            <a:endParaRPr/>
-          </a:p>
-        </p:txBody>
-      </p:sp>
-    </p:spTree>
-  </p:cSld>
-  <p:clrMapOvr>
-    <a:masterClrMapping/>
-  </p:clrMapOvr>
-</p:sldLayout>
-</file>
-
-<file path=ppt/slideLayouts/slideLayout9.xml><?xml version="1.0" encoding="utf-8"?>
 <p:sldLayout xmlns:a="http://schemas.openxmlformats.org/drawingml/2006/main" xmlns:r="http://schemas.openxmlformats.org/officeDocument/2006/relationships" xmlns:p="http://schemas.openxmlformats.org/presentationml/2006/main" matchingName="Section Header" type="secHead">
   <p:cSld name="SECTION_HEADER">
     <p:bg>
@@ -9523,13 +7634,933 @@
 </p:sldLayout>
 </file>
 
+<file path=ppt/slideLayouts/slideLayout6.xml><?xml version="1.0" encoding="utf-8"?>
+<p:sldLayout xmlns:a="http://schemas.openxmlformats.org/drawingml/2006/main" xmlns:r="http://schemas.openxmlformats.org/officeDocument/2006/relationships" xmlns:p="http://schemas.openxmlformats.org/presentationml/2006/main" matchingName="1_Section Header">
+  <p:cSld name="1_Section Header">
+    <p:bg>
+      <p:bgPr>
+        <a:blipFill>
+          <a:blip r:embed="rId2">
+            <a:alphaModFix/>
+          </a:blip>
+          <a:stretch>
+            <a:fillRect/>
+          </a:stretch>
+        </a:blipFill>
+        <a:effectLst/>
+      </p:bgPr>
+    </p:bg>
+    <p:spTree>
+      <p:nvGrpSpPr>
+        <p:cNvPr id="1" name="Shape 48"/>
+        <p:cNvGrpSpPr/>
+        <p:nvPr/>
+      </p:nvGrpSpPr>
+      <p:grpSpPr>
+        <a:xfrm>
+          <a:off x="0" y="0"/>
+          <a:ext cx="0" cy="0"/>
+          <a:chOff x="0" y="0"/>
+          <a:chExt cx="0" cy="0"/>
+        </a:xfrm>
+      </p:grpSpPr>
+      <p:sp>
+        <p:nvSpPr>
+          <p:cNvPr id="49" name="Google Shape;49;p24"/>
+          <p:cNvSpPr txBox="1">
+            <a:spLocks noGrp="1"/>
+          </p:cNvSpPr>
+          <p:nvPr>
+            <p:ph type="body" idx="1"/>
+          </p:nvPr>
+        </p:nvSpPr>
+        <p:spPr>
+          <a:xfrm>
+            <a:off x="838200" y="4864295"/>
+            <a:ext cx="7504134" cy="1500187"/>
+          </a:xfrm>
+          <a:prstGeom prst="rect">
+            <a:avLst/>
+          </a:prstGeom>
+          <a:noFill/>
+          <a:ln>
+            <a:noFill/>
+          </a:ln>
+        </p:spPr>
+        <p:txBody>
+          <a:bodyPr spcFirstLastPara="1" wrap="square" lIns="91425" tIns="45700" rIns="91425" bIns="45700" anchor="t" anchorCtr="0">
+            <a:normAutofit/>
+          </a:bodyPr>
+          <a:lstStyle>
+            <a:lvl1pPr marL="457200" marR="0" lvl="0" indent="-228600" algn="l">
+              <a:lnSpc>
+                <a:spcPct val="100000"/>
+              </a:lnSpc>
+              <a:spcBef>
+                <a:spcPts val="400"/>
+              </a:spcBef>
+              <a:spcAft>
+                <a:spcPts val="0"/>
+              </a:spcAft>
+              <a:buClr>
+                <a:schemeClr val="dk1"/>
+              </a:buClr>
+              <a:buSzPts val="2000"/>
+              <a:buFont typeface="Calibri"/>
+              <a:buNone/>
+              <a:defRPr sz="2000">
+                <a:solidFill>
+                  <a:schemeClr val="dk1"/>
+                </a:solidFill>
+              </a:defRPr>
+            </a:lvl1pPr>
+            <a:lvl2pPr marL="914400" lvl="1" indent="-228600" algn="l">
+              <a:lnSpc>
+                <a:spcPct val="90000"/>
+              </a:lnSpc>
+              <a:spcBef>
+                <a:spcPts val="500"/>
+              </a:spcBef>
+              <a:spcAft>
+                <a:spcPts val="0"/>
+              </a:spcAft>
+              <a:buSzPts val="1500"/>
+              <a:buNone/>
+              <a:defRPr sz="2000">
+                <a:solidFill>
+                  <a:srgbClr val="888888"/>
+                </a:solidFill>
+              </a:defRPr>
+            </a:lvl2pPr>
+            <a:lvl3pPr marL="1371600" lvl="2" indent="-228600" algn="l">
+              <a:lnSpc>
+                <a:spcPct val="90000"/>
+              </a:lnSpc>
+              <a:spcBef>
+                <a:spcPts val="500"/>
+              </a:spcBef>
+              <a:spcAft>
+                <a:spcPts val="0"/>
+              </a:spcAft>
+              <a:buSzPts val="1350"/>
+              <a:buNone/>
+              <a:defRPr sz="1800">
+                <a:solidFill>
+                  <a:srgbClr val="888888"/>
+                </a:solidFill>
+              </a:defRPr>
+            </a:lvl3pPr>
+            <a:lvl4pPr marL="1828800" lvl="3" indent="-228600" algn="l">
+              <a:lnSpc>
+                <a:spcPct val="90000"/>
+              </a:lnSpc>
+              <a:spcBef>
+                <a:spcPts val="500"/>
+              </a:spcBef>
+              <a:spcAft>
+                <a:spcPts val="0"/>
+              </a:spcAft>
+              <a:buSzPts val="1200"/>
+              <a:buNone/>
+              <a:defRPr sz="1600">
+                <a:solidFill>
+                  <a:srgbClr val="888888"/>
+                </a:solidFill>
+              </a:defRPr>
+            </a:lvl4pPr>
+            <a:lvl5pPr marL="2286000" lvl="4" indent="-228600" algn="l">
+              <a:lnSpc>
+                <a:spcPct val="90000"/>
+              </a:lnSpc>
+              <a:spcBef>
+                <a:spcPts val="500"/>
+              </a:spcBef>
+              <a:spcAft>
+                <a:spcPts val="0"/>
+              </a:spcAft>
+              <a:buSzPts val="1200"/>
+              <a:buNone/>
+              <a:defRPr sz="1600">
+                <a:solidFill>
+                  <a:srgbClr val="888888"/>
+                </a:solidFill>
+              </a:defRPr>
+            </a:lvl5pPr>
+            <a:lvl6pPr marL="2743200" lvl="5" indent="-228600" algn="l">
+              <a:lnSpc>
+                <a:spcPct val="90000"/>
+              </a:lnSpc>
+              <a:spcBef>
+                <a:spcPts val="500"/>
+              </a:spcBef>
+              <a:spcAft>
+                <a:spcPts val="0"/>
+              </a:spcAft>
+              <a:buClr>
+                <a:srgbClr val="888888"/>
+              </a:buClr>
+              <a:buSzPts val="1600"/>
+              <a:buNone/>
+              <a:defRPr sz="1600">
+                <a:solidFill>
+                  <a:srgbClr val="888888"/>
+                </a:solidFill>
+              </a:defRPr>
+            </a:lvl6pPr>
+            <a:lvl7pPr marL="3200400" lvl="6" indent="-228600" algn="l">
+              <a:lnSpc>
+                <a:spcPct val="90000"/>
+              </a:lnSpc>
+              <a:spcBef>
+                <a:spcPts val="500"/>
+              </a:spcBef>
+              <a:spcAft>
+                <a:spcPts val="0"/>
+              </a:spcAft>
+              <a:buClr>
+                <a:srgbClr val="888888"/>
+              </a:buClr>
+              <a:buSzPts val="1600"/>
+              <a:buNone/>
+              <a:defRPr sz="1600">
+                <a:solidFill>
+                  <a:srgbClr val="888888"/>
+                </a:solidFill>
+              </a:defRPr>
+            </a:lvl7pPr>
+            <a:lvl8pPr marL="3657600" lvl="7" indent="-228600" algn="l">
+              <a:lnSpc>
+                <a:spcPct val="90000"/>
+              </a:lnSpc>
+              <a:spcBef>
+                <a:spcPts val="500"/>
+              </a:spcBef>
+              <a:spcAft>
+                <a:spcPts val="0"/>
+              </a:spcAft>
+              <a:buClr>
+                <a:srgbClr val="888888"/>
+              </a:buClr>
+              <a:buSzPts val="1600"/>
+              <a:buNone/>
+              <a:defRPr sz="1600">
+                <a:solidFill>
+                  <a:srgbClr val="888888"/>
+                </a:solidFill>
+              </a:defRPr>
+            </a:lvl8pPr>
+            <a:lvl9pPr marL="4114800" lvl="8" indent="-228600" algn="l">
+              <a:lnSpc>
+                <a:spcPct val="90000"/>
+              </a:lnSpc>
+              <a:spcBef>
+                <a:spcPts val="500"/>
+              </a:spcBef>
+              <a:spcAft>
+                <a:spcPts val="0"/>
+              </a:spcAft>
+              <a:buClr>
+                <a:srgbClr val="888888"/>
+              </a:buClr>
+              <a:buSzPts val="1600"/>
+              <a:buNone/>
+              <a:defRPr sz="1600">
+                <a:solidFill>
+                  <a:srgbClr val="888888"/>
+                </a:solidFill>
+              </a:defRPr>
+            </a:lvl9pPr>
+          </a:lstStyle>
+          <a:p>
+            <a:endParaRPr dirty="0"/>
+          </a:p>
+        </p:txBody>
+      </p:sp>
+      <p:sp>
+        <p:nvSpPr>
+          <p:cNvPr id="50" name="Google Shape;50;p24"/>
+          <p:cNvSpPr txBox="1">
+            <a:spLocks noGrp="1"/>
+          </p:cNvSpPr>
+          <p:nvPr>
+            <p:ph type="title"/>
+          </p:nvPr>
+        </p:nvSpPr>
+        <p:spPr>
+          <a:xfrm>
+            <a:off x="122724" y="4057812"/>
+            <a:ext cx="10515600" cy="531651"/>
+          </a:xfrm>
+          <a:prstGeom prst="rect">
+            <a:avLst/>
+          </a:prstGeom>
+          <a:noFill/>
+          <a:ln>
+            <a:noFill/>
+          </a:ln>
+        </p:spPr>
+        <p:txBody>
+          <a:bodyPr spcFirstLastPara="1" wrap="square" lIns="91425" tIns="45700" rIns="91425" bIns="45700" anchor="b" anchorCtr="0">
+            <a:normAutofit/>
+          </a:bodyPr>
+          <a:lstStyle>
+            <a:lvl1pPr lvl="0" algn="l">
+              <a:lnSpc>
+                <a:spcPct val="90000"/>
+              </a:lnSpc>
+              <a:spcBef>
+                <a:spcPts val="0"/>
+              </a:spcBef>
+              <a:spcAft>
+                <a:spcPts val="0"/>
+              </a:spcAft>
+              <a:buClr>
+                <a:schemeClr val="lt1"/>
+              </a:buClr>
+              <a:buSzPts val="2800"/>
+              <a:buFont typeface="Calibri"/>
+              <a:buNone/>
+              <a:defRPr sz="2800" b="1">
+                <a:solidFill>
+                  <a:schemeClr val="lt1"/>
+                </a:solidFill>
+                <a:latin typeface="Calibri"/>
+                <a:ea typeface="Calibri"/>
+                <a:cs typeface="Calibri"/>
+                <a:sym typeface="Calibri"/>
+              </a:defRPr>
+            </a:lvl1pPr>
+            <a:lvl2pPr lvl="1">
+              <a:spcBef>
+                <a:spcPts val="0"/>
+              </a:spcBef>
+              <a:spcAft>
+                <a:spcPts val="0"/>
+              </a:spcAft>
+              <a:buSzPts val="1400"/>
+              <a:buNone/>
+              <a:defRPr/>
+            </a:lvl2pPr>
+            <a:lvl3pPr lvl="2">
+              <a:spcBef>
+                <a:spcPts val="0"/>
+              </a:spcBef>
+              <a:spcAft>
+                <a:spcPts val="0"/>
+              </a:spcAft>
+              <a:buSzPts val="1400"/>
+              <a:buNone/>
+              <a:defRPr/>
+            </a:lvl3pPr>
+            <a:lvl4pPr lvl="3">
+              <a:spcBef>
+                <a:spcPts val="0"/>
+              </a:spcBef>
+              <a:spcAft>
+                <a:spcPts val="0"/>
+              </a:spcAft>
+              <a:buSzPts val="1400"/>
+              <a:buNone/>
+              <a:defRPr/>
+            </a:lvl4pPr>
+            <a:lvl5pPr lvl="4">
+              <a:spcBef>
+                <a:spcPts val="0"/>
+              </a:spcBef>
+              <a:spcAft>
+                <a:spcPts val="0"/>
+              </a:spcAft>
+              <a:buSzPts val="1400"/>
+              <a:buNone/>
+              <a:defRPr/>
+            </a:lvl5pPr>
+            <a:lvl6pPr lvl="5">
+              <a:spcBef>
+                <a:spcPts val="0"/>
+              </a:spcBef>
+              <a:spcAft>
+                <a:spcPts val="0"/>
+              </a:spcAft>
+              <a:buSzPts val="1400"/>
+              <a:buNone/>
+              <a:defRPr/>
+            </a:lvl6pPr>
+            <a:lvl7pPr lvl="6">
+              <a:spcBef>
+                <a:spcPts val="0"/>
+              </a:spcBef>
+              <a:spcAft>
+                <a:spcPts val="0"/>
+              </a:spcAft>
+              <a:buSzPts val="1400"/>
+              <a:buNone/>
+              <a:defRPr/>
+            </a:lvl7pPr>
+            <a:lvl8pPr lvl="7">
+              <a:spcBef>
+                <a:spcPts val="0"/>
+              </a:spcBef>
+              <a:spcAft>
+                <a:spcPts val="0"/>
+              </a:spcAft>
+              <a:buSzPts val="1400"/>
+              <a:buNone/>
+              <a:defRPr/>
+            </a:lvl8pPr>
+            <a:lvl9pPr lvl="8">
+              <a:spcBef>
+                <a:spcPts val="0"/>
+              </a:spcBef>
+              <a:spcAft>
+                <a:spcPts val="0"/>
+              </a:spcAft>
+              <a:buSzPts val="1400"/>
+              <a:buNone/>
+              <a:defRPr/>
+            </a:lvl9pPr>
+          </a:lstStyle>
+          <a:p>
+            <a:endParaRPr/>
+          </a:p>
+        </p:txBody>
+      </p:sp>
+    </p:spTree>
+  </p:cSld>
+  <p:clrMapOvr>
+    <a:masterClrMapping/>
+  </p:clrMapOvr>
+</p:sldLayout>
+</file>
+
+<file path=ppt/slideLayouts/slideLayout7.xml><?xml version="1.0" encoding="utf-8"?>
+<p:sldLayout xmlns:a="http://schemas.openxmlformats.org/drawingml/2006/main" xmlns:r="http://schemas.openxmlformats.org/officeDocument/2006/relationships" xmlns:p="http://schemas.openxmlformats.org/presentationml/2006/main" matchingName="2_Section Header">
+  <p:cSld name="2_Section Header">
+    <p:bg>
+      <p:bgPr>
+        <a:blipFill>
+          <a:blip r:embed="rId2">
+            <a:alphaModFix/>
+          </a:blip>
+          <a:stretch>
+            <a:fillRect/>
+          </a:stretch>
+        </a:blipFill>
+        <a:effectLst/>
+      </p:bgPr>
+    </p:bg>
+    <p:spTree>
+      <p:nvGrpSpPr>
+        <p:cNvPr id="1" name="Shape 51"/>
+        <p:cNvGrpSpPr/>
+        <p:nvPr/>
+      </p:nvGrpSpPr>
+      <p:grpSpPr>
+        <a:xfrm>
+          <a:off x="0" y="0"/>
+          <a:ext cx="0" cy="0"/>
+          <a:chOff x="0" y="0"/>
+          <a:chExt cx="0" cy="0"/>
+        </a:xfrm>
+      </p:grpSpPr>
+      <p:sp>
+        <p:nvSpPr>
+          <p:cNvPr id="52" name="Google Shape;52;p25"/>
+          <p:cNvSpPr txBox="1">
+            <a:spLocks noGrp="1"/>
+          </p:cNvSpPr>
+          <p:nvPr>
+            <p:ph type="title"/>
+          </p:nvPr>
+        </p:nvSpPr>
+        <p:spPr>
+          <a:xfrm>
+            <a:off x="0" y="493518"/>
+            <a:ext cx="10515600" cy="531651"/>
+          </a:xfrm>
+          <a:prstGeom prst="rect">
+            <a:avLst/>
+          </a:prstGeom>
+          <a:noFill/>
+          <a:ln>
+            <a:noFill/>
+          </a:ln>
+        </p:spPr>
+        <p:txBody>
+          <a:bodyPr spcFirstLastPara="1" wrap="square" lIns="91425" tIns="45700" rIns="91425" bIns="45700" anchor="b" anchorCtr="0">
+            <a:normAutofit/>
+          </a:bodyPr>
+          <a:lstStyle>
+            <a:lvl1pPr lvl="0" algn="l">
+              <a:lnSpc>
+                <a:spcPct val="90000"/>
+              </a:lnSpc>
+              <a:spcBef>
+                <a:spcPts val="0"/>
+              </a:spcBef>
+              <a:spcAft>
+                <a:spcPts val="0"/>
+              </a:spcAft>
+              <a:buClr>
+                <a:schemeClr val="lt1"/>
+              </a:buClr>
+              <a:buSzPts val="2800"/>
+              <a:buFont typeface="Calibri"/>
+              <a:buNone/>
+              <a:defRPr sz="2800" b="1">
+                <a:solidFill>
+                  <a:schemeClr val="lt1"/>
+                </a:solidFill>
+                <a:latin typeface="Calibri"/>
+                <a:ea typeface="Calibri"/>
+                <a:cs typeface="Calibri"/>
+                <a:sym typeface="Calibri"/>
+              </a:defRPr>
+            </a:lvl1pPr>
+            <a:lvl2pPr lvl="1">
+              <a:spcBef>
+                <a:spcPts val="0"/>
+              </a:spcBef>
+              <a:spcAft>
+                <a:spcPts val="0"/>
+              </a:spcAft>
+              <a:buSzPts val="1400"/>
+              <a:buNone/>
+              <a:defRPr/>
+            </a:lvl2pPr>
+            <a:lvl3pPr lvl="2">
+              <a:spcBef>
+                <a:spcPts val="0"/>
+              </a:spcBef>
+              <a:spcAft>
+                <a:spcPts val="0"/>
+              </a:spcAft>
+              <a:buSzPts val="1400"/>
+              <a:buNone/>
+              <a:defRPr/>
+            </a:lvl3pPr>
+            <a:lvl4pPr lvl="3">
+              <a:spcBef>
+                <a:spcPts val="0"/>
+              </a:spcBef>
+              <a:spcAft>
+                <a:spcPts val="0"/>
+              </a:spcAft>
+              <a:buSzPts val="1400"/>
+              <a:buNone/>
+              <a:defRPr/>
+            </a:lvl4pPr>
+            <a:lvl5pPr lvl="4">
+              <a:spcBef>
+                <a:spcPts val="0"/>
+              </a:spcBef>
+              <a:spcAft>
+                <a:spcPts val="0"/>
+              </a:spcAft>
+              <a:buSzPts val="1400"/>
+              <a:buNone/>
+              <a:defRPr/>
+            </a:lvl5pPr>
+            <a:lvl6pPr lvl="5">
+              <a:spcBef>
+                <a:spcPts val="0"/>
+              </a:spcBef>
+              <a:spcAft>
+                <a:spcPts val="0"/>
+              </a:spcAft>
+              <a:buSzPts val="1400"/>
+              <a:buNone/>
+              <a:defRPr/>
+            </a:lvl6pPr>
+            <a:lvl7pPr lvl="6">
+              <a:spcBef>
+                <a:spcPts val="0"/>
+              </a:spcBef>
+              <a:spcAft>
+                <a:spcPts val="0"/>
+              </a:spcAft>
+              <a:buSzPts val="1400"/>
+              <a:buNone/>
+              <a:defRPr/>
+            </a:lvl7pPr>
+            <a:lvl8pPr lvl="7">
+              <a:spcBef>
+                <a:spcPts val="0"/>
+              </a:spcBef>
+              <a:spcAft>
+                <a:spcPts val="0"/>
+              </a:spcAft>
+              <a:buSzPts val="1400"/>
+              <a:buNone/>
+              <a:defRPr/>
+            </a:lvl8pPr>
+            <a:lvl9pPr lvl="8">
+              <a:spcBef>
+                <a:spcPts val="0"/>
+              </a:spcBef>
+              <a:spcAft>
+                <a:spcPts val="0"/>
+              </a:spcAft>
+              <a:buSzPts val="1400"/>
+              <a:buNone/>
+              <a:defRPr/>
+            </a:lvl9pPr>
+          </a:lstStyle>
+          <a:p>
+            <a:endParaRPr/>
+          </a:p>
+        </p:txBody>
+      </p:sp>
+    </p:spTree>
+  </p:cSld>
+  <p:clrMapOvr>
+    <a:masterClrMapping/>
+  </p:clrMapOvr>
+</p:sldLayout>
+</file>
+
+<file path=ppt/slideLayouts/slideLayout8.xml><?xml version="1.0" encoding="utf-8"?>
+<p:sldLayout xmlns:a="http://schemas.openxmlformats.org/drawingml/2006/main" xmlns:r="http://schemas.openxmlformats.org/officeDocument/2006/relationships" xmlns:p="http://schemas.openxmlformats.org/presentationml/2006/main" matchingName="Title and Vertical Text" type="vertTx">
+  <p:cSld name="VERTICAL_TEXT">
+    <p:spTree>
+      <p:nvGrpSpPr>
+        <p:cNvPr id="1" name="Shape 53"/>
+        <p:cNvGrpSpPr/>
+        <p:nvPr/>
+      </p:nvGrpSpPr>
+      <p:grpSpPr>
+        <a:xfrm>
+          <a:off x="0" y="0"/>
+          <a:ext cx="0" cy="0"/>
+          <a:chOff x="0" y="0"/>
+          <a:chExt cx="0" cy="0"/>
+        </a:xfrm>
+      </p:grpSpPr>
+      <p:sp>
+        <p:nvSpPr>
+          <p:cNvPr id="54" name="Google Shape;54;p26"/>
+          <p:cNvSpPr txBox="1">
+            <a:spLocks noGrp="1"/>
+          </p:cNvSpPr>
+          <p:nvPr>
+            <p:ph type="body" idx="1"/>
+          </p:nvPr>
+        </p:nvSpPr>
+        <p:spPr>
+          <a:xfrm rot="5400000">
+            <a:off x="4038600" y="-1371600"/>
+            <a:ext cx="4114800" cy="10515600"/>
+          </a:xfrm>
+          <a:prstGeom prst="rect">
+            <a:avLst/>
+          </a:prstGeom>
+          <a:noFill/>
+          <a:ln>
+            <a:noFill/>
+          </a:ln>
+        </p:spPr>
+        <p:txBody>
+          <a:bodyPr spcFirstLastPara="1" wrap="square" lIns="91425" tIns="45700" rIns="91425" bIns="45700" anchor="t" anchorCtr="0">
+            <a:normAutofit/>
+          </a:bodyPr>
+          <a:lstStyle>
+            <a:lvl1pPr marL="457200" lvl="0" indent="-314325" algn="l">
+              <a:lnSpc>
+                <a:spcPct val="100000"/>
+              </a:lnSpc>
+              <a:spcBef>
+                <a:spcPts val="600"/>
+              </a:spcBef>
+              <a:spcAft>
+                <a:spcPts val="0"/>
+              </a:spcAft>
+              <a:buSzPts val="1350"/>
+              <a:buChar char="•"/>
+              <a:defRPr/>
+            </a:lvl1pPr>
+            <a:lvl2pPr marL="914400" lvl="1" indent="-314325" algn="l">
+              <a:lnSpc>
+                <a:spcPct val="90000"/>
+              </a:lnSpc>
+              <a:spcBef>
+                <a:spcPts val="500"/>
+              </a:spcBef>
+              <a:spcAft>
+                <a:spcPts val="0"/>
+              </a:spcAft>
+              <a:buSzPts val="1350"/>
+              <a:buChar char="•"/>
+              <a:defRPr/>
+            </a:lvl2pPr>
+            <a:lvl3pPr marL="1371600" lvl="2" indent="-314325" algn="l">
+              <a:lnSpc>
+                <a:spcPct val="90000"/>
+              </a:lnSpc>
+              <a:spcBef>
+                <a:spcPts val="500"/>
+              </a:spcBef>
+              <a:spcAft>
+                <a:spcPts val="0"/>
+              </a:spcAft>
+              <a:buSzPts val="1350"/>
+              <a:buChar char="•"/>
+              <a:defRPr/>
+            </a:lvl3pPr>
+            <a:lvl4pPr marL="1828800" lvl="3" indent="-314325" algn="l">
+              <a:lnSpc>
+                <a:spcPct val="90000"/>
+              </a:lnSpc>
+              <a:spcBef>
+                <a:spcPts val="500"/>
+              </a:spcBef>
+              <a:spcAft>
+                <a:spcPts val="0"/>
+              </a:spcAft>
+              <a:buSzPts val="1350"/>
+              <a:buChar char="•"/>
+              <a:defRPr/>
+            </a:lvl4pPr>
+            <a:lvl5pPr marL="2286000" lvl="4" indent="-314325" algn="l">
+              <a:lnSpc>
+                <a:spcPct val="90000"/>
+              </a:lnSpc>
+              <a:spcBef>
+                <a:spcPts val="500"/>
+              </a:spcBef>
+              <a:spcAft>
+                <a:spcPts val="0"/>
+              </a:spcAft>
+              <a:buSzPts val="1350"/>
+              <a:buChar char="•"/>
+              <a:defRPr/>
+            </a:lvl5pPr>
+            <a:lvl6pPr marL="2743200" lvl="5" indent="-342900" algn="l">
+              <a:lnSpc>
+                <a:spcPct val="90000"/>
+              </a:lnSpc>
+              <a:spcBef>
+                <a:spcPts val="500"/>
+              </a:spcBef>
+              <a:spcAft>
+                <a:spcPts val="0"/>
+              </a:spcAft>
+              <a:buClr>
+                <a:schemeClr val="dk1"/>
+              </a:buClr>
+              <a:buSzPts val="1800"/>
+              <a:buChar char="•"/>
+              <a:defRPr/>
+            </a:lvl6pPr>
+            <a:lvl7pPr marL="3200400" lvl="6" indent="-342900" algn="l">
+              <a:lnSpc>
+                <a:spcPct val="90000"/>
+              </a:lnSpc>
+              <a:spcBef>
+                <a:spcPts val="500"/>
+              </a:spcBef>
+              <a:spcAft>
+                <a:spcPts val="0"/>
+              </a:spcAft>
+              <a:buClr>
+                <a:schemeClr val="dk1"/>
+              </a:buClr>
+              <a:buSzPts val="1800"/>
+              <a:buChar char="•"/>
+              <a:defRPr/>
+            </a:lvl7pPr>
+            <a:lvl8pPr marL="3657600" lvl="7" indent="-342900" algn="l">
+              <a:lnSpc>
+                <a:spcPct val="90000"/>
+              </a:lnSpc>
+              <a:spcBef>
+                <a:spcPts val="500"/>
+              </a:spcBef>
+              <a:spcAft>
+                <a:spcPts val="0"/>
+              </a:spcAft>
+              <a:buClr>
+                <a:schemeClr val="dk1"/>
+              </a:buClr>
+              <a:buSzPts val="1800"/>
+              <a:buChar char="•"/>
+              <a:defRPr/>
+            </a:lvl8pPr>
+            <a:lvl9pPr marL="4114800" lvl="8" indent="-342900" algn="l">
+              <a:lnSpc>
+                <a:spcPct val="90000"/>
+              </a:lnSpc>
+              <a:spcBef>
+                <a:spcPts val="500"/>
+              </a:spcBef>
+              <a:spcAft>
+                <a:spcPts val="0"/>
+              </a:spcAft>
+              <a:buClr>
+                <a:schemeClr val="dk1"/>
+              </a:buClr>
+              <a:buSzPts val="1800"/>
+              <a:buChar char="•"/>
+              <a:defRPr/>
+            </a:lvl9pPr>
+          </a:lstStyle>
+          <a:p>
+            <a:endParaRPr/>
+          </a:p>
+        </p:txBody>
+      </p:sp>
+      <p:sp>
+        <p:nvSpPr>
+          <p:cNvPr id="55" name="Google Shape;55;p26"/>
+          <p:cNvSpPr txBox="1">
+            <a:spLocks noGrp="1"/>
+          </p:cNvSpPr>
+          <p:nvPr>
+            <p:ph type="title"/>
+          </p:nvPr>
+        </p:nvSpPr>
+        <p:spPr>
+          <a:xfrm>
+            <a:off x="838200" y="0"/>
+            <a:ext cx="10515600" cy="1371600"/>
+          </a:xfrm>
+          <a:prstGeom prst="rect">
+            <a:avLst/>
+          </a:prstGeom>
+          <a:noFill/>
+          <a:ln>
+            <a:noFill/>
+          </a:ln>
+        </p:spPr>
+        <p:txBody>
+          <a:bodyPr spcFirstLastPara="1" wrap="square" lIns="91425" tIns="45700" rIns="91425" bIns="45700" anchor="ctr" anchorCtr="0">
+            <a:normAutofit/>
+          </a:bodyPr>
+          <a:lstStyle>
+            <a:lvl1pPr lvl="0" algn="l">
+              <a:lnSpc>
+                <a:spcPct val="90000"/>
+              </a:lnSpc>
+              <a:spcBef>
+                <a:spcPts val="0"/>
+              </a:spcBef>
+              <a:spcAft>
+                <a:spcPts val="0"/>
+              </a:spcAft>
+              <a:buClr>
+                <a:srgbClr val="006633"/>
+              </a:buClr>
+              <a:buSzPts val="1800"/>
+              <a:buNone/>
+              <a:defRPr/>
+            </a:lvl1pPr>
+            <a:lvl2pPr lvl="1">
+              <a:spcBef>
+                <a:spcPts val="0"/>
+              </a:spcBef>
+              <a:spcAft>
+                <a:spcPts val="0"/>
+              </a:spcAft>
+              <a:buSzPts val="1400"/>
+              <a:buNone/>
+              <a:defRPr/>
+            </a:lvl2pPr>
+            <a:lvl3pPr lvl="2">
+              <a:spcBef>
+                <a:spcPts val="0"/>
+              </a:spcBef>
+              <a:spcAft>
+                <a:spcPts val="0"/>
+              </a:spcAft>
+              <a:buSzPts val="1400"/>
+              <a:buNone/>
+              <a:defRPr/>
+            </a:lvl3pPr>
+            <a:lvl4pPr lvl="3">
+              <a:spcBef>
+                <a:spcPts val="0"/>
+              </a:spcBef>
+              <a:spcAft>
+                <a:spcPts val="0"/>
+              </a:spcAft>
+              <a:buSzPts val="1400"/>
+              <a:buNone/>
+              <a:defRPr/>
+            </a:lvl4pPr>
+            <a:lvl5pPr lvl="4">
+              <a:spcBef>
+                <a:spcPts val="0"/>
+              </a:spcBef>
+              <a:spcAft>
+                <a:spcPts val="0"/>
+              </a:spcAft>
+              <a:buSzPts val="1400"/>
+              <a:buNone/>
+              <a:defRPr/>
+            </a:lvl5pPr>
+            <a:lvl6pPr lvl="5">
+              <a:spcBef>
+                <a:spcPts val="0"/>
+              </a:spcBef>
+              <a:spcAft>
+                <a:spcPts val="0"/>
+              </a:spcAft>
+              <a:buSzPts val="1400"/>
+              <a:buNone/>
+              <a:defRPr/>
+            </a:lvl6pPr>
+            <a:lvl7pPr lvl="6">
+              <a:spcBef>
+                <a:spcPts val="0"/>
+              </a:spcBef>
+              <a:spcAft>
+                <a:spcPts val="0"/>
+              </a:spcAft>
+              <a:buSzPts val="1400"/>
+              <a:buNone/>
+              <a:defRPr/>
+            </a:lvl7pPr>
+            <a:lvl8pPr lvl="7">
+              <a:spcBef>
+                <a:spcPts val="0"/>
+              </a:spcBef>
+              <a:spcAft>
+                <a:spcPts val="0"/>
+              </a:spcAft>
+              <a:buSzPts val="1400"/>
+              <a:buNone/>
+              <a:defRPr/>
+            </a:lvl8pPr>
+            <a:lvl9pPr lvl="8">
+              <a:spcBef>
+                <a:spcPts val="0"/>
+              </a:spcBef>
+              <a:spcAft>
+                <a:spcPts val="0"/>
+              </a:spcAft>
+              <a:buSzPts val="1400"/>
+              <a:buNone/>
+              <a:defRPr/>
+            </a:lvl9pPr>
+          </a:lstStyle>
+          <a:p>
+            <a:endParaRPr/>
+          </a:p>
+        </p:txBody>
+      </p:sp>
+    </p:spTree>
+  </p:cSld>
+  <p:clrMapOvr>
+    <a:masterClrMapping/>
+  </p:clrMapOvr>
+</p:sldLayout>
+</file>
+
 <file path=ppt/slideMasters/slideMaster1.xml><?xml version="1.0" encoding="utf-8"?>
 <p:sldMaster xmlns:a="http://schemas.openxmlformats.org/drawingml/2006/main" xmlns:r="http://schemas.openxmlformats.org/officeDocument/2006/relationships" xmlns:p="http://schemas.openxmlformats.org/presentationml/2006/main">
   <p:cSld>
     <p:bg>
       <p:bgPr>
         <a:blipFill>
-          <a:blip r:embed="rId14">
+          <a:blip r:embed="rId10">
             <a:alphaModFix/>
           </a:blip>
           <a:stretch>
@@ -10159,14 +9190,10 @@
     <p:sldLayoutId id="2147483650" r:id="rId2"/>
     <p:sldLayoutId id="2147483651" r:id="rId3"/>
     <p:sldLayoutId id="2147483652" r:id="rId4"/>
-    <p:sldLayoutId id="2147483653" r:id="rId5"/>
-    <p:sldLayoutId id="2147483654" r:id="rId6"/>
-    <p:sldLayoutId id="2147483656" r:id="rId7"/>
-    <p:sldLayoutId id="2147483657" r:id="rId8"/>
-    <p:sldLayoutId id="2147483658" r:id="rId9"/>
-    <p:sldLayoutId id="2147483659" r:id="rId10"/>
-    <p:sldLayoutId id="2147483660" r:id="rId11"/>
-    <p:sldLayoutId id="2147483661" r:id="rId12"/>
+    <p:sldLayoutId id="2147483658" r:id="rId5"/>
+    <p:sldLayoutId id="2147483659" r:id="rId6"/>
+    <p:sldLayoutId id="2147483660" r:id="rId7"/>
+    <p:sldLayoutId id="2147483661" r:id="rId8"/>
   </p:sldLayoutIdLst>
   <p:hf sldNum="0" hdr="0" ftr="0" dt="0"/>
   <p:txStyles>
@@ -11254,6 +10281,1063 @@
   <p:cSld>
     <p:spTree>
       <p:nvGrpSpPr>
+        <p:cNvPr id="1" name="Shape 95">
+          <a:extLst>
+            <a:ext uri="{FF2B5EF4-FFF2-40B4-BE49-F238E27FC236}">
+              <a16:creationId xmlns:a16="http://schemas.microsoft.com/office/drawing/2014/main" id="{F6F7301D-C962-29E6-5507-F2754EF8EC48}"/>
+            </a:ext>
+          </a:extLst>
+        </p:cNvPr>
+        <p:cNvGrpSpPr/>
+        <p:nvPr/>
+      </p:nvGrpSpPr>
+      <p:grpSpPr>
+        <a:xfrm>
+          <a:off x="0" y="0"/>
+          <a:ext cx="0" cy="0"/>
+          <a:chOff x="0" y="0"/>
+          <a:chExt cx="0" cy="0"/>
+        </a:xfrm>
+      </p:grpSpPr>
+      <p:sp>
+        <p:nvSpPr>
+          <p:cNvPr id="96" name="Google Shape;96;p7">
+            <a:extLst>
+              <a:ext uri="{FF2B5EF4-FFF2-40B4-BE49-F238E27FC236}">
+                <a16:creationId xmlns:a16="http://schemas.microsoft.com/office/drawing/2014/main" id="{E9F0994C-C424-A3E5-9BC2-03F0A2BDEB96}"/>
+              </a:ext>
+            </a:extLst>
+          </p:cNvPr>
+          <p:cNvSpPr txBox="1">
+            <a:spLocks noGrp="1"/>
+          </p:cNvSpPr>
+          <p:nvPr>
+            <p:ph type="body" idx="1"/>
+          </p:nvPr>
+        </p:nvSpPr>
+        <p:spPr>
+          <a:xfrm>
+            <a:off x="838200" y="1828800"/>
+            <a:ext cx="10515600" cy="4118524"/>
+          </a:xfrm>
+          <a:prstGeom prst="rect">
+            <a:avLst/>
+          </a:prstGeom>
+          <a:noFill/>
+          <a:ln>
+            <a:noFill/>
+          </a:ln>
+        </p:spPr>
+        <p:txBody>
+          <a:bodyPr spcFirstLastPara="1" wrap="square" lIns="91425" tIns="45700" rIns="91425" bIns="45700" anchor="t" anchorCtr="0">
+            <a:normAutofit/>
+          </a:bodyPr>
+          <a:lstStyle/>
+          <a:p>
+            <a:pPr marL="590550" indent="-457200">
+              <a:lnSpc>
+                <a:spcPct val="90000"/>
+              </a:lnSpc>
+              <a:spcBef>
+                <a:spcPts val="0"/>
+              </a:spcBef>
+              <a:buSzPts val="2100"/>
+            </a:pPr>
+            <a:r>
+              <a:rPr lang="en-US" dirty="0">
+                <a:solidFill>
+                  <a:srgbClr val="000000"/>
+                </a:solidFill>
+              </a:rPr>
+              <a:t>Train – test – split with 80% reserved for training, and 20% reserved for testing</a:t>
+            </a:r>
+          </a:p>
+        </p:txBody>
+      </p:sp>
+      <p:sp>
+        <p:nvSpPr>
+          <p:cNvPr id="97" name="Google Shape;97;p7">
+            <a:extLst>
+              <a:ext uri="{FF2B5EF4-FFF2-40B4-BE49-F238E27FC236}">
+                <a16:creationId xmlns:a16="http://schemas.microsoft.com/office/drawing/2014/main" id="{0ECDD2A7-67DF-B22F-9993-B707F5420D39}"/>
+              </a:ext>
+            </a:extLst>
+          </p:cNvPr>
+          <p:cNvSpPr txBox="1">
+            <a:spLocks noGrp="1"/>
+          </p:cNvSpPr>
+          <p:nvPr>
+            <p:ph type="title"/>
+          </p:nvPr>
+        </p:nvSpPr>
+        <p:spPr>
+          <a:xfrm>
+            <a:off x="838200" y="0"/>
+            <a:ext cx="10515600" cy="1371600"/>
+          </a:xfrm>
+          <a:prstGeom prst="rect">
+            <a:avLst/>
+          </a:prstGeom>
+          <a:noFill/>
+          <a:ln>
+            <a:noFill/>
+          </a:ln>
+        </p:spPr>
+        <p:txBody>
+          <a:bodyPr spcFirstLastPara="1" wrap="square" lIns="91425" tIns="45700" rIns="91425" bIns="45700" anchor="ctr" anchorCtr="0">
+            <a:normAutofit/>
+          </a:bodyPr>
+          <a:lstStyle/>
+          <a:p>
+            <a:pPr marL="0" lvl="0" indent="0" algn="l" rtl="0">
+              <a:lnSpc>
+                <a:spcPct val="90000"/>
+              </a:lnSpc>
+              <a:spcBef>
+                <a:spcPts val="0"/>
+              </a:spcBef>
+              <a:spcAft>
+                <a:spcPts val="0"/>
+              </a:spcAft>
+              <a:buClr>
+                <a:srgbClr val="006633"/>
+              </a:buClr>
+              <a:buSzPts val="4400"/>
+              <a:buFont typeface="Calibri"/>
+              <a:buNone/>
+            </a:pPr>
+            <a:r>
+              <a:rPr lang="en-US" dirty="0"/>
+              <a:t>Train/Test Split</a:t>
+            </a:r>
+            <a:endParaRPr dirty="0"/>
+          </a:p>
+        </p:txBody>
+      </p:sp>
+    </p:spTree>
+    <p:extLst>
+      <p:ext uri="{BB962C8B-B14F-4D97-AF65-F5344CB8AC3E}">
+        <p14:creationId xmlns:p14="http://schemas.microsoft.com/office/powerpoint/2010/main" val="4095634335"/>
+      </p:ext>
+    </p:extLst>
+  </p:cSld>
+  <p:clrMapOvr>
+    <a:masterClrMapping/>
+  </p:clrMapOvr>
+</p:sld>
+</file>
+
+<file path=ppt/slides/slide11.xml><?xml version="1.0" encoding="utf-8"?>
+<p:sld xmlns:a="http://schemas.openxmlformats.org/drawingml/2006/main" xmlns:r="http://schemas.openxmlformats.org/officeDocument/2006/relationships" xmlns:p="http://schemas.openxmlformats.org/presentationml/2006/main">
+  <p:cSld>
+    <p:spTree>
+      <p:nvGrpSpPr>
+        <p:cNvPr id="1" name="Shape 95">
+          <a:extLst>
+            <a:ext uri="{FF2B5EF4-FFF2-40B4-BE49-F238E27FC236}">
+              <a16:creationId xmlns:a16="http://schemas.microsoft.com/office/drawing/2014/main" id="{C29ABF07-67D2-04BF-6145-5A0E410314DE}"/>
+            </a:ext>
+          </a:extLst>
+        </p:cNvPr>
+        <p:cNvGrpSpPr/>
+        <p:nvPr/>
+      </p:nvGrpSpPr>
+      <p:grpSpPr>
+        <a:xfrm>
+          <a:off x="0" y="0"/>
+          <a:ext cx="0" cy="0"/>
+          <a:chOff x="0" y="0"/>
+          <a:chExt cx="0" cy="0"/>
+        </a:xfrm>
+      </p:grpSpPr>
+      <p:sp>
+        <p:nvSpPr>
+          <p:cNvPr id="96" name="Google Shape;96;p7">
+            <a:extLst>
+              <a:ext uri="{FF2B5EF4-FFF2-40B4-BE49-F238E27FC236}">
+                <a16:creationId xmlns:a16="http://schemas.microsoft.com/office/drawing/2014/main" id="{A87696EE-E8C3-8890-0695-A7FCE62ECA0E}"/>
+              </a:ext>
+            </a:extLst>
+          </p:cNvPr>
+          <p:cNvSpPr txBox="1">
+            <a:spLocks noGrp="1"/>
+          </p:cNvSpPr>
+          <p:nvPr>
+            <p:ph type="body" idx="1"/>
+          </p:nvPr>
+        </p:nvSpPr>
+        <p:spPr>
+          <a:xfrm>
+            <a:off x="838200" y="1828800"/>
+            <a:ext cx="10515600" cy="4118524"/>
+          </a:xfrm>
+          <a:prstGeom prst="rect">
+            <a:avLst/>
+          </a:prstGeom>
+          <a:noFill/>
+          <a:ln>
+            <a:noFill/>
+          </a:ln>
+        </p:spPr>
+        <p:txBody>
+          <a:bodyPr spcFirstLastPara="1" wrap="square" lIns="91425" tIns="45700" rIns="91425" bIns="45700" anchor="t" anchorCtr="0">
+            <a:normAutofit/>
+          </a:bodyPr>
+          <a:lstStyle/>
+          <a:p>
+            <a:pPr marL="590550" indent="-457200">
+              <a:lnSpc>
+                <a:spcPct val="90000"/>
+              </a:lnSpc>
+              <a:spcBef>
+                <a:spcPts val="0"/>
+              </a:spcBef>
+              <a:buSzPts val="2100"/>
+            </a:pPr>
+            <a:r>
+              <a:rPr lang="en-US" dirty="0">
+                <a:solidFill>
+                  <a:srgbClr val="000000"/>
+                </a:solidFill>
+              </a:rPr>
+              <a:t>Train – test – split with 80% reserved for training, and 20% reserved for testing</a:t>
+            </a:r>
+          </a:p>
+        </p:txBody>
+      </p:sp>
+      <p:sp>
+        <p:nvSpPr>
+          <p:cNvPr id="97" name="Google Shape;97;p7">
+            <a:extLst>
+              <a:ext uri="{FF2B5EF4-FFF2-40B4-BE49-F238E27FC236}">
+                <a16:creationId xmlns:a16="http://schemas.microsoft.com/office/drawing/2014/main" id="{C018BC81-6E33-DB97-0FE4-0F37056005C9}"/>
+              </a:ext>
+            </a:extLst>
+          </p:cNvPr>
+          <p:cNvSpPr txBox="1">
+            <a:spLocks noGrp="1"/>
+          </p:cNvSpPr>
+          <p:nvPr>
+            <p:ph type="title"/>
+          </p:nvPr>
+        </p:nvSpPr>
+        <p:spPr>
+          <a:xfrm>
+            <a:off x="838200" y="0"/>
+            <a:ext cx="10515600" cy="1371600"/>
+          </a:xfrm>
+          <a:prstGeom prst="rect">
+            <a:avLst/>
+          </a:prstGeom>
+          <a:noFill/>
+          <a:ln>
+            <a:noFill/>
+          </a:ln>
+        </p:spPr>
+        <p:txBody>
+          <a:bodyPr spcFirstLastPara="1" wrap="square" lIns="91425" tIns="45700" rIns="91425" bIns="45700" anchor="ctr" anchorCtr="0">
+            <a:normAutofit/>
+          </a:bodyPr>
+          <a:lstStyle/>
+          <a:p>
+            <a:pPr marL="0" lvl="0" indent="0" algn="l" rtl="0">
+              <a:lnSpc>
+                <a:spcPct val="90000"/>
+              </a:lnSpc>
+              <a:spcBef>
+                <a:spcPts val="0"/>
+              </a:spcBef>
+              <a:spcAft>
+                <a:spcPts val="0"/>
+              </a:spcAft>
+              <a:buClr>
+                <a:srgbClr val="006633"/>
+              </a:buClr>
+              <a:buSzPts val="4400"/>
+              <a:buFont typeface="Calibri"/>
+              <a:buNone/>
+            </a:pPr>
+            <a:r>
+              <a:rPr lang="en-US" dirty="0"/>
+              <a:t>Models Development</a:t>
+            </a:r>
+            <a:endParaRPr dirty="0"/>
+          </a:p>
+        </p:txBody>
+      </p:sp>
+    </p:spTree>
+    <p:extLst>
+      <p:ext uri="{BB962C8B-B14F-4D97-AF65-F5344CB8AC3E}">
+        <p14:creationId xmlns:p14="http://schemas.microsoft.com/office/powerpoint/2010/main" val="3355173984"/>
+      </p:ext>
+    </p:extLst>
+  </p:cSld>
+  <p:clrMapOvr>
+    <a:masterClrMapping/>
+  </p:clrMapOvr>
+</p:sld>
+</file>
+
+<file path=ppt/slides/slide12.xml><?xml version="1.0" encoding="utf-8"?>
+<p:sld xmlns:a="http://schemas.openxmlformats.org/drawingml/2006/main" xmlns:r="http://schemas.openxmlformats.org/officeDocument/2006/relationships" xmlns:p="http://schemas.openxmlformats.org/presentationml/2006/main">
+  <p:cSld>
+    <p:spTree>
+      <p:nvGrpSpPr>
+        <p:cNvPr id="1" name="Shape 95">
+          <a:extLst>
+            <a:ext uri="{FF2B5EF4-FFF2-40B4-BE49-F238E27FC236}">
+              <a16:creationId xmlns:a16="http://schemas.microsoft.com/office/drawing/2014/main" id="{E16D56A4-10B8-983D-733F-8D882AD046AB}"/>
+            </a:ext>
+          </a:extLst>
+        </p:cNvPr>
+        <p:cNvGrpSpPr/>
+        <p:nvPr/>
+      </p:nvGrpSpPr>
+      <p:grpSpPr>
+        <a:xfrm>
+          <a:off x="0" y="0"/>
+          <a:ext cx="0" cy="0"/>
+          <a:chOff x="0" y="0"/>
+          <a:chExt cx="0" cy="0"/>
+        </a:xfrm>
+      </p:grpSpPr>
+      <p:sp>
+        <p:nvSpPr>
+          <p:cNvPr id="96" name="Google Shape;96;p7">
+            <a:extLst>
+              <a:ext uri="{FF2B5EF4-FFF2-40B4-BE49-F238E27FC236}">
+                <a16:creationId xmlns:a16="http://schemas.microsoft.com/office/drawing/2014/main" id="{6999B294-2A12-7D0C-C1AE-27D81F40A2C6}"/>
+              </a:ext>
+            </a:extLst>
+          </p:cNvPr>
+          <p:cNvSpPr txBox="1">
+            <a:spLocks noGrp="1"/>
+          </p:cNvSpPr>
+          <p:nvPr>
+            <p:ph type="body" idx="1"/>
+          </p:nvPr>
+        </p:nvSpPr>
+        <p:spPr>
+          <a:xfrm>
+            <a:off x="838200" y="1828800"/>
+            <a:ext cx="10515600" cy="4118524"/>
+          </a:xfrm>
+          <a:prstGeom prst="rect">
+            <a:avLst/>
+          </a:prstGeom>
+          <a:noFill/>
+          <a:ln>
+            <a:noFill/>
+          </a:ln>
+        </p:spPr>
+        <p:txBody>
+          <a:bodyPr spcFirstLastPara="1" wrap="square" lIns="91425" tIns="45700" rIns="91425" bIns="45700" anchor="t" anchorCtr="0">
+            <a:normAutofit/>
+          </a:bodyPr>
+          <a:lstStyle/>
+          <a:p>
+            <a:pPr marL="590550" indent="-457200">
+              <a:lnSpc>
+                <a:spcPct val="90000"/>
+              </a:lnSpc>
+              <a:spcBef>
+                <a:spcPts val="0"/>
+              </a:spcBef>
+              <a:buSzPts val="2100"/>
+            </a:pPr>
+            <a:r>
+              <a:rPr lang="en-US" dirty="0">
+                <a:solidFill>
+                  <a:srgbClr val="000000"/>
+                </a:solidFill>
+              </a:rPr>
+              <a:t>Train – test – split with 80% reserved for training, and 20% reserved for testing</a:t>
+            </a:r>
+          </a:p>
+        </p:txBody>
+      </p:sp>
+      <p:sp>
+        <p:nvSpPr>
+          <p:cNvPr id="97" name="Google Shape;97;p7">
+            <a:extLst>
+              <a:ext uri="{FF2B5EF4-FFF2-40B4-BE49-F238E27FC236}">
+                <a16:creationId xmlns:a16="http://schemas.microsoft.com/office/drawing/2014/main" id="{173D0D8C-D770-640B-D256-FD7E599BD93A}"/>
+              </a:ext>
+            </a:extLst>
+          </p:cNvPr>
+          <p:cNvSpPr txBox="1">
+            <a:spLocks noGrp="1"/>
+          </p:cNvSpPr>
+          <p:nvPr>
+            <p:ph type="title"/>
+          </p:nvPr>
+        </p:nvSpPr>
+        <p:spPr>
+          <a:xfrm>
+            <a:off x="838200" y="0"/>
+            <a:ext cx="10515600" cy="1371600"/>
+          </a:xfrm>
+          <a:prstGeom prst="rect">
+            <a:avLst/>
+          </a:prstGeom>
+          <a:noFill/>
+          <a:ln>
+            <a:noFill/>
+          </a:ln>
+        </p:spPr>
+        <p:txBody>
+          <a:bodyPr spcFirstLastPara="1" wrap="square" lIns="91425" tIns="45700" rIns="91425" bIns="45700" anchor="ctr" anchorCtr="0">
+            <a:normAutofit/>
+          </a:bodyPr>
+          <a:lstStyle/>
+          <a:p>
+            <a:pPr marL="0" lvl="0" indent="0" algn="l" rtl="0">
+              <a:lnSpc>
+                <a:spcPct val="90000"/>
+              </a:lnSpc>
+              <a:spcBef>
+                <a:spcPts val="0"/>
+              </a:spcBef>
+              <a:spcAft>
+                <a:spcPts val="0"/>
+              </a:spcAft>
+              <a:buClr>
+                <a:srgbClr val="006633"/>
+              </a:buClr>
+              <a:buSzPts val="4400"/>
+              <a:buFont typeface="Calibri"/>
+              <a:buNone/>
+            </a:pPr>
+            <a:r>
+              <a:rPr lang="en-US" dirty="0"/>
+              <a:t>Models Comparison</a:t>
+            </a:r>
+            <a:endParaRPr dirty="0"/>
+          </a:p>
+        </p:txBody>
+      </p:sp>
+    </p:spTree>
+    <p:extLst>
+      <p:ext uri="{BB962C8B-B14F-4D97-AF65-F5344CB8AC3E}">
+        <p14:creationId xmlns:p14="http://schemas.microsoft.com/office/powerpoint/2010/main" val="3050785399"/>
+      </p:ext>
+    </p:extLst>
+  </p:cSld>
+  <p:clrMapOvr>
+    <a:masterClrMapping/>
+  </p:clrMapOvr>
+</p:sld>
+</file>
+
+<file path=ppt/slides/slide13.xml><?xml version="1.0" encoding="utf-8"?>
+<p:sld xmlns:a="http://schemas.openxmlformats.org/drawingml/2006/main" xmlns:r="http://schemas.openxmlformats.org/officeDocument/2006/relationships" xmlns:p="http://schemas.openxmlformats.org/presentationml/2006/main">
+  <p:cSld>
+    <p:spTree>
+      <p:nvGrpSpPr>
+        <p:cNvPr id="1" name="Shape 95">
+          <a:extLst>
+            <a:ext uri="{FF2B5EF4-FFF2-40B4-BE49-F238E27FC236}">
+              <a16:creationId xmlns:a16="http://schemas.microsoft.com/office/drawing/2014/main" id="{F686C22B-96D1-F324-432B-6E736E516BEB}"/>
+            </a:ext>
+          </a:extLst>
+        </p:cNvPr>
+        <p:cNvGrpSpPr/>
+        <p:nvPr/>
+      </p:nvGrpSpPr>
+      <p:grpSpPr>
+        <a:xfrm>
+          <a:off x="0" y="0"/>
+          <a:ext cx="0" cy="0"/>
+          <a:chOff x="0" y="0"/>
+          <a:chExt cx="0" cy="0"/>
+        </a:xfrm>
+      </p:grpSpPr>
+      <p:sp>
+        <p:nvSpPr>
+          <p:cNvPr id="96" name="Google Shape;96;p7">
+            <a:extLst>
+              <a:ext uri="{FF2B5EF4-FFF2-40B4-BE49-F238E27FC236}">
+                <a16:creationId xmlns:a16="http://schemas.microsoft.com/office/drawing/2014/main" id="{4447BBBA-2E22-B8FE-2650-7A6F3E633629}"/>
+              </a:ext>
+            </a:extLst>
+          </p:cNvPr>
+          <p:cNvSpPr txBox="1">
+            <a:spLocks noGrp="1"/>
+          </p:cNvSpPr>
+          <p:nvPr>
+            <p:ph type="body" idx="1"/>
+          </p:nvPr>
+        </p:nvSpPr>
+        <p:spPr>
+          <a:xfrm>
+            <a:off x="838200" y="1828800"/>
+            <a:ext cx="10515600" cy="4118524"/>
+          </a:xfrm>
+          <a:prstGeom prst="rect">
+            <a:avLst/>
+          </a:prstGeom>
+          <a:noFill/>
+          <a:ln>
+            <a:noFill/>
+          </a:ln>
+        </p:spPr>
+        <p:txBody>
+          <a:bodyPr spcFirstLastPara="1" wrap="square" lIns="91425" tIns="45700" rIns="91425" bIns="45700" anchor="t" anchorCtr="0">
+            <a:normAutofit/>
+          </a:bodyPr>
+          <a:lstStyle/>
+          <a:p>
+            <a:pPr marL="590550" indent="-457200">
+              <a:lnSpc>
+                <a:spcPct val="90000"/>
+              </a:lnSpc>
+              <a:spcBef>
+                <a:spcPts val="0"/>
+              </a:spcBef>
+              <a:buSzPts val="2100"/>
+            </a:pPr>
+            <a:r>
+              <a:rPr lang="en-US" dirty="0">
+                <a:solidFill>
+                  <a:srgbClr val="000000"/>
+                </a:solidFill>
+              </a:rPr>
+              <a:t>Train – test – split with 80% reserved for training, and 20% reserved for testing</a:t>
+            </a:r>
+          </a:p>
+        </p:txBody>
+      </p:sp>
+      <p:sp>
+        <p:nvSpPr>
+          <p:cNvPr id="97" name="Google Shape;97;p7">
+            <a:extLst>
+              <a:ext uri="{FF2B5EF4-FFF2-40B4-BE49-F238E27FC236}">
+                <a16:creationId xmlns:a16="http://schemas.microsoft.com/office/drawing/2014/main" id="{72473C69-30C4-1C33-BCBA-492299DE4AA1}"/>
+              </a:ext>
+            </a:extLst>
+          </p:cNvPr>
+          <p:cNvSpPr txBox="1">
+            <a:spLocks noGrp="1"/>
+          </p:cNvSpPr>
+          <p:nvPr>
+            <p:ph type="title"/>
+          </p:nvPr>
+        </p:nvSpPr>
+        <p:spPr>
+          <a:xfrm>
+            <a:off x="838200" y="0"/>
+            <a:ext cx="10515600" cy="1371600"/>
+          </a:xfrm>
+          <a:prstGeom prst="rect">
+            <a:avLst/>
+          </a:prstGeom>
+          <a:noFill/>
+          <a:ln>
+            <a:noFill/>
+          </a:ln>
+        </p:spPr>
+        <p:txBody>
+          <a:bodyPr spcFirstLastPara="1" wrap="square" lIns="91425" tIns="45700" rIns="91425" bIns="45700" anchor="ctr" anchorCtr="0">
+            <a:normAutofit/>
+          </a:bodyPr>
+          <a:lstStyle/>
+          <a:p>
+            <a:pPr marL="0" lvl="0" indent="0" algn="l" rtl="0">
+              <a:lnSpc>
+                <a:spcPct val="90000"/>
+              </a:lnSpc>
+              <a:spcBef>
+                <a:spcPts val="0"/>
+              </a:spcBef>
+              <a:spcAft>
+                <a:spcPts val="0"/>
+              </a:spcAft>
+              <a:buClr>
+                <a:srgbClr val="006633"/>
+              </a:buClr>
+              <a:buSzPts val="4400"/>
+              <a:buFont typeface="Calibri"/>
+              <a:buNone/>
+            </a:pPr>
+            <a:r>
+              <a:rPr lang="en-US" dirty="0"/>
+              <a:t>XGBOOST Model Tuning</a:t>
+            </a:r>
+            <a:endParaRPr dirty="0"/>
+          </a:p>
+        </p:txBody>
+      </p:sp>
+    </p:spTree>
+    <p:extLst>
+      <p:ext uri="{BB962C8B-B14F-4D97-AF65-F5344CB8AC3E}">
+        <p14:creationId xmlns:p14="http://schemas.microsoft.com/office/powerpoint/2010/main" val="1837633993"/>
+      </p:ext>
+    </p:extLst>
+  </p:cSld>
+  <p:clrMapOvr>
+    <a:masterClrMapping/>
+  </p:clrMapOvr>
+</p:sld>
+</file>
+
+<file path=ppt/slides/slide14.xml><?xml version="1.0" encoding="utf-8"?>
+<p:sld xmlns:a="http://schemas.openxmlformats.org/drawingml/2006/main" xmlns:r="http://schemas.openxmlformats.org/officeDocument/2006/relationships" xmlns:p="http://schemas.openxmlformats.org/presentationml/2006/main">
+  <p:cSld>
+    <p:spTree>
+      <p:nvGrpSpPr>
+        <p:cNvPr id="1" name="Shape 95">
+          <a:extLst>
+            <a:ext uri="{FF2B5EF4-FFF2-40B4-BE49-F238E27FC236}">
+              <a16:creationId xmlns:a16="http://schemas.microsoft.com/office/drawing/2014/main" id="{130F46AF-E358-1C64-D95E-C74373D871FD}"/>
+            </a:ext>
+          </a:extLst>
+        </p:cNvPr>
+        <p:cNvGrpSpPr/>
+        <p:nvPr/>
+      </p:nvGrpSpPr>
+      <p:grpSpPr>
+        <a:xfrm>
+          <a:off x="0" y="0"/>
+          <a:ext cx="0" cy="0"/>
+          <a:chOff x="0" y="0"/>
+          <a:chExt cx="0" cy="0"/>
+        </a:xfrm>
+      </p:grpSpPr>
+      <p:sp>
+        <p:nvSpPr>
+          <p:cNvPr id="96" name="Google Shape;96;p7">
+            <a:extLst>
+              <a:ext uri="{FF2B5EF4-FFF2-40B4-BE49-F238E27FC236}">
+                <a16:creationId xmlns:a16="http://schemas.microsoft.com/office/drawing/2014/main" id="{D7D9C789-7F0F-314B-5BFA-4CE56A99350F}"/>
+              </a:ext>
+            </a:extLst>
+          </p:cNvPr>
+          <p:cNvSpPr txBox="1">
+            <a:spLocks noGrp="1"/>
+          </p:cNvSpPr>
+          <p:nvPr>
+            <p:ph type="body" idx="1"/>
+          </p:nvPr>
+        </p:nvSpPr>
+        <p:spPr>
+          <a:xfrm>
+            <a:off x="838200" y="1828800"/>
+            <a:ext cx="10515600" cy="4118524"/>
+          </a:xfrm>
+          <a:prstGeom prst="rect">
+            <a:avLst/>
+          </a:prstGeom>
+          <a:noFill/>
+          <a:ln>
+            <a:noFill/>
+          </a:ln>
+        </p:spPr>
+        <p:txBody>
+          <a:bodyPr spcFirstLastPara="1" wrap="square" lIns="91425" tIns="45700" rIns="91425" bIns="45700" anchor="t" anchorCtr="0">
+            <a:normAutofit/>
+          </a:bodyPr>
+          <a:lstStyle/>
+          <a:p>
+            <a:pPr marL="590550" indent="-457200">
+              <a:lnSpc>
+                <a:spcPct val="90000"/>
+              </a:lnSpc>
+              <a:spcBef>
+                <a:spcPts val="0"/>
+              </a:spcBef>
+              <a:buSzPts val="2100"/>
+            </a:pPr>
+            <a:r>
+              <a:rPr lang="en-US" dirty="0">
+                <a:solidFill>
+                  <a:srgbClr val="000000"/>
+                </a:solidFill>
+              </a:rPr>
+              <a:t>Train – test – split with 80% reserved for training, and 20% reserved for testing</a:t>
+            </a:r>
+          </a:p>
+        </p:txBody>
+      </p:sp>
+      <p:sp>
+        <p:nvSpPr>
+          <p:cNvPr id="97" name="Google Shape;97;p7">
+            <a:extLst>
+              <a:ext uri="{FF2B5EF4-FFF2-40B4-BE49-F238E27FC236}">
+                <a16:creationId xmlns:a16="http://schemas.microsoft.com/office/drawing/2014/main" id="{A0B24EA8-E114-6A94-C27D-9D55D45C0CA9}"/>
+              </a:ext>
+            </a:extLst>
+          </p:cNvPr>
+          <p:cNvSpPr txBox="1">
+            <a:spLocks noGrp="1"/>
+          </p:cNvSpPr>
+          <p:nvPr>
+            <p:ph type="title"/>
+          </p:nvPr>
+        </p:nvSpPr>
+        <p:spPr>
+          <a:xfrm>
+            <a:off x="838200" y="0"/>
+            <a:ext cx="10515600" cy="1371600"/>
+          </a:xfrm>
+          <a:prstGeom prst="rect">
+            <a:avLst/>
+          </a:prstGeom>
+          <a:noFill/>
+          <a:ln>
+            <a:noFill/>
+          </a:ln>
+        </p:spPr>
+        <p:txBody>
+          <a:bodyPr spcFirstLastPara="1" wrap="square" lIns="91425" tIns="45700" rIns="91425" bIns="45700" anchor="ctr" anchorCtr="0">
+            <a:normAutofit/>
+          </a:bodyPr>
+          <a:lstStyle/>
+          <a:p>
+            <a:pPr marL="0" lvl="0" indent="0" algn="l" rtl="0">
+              <a:lnSpc>
+                <a:spcPct val="90000"/>
+              </a:lnSpc>
+              <a:spcBef>
+                <a:spcPts val="0"/>
+              </a:spcBef>
+              <a:spcAft>
+                <a:spcPts val="0"/>
+              </a:spcAft>
+              <a:buClr>
+                <a:srgbClr val="006633"/>
+              </a:buClr>
+              <a:buSzPts val="4400"/>
+              <a:buFont typeface="Calibri"/>
+              <a:buNone/>
+            </a:pPr>
+            <a:r>
+              <a:rPr lang="en-US" dirty="0"/>
+              <a:t>Final XGBOOST Model</a:t>
+            </a:r>
+            <a:endParaRPr dirty="0"/>
+          </a:p>
+        </p:txBody>
+      </p:sp>
+    </p:spTree>
+    <p:extLst>
+      <p:ext uri="{BB962C8B-B14F-4D97-AF65-F5344CB8AC3E}">
+        <p14:creationId xmlns:p14="http://schemas.microsoft.com/office/powerpoint/2010/main" val="3649888072"/>
+      </p:ext>
+    </p:extLst>
+  </p:cSld>
+  <p:clrMapOvr>
+    <a:masterClrMapping/>
+  </p:clrMapOvr>
+</p:sld>
+</file>
+
+<file path=ppt/slides/slide15.xml><?xml version="1.0" encoding="utf-8"?>
+<p:sld xmlns:a="http://schemas.openxmlformats.org/drawingml/2006/main" xmlns:r="http://schemas.openxmlformats.org/officeDocument/2006/relationships" xmlns:p="http://schemas.openxmlformats.org/presentationml/2006/main">
+  <p:cSld>
+    <p:spTree>
+      <p:nvGrpSpPr>
+        <p:cNvPr id="1" name="Shape 95">
+          <a:extLst>
+            <a:ext uri="{FF2B5EF4-FFF2-40B4-BE49-F238E27FC236}">
+              <a16:creationId xmlns:a16="http://schemas.microsoft.com/office/drawing/2014/main" id="{6C9FFF1B-C788-C476-D318-63C55C949E80}"/>
+            </a:ext>
+          </a:extLst>
+        </p:cNvPr>
+        <p:cNvGrpSpPr/>
+        <p:nvPr/>
+      </p:nvGrpSpPr>
+      <p:grpSpPr>
+        <a:xfrm>
+          <a:off x="0" y="0"/>
+          <a:ext cx="0" cy="0"/>
+          <a:chOff x="0" y="0"/>
+          <a:chExt cx="0" cy="0"/>
+        </a:xfrm>
+      </p:grpSpPr>
+      <p:sp>
+        <p:nvSpPr>
+          <p:cNvPr id="96" name="Google Shape;96;p7">
+            <a:extLst>
+              <a:ext uri="{FF2B5EF4-FFF2-40B4-BE49-F238E27FC236}">
+                <a16:creationId xmlns:a16="http://schemas.microsoft.com/office/drawing/2014/main" id="{93344012-5D5E-C83C-4D37-BB7D2ACECC76}"/>
+              </a:ext>
+            </a:extLst>
+          </p:cNvPr>
+          <p:cNvSpPr txBox="1">
+            <a:spLocks noGrp="1"/>
+          </p:cNvSpPr>
+          <p:nvPr>
+            <p:ph type="body" idx="1"/>
+          </p:nvPr>
+        </p:nvSpPr>
+        <p:spPr>
+          <a:xfrm>
+            <a:off x="838200" y="1828800"/>
+            <a:ext cx="10515600" cy="4118524"/>
+          </a:xfrm>
+          <a:prstGeom prst="rect">
+            <a:avLst/>
+          </a:prstGeom>
+          <a:noFill/>
+          <a:ln>
+            <a:noFill/>
+          </a:ln>
+        </p:spPr>
+        <p:txBody>
+          <a:bodyPr spcFirstLastPara="1" wrap="square" lIns="91425" tIns="45700" rIns="91425" bIns="45700" anchor="t" anchorCtr="0">
+            <a:normAutofit/>
+          </a:bodyPr>
+          <a:lstStyle/>
+          <a:p>
+            <a:pPr marL="590550" indent="-457200">
+              <a:lnSpc>
+                <a:spcPct val="90000"/>
+              </a:lnSpc>
+              <a:spcBef>
+                <a:spcPts val="0"/>
+              </a:spcBef>
+              <a:buSzPts val="2100"/>
+            </a:pPr>
+            <a:r>
+              <a:rPr lang="en-US" dirty="0">
+                <a:solidFill>
+                  <a:srgbClr val="000000"/>
+                </a:solidFill>
+              </a:rPr>
+              <a:t>Train – test – split with 80% reserved for training, and 20% reserved for testing</a:t>
+            </a:r>
+          </a:p>
+        </p:txBody>
+      </p:sp>
+      <p:sp>
+        <p:nvSpPr>
+          <p:cNvPr id="97" name="Google Shape;97;p7">
+            <a:extLst>
+              <a:ext uri="{FF2B5EF4-FFF2-40B4-BE49-F238E27FC236}">
+                <a16:creationId xmlns:a16="http://schemas.microsoft.com/office/drawing/2014/main" id="{799E0F2E-1741-E95B-B205-786255AA5FD5}"/>
+              </a:ext>
+            </a:extLst>
+          </p:cNvPr>
+          <p:cNvSpPr txBox="1">
+            <a:spLocks noGrp="1"/>
+          </p:cNvSpPr>
+          <p:nvPr>
+            <p:ph type="title"/>
+          </p:nvPr>
+        </p:nvSpPr>
+        <p:spPr>
+          <a:xfrm>
+            <a:off x="838200" y="0"/>
+            <a:ext cx="10515600" cy="1371600"/>
+          </a:xfrm>
+          <a:prstGeom prst="rect">
+            <a:avLst/>
+          </a:prstGeom>
+          <a:noFill/>
+          <a:ln>
+            <a:noFill/>
+          </a:ln>
+        </p:spPr>
+        <p:txBody>
+          <a:bodyPr spcFirstLastPara="1" wrap="square" lIns="91425" tIns="45700" rIns="91425" bIns="45700" anchor="ctr" anchorCtr="0">
+            <a:normAutofit/>
+          </a:bodyPr>
+          <a:lstStyle/>
+          <a:p>
+            <a:pPr marL="0" lvl="0" indent="0" algn="l" rtl="0">
+              <a:lnSpc>
+                <a:spcPct val="90000"/>
+              </a:lnSpc>
+              <a:spcBef>
+                <a:spcPts val="0"/>
+              </a:spcBef>
+              <a:spcAft>
+                <a:spcPts val="0"/>
+              </a:spcAft>
+              <a:buClr>
+                <a:srgbClr val="006633"/>
+              </a:buClr>
+              <a:buSzPts val="4400"/>
+              <a:buFont typeface="Calibri"/>
+              <a:buNone/>
+            </a:pPr>
+            <a:r>
+              <a:rPr lang="en-US" dirty="0"/>
+              <a:t>Model Evaluation</a:t>
+            </a:r>
+            <a:endParaRPr dirty="0"/>
+          </a:p>
+        </p:txBody>
+      </p:sp>
+    </p:spTree>
+    <p:extLst>
+      <p:ext uri="{BB962C8B-B14F-4D97-AF65-F5344CB8AC3E}">
+        <p14:creationId xmlns:p14="http://schemas.microsoft.com/office/powerpoint/2010/main" val="905592136"/>
+      </p:ext>
+    </p:extLst>
+  </p:cSld>
+  <p:clrMapOvr>
+    <a:masterClrMapping/>
+  </p:clrMapOvr>
+</p:sld>
+</file>
+
+<file path=ppt/slides/slide16.xml><?xml version="1.0" encoding="utf-8"?>
+<p:sld xmlns:a="http://schemas.openxmlformats.org/drawingml/2006/main" xmlns:r="http://schemas.openxmlformats.org/officeDocument/2006/relationships" xmlns:p="http://schemas.openxmlformats.org/presentationml/2006/main">
+  <p:cSld>
+    <p:spTree>
+      <p:nvGrpSpPr>
+        <p:cNvPr id="1" name="Shape 95">
+          <a:extLst>
+            <a:ext uri="{FF2B5EF4-FFF2-40B4-BE49-F238E27FC236}">
+              <a16:creationId xmlns:a16="http://schemas.microsoft.com/office/drawing/2014/main" id="{892C4BFF-0F5D-5853-DDCE-95BA16F76298}"/>
+            </a:ext>
+          </a:extLst>
+        </p:cNvPr>
+        <p:cNvGrpSpPr/>
+        <p:nvPr/>
+      </p:nvGrpSpPr>
+      <p:grpSpPr>
+        <a:xfrm>
+          <a:off x="0" y="0"/>
+          <a:ext cx="0" cy="0"/>
+          <a:chOff x="0" y="0"/>
+          <a:chExt cx="0" cy="0"/>
+        </a:xfrm>
+      </p:grpSpPr>
+      <p:sp>
+        <p:nvSpPr>
+          <p:cNvPr id="96" name="Google Shape;96;p7">
+            <a:extLst>
+              <a:ext uri="{FF2B5EF4-FFF2-40B4-BE49-F238E27FC236}">
+                <a16:creationId xmlns:a16="http://schemas.microsoft.com/office/drawing/2014/main" id="{9735E29E-0944-B1B4-2165-18C86AB27D02}"/>
+              </a:ext>
+            </a:extLst>
+          </p:cNvPr>
+          <p:cNvSpPr txBox="1">
+            <a:spLocks noGrp="1"/>
+          </p:cNvSpPr>
+          <p:nvPr>
+            <p:ph type="body" idx="1"/>
+          </p:nvPr>
+        </p:nvSpPr>
+        <p:spPr>
+          <a:xfrm>
+            <a:off x="838200" y="1828800"/>
+            <a:ext cx="10515600" cy="4118524"/>
+          </a:xfrm>
+          <a:prstGeom prst="rect">
+            <a:avLst/>
+          </a:prstGeom>
+          <a:noFill/>
+          <a:ln>
+            <a:noFill/>
+          </a:ln>
+        </p:spPr>
+        <p:txBody>
+          <a:bodyPr spcFirstLastPara="1" wrap="square" lIns="91425" tIns="45700" rIns="91425" bIns="45700" anchor="t" anchorCtr="0">
+            <a:normAutofit/>
+          </a:bodyPr>
+          <a:lstStyle/>
+          <a:p>
+            <a:pPr marL="590550" indent="-457200">
+              <a:lnSpc>
+                <a:spcPct val="90000"/>
+              </a:lnSpc>
+              <a:spcBef>
+                <a:spcPts val="0"/>
+              </a:spcBef>
+              <a:buSzPts val="2100"/>
+            </a:pPr>
+            <a:r>
+              <a:rPr lang="en-US" dirty="0">
+                <a:solidFill>
+                  <a:srgbClr val="000000"/>
+                </a:solidFill>
+              </a:rPr>
+              <a:t>Train – test – split with 80% reserved for training, and 20% reserved for testing</a:t>
+            </a:r>
+          </a:p>
+        </p:txBody>
+      </p:sp>
+      <p:sp>
+        <p:nvSpPr>
+          <p:cNvPr id="97" name="Google Shape;97;p7">
+            <a:extLst>
+              <a:ext uri="{FF2B5EF4-FFF2-40B4-BE49-F238E27FC236}">
+                <a16:creationId xmlns:a16="http://schemas.microsoft.com/office/drawing/2014/main" id="{8CFDD088-773C-9029-A6B9-F9DBC3596112}"/>
+              </a:ext>
+            </a:extLst>
+          </p:cNvPr>
+          <p:cNvSpPr txBox="1">
+            <a:spLocks noGrp="1"/>
+          </p:cNvSpPr>
+          <p:nvPr>
+            <p:ph type="title"/>
+          </p:nvPr>
+        </p:nvSpPr>
+        <p:spPr>
+          <a:xfrm>
+            <a:off x="838200" y="0"/>
+            <a:ext cx="10515600" cy="1371600"/>
+          </a:xfrm>
+          <a:prstGeom prst="rect">
+            <a:avLst/>
+          </a:prstGeom>
+          <a:noFill/>
+          <a:ln>
+            <a:noFill/>
+          </a:ln>
+        </p:spPr>
+        <p:txBody>
+          <a:bodyPr spcFirstLastPara="1" wrap="square" lIns="91425" tIns="45700" rIns="91425" bIns="45700" anchor="ctr" anchorCtr="0">
+            <a:normAutofit/>
+          </a:bodyPr>
+          <a:lstStyle/>
+          <a:p>
+            <a:pPr marL="0" lvl="0" indent="0" algn="l" rtl="0">
+              <a:lnSpc>
+                <a:spcPct val="90000"/>
+              </a:lnSpc>
+              <a:spcBef>
+                <a:spcPts val="0"/>
+              </a:spcBef>
+              <a:spcAft>
+                <a:spcPts val="0"/>
+              </a:spcAft>
+              <a:buClr>
+                <a:srgbClr val="006633"/>
+              </a:buClr>
+              <a:buSzPts val="4400"/>
+              <a:buFont typeface="Calibri"/>
+              <a:buNone/>
+            </a:pPr>
+            <a:r>
+              <a:rPr lang="en-US" dirty="0"/>
+              <a:t>Conclusion</a:t>
+            </a:r>
+            <a:endParaRPr dirty="0"/>
+          </a:p>
+        </p:txBody>
+      </p:sp>
+    </p:spTree>
+    <p:extLst>
+      <p:ext uri="{BB962C8B-B14F-4D97-AF65-F5344CB8AC3E}">
+        <p14:creationId xmlns:p14="http://schemas.microsoft.com/office/powerpoint/2010/main" val="4048708171"/>
+      </p:ext>
+    </p:extLst>
+  </p:cSld>
+  <p:clrMapOvr>
+    <a:masterClrMapping/>
+  </p:clrMapOvr>
+</p:sld>
+</file>
+
+<file path=ppt/slides/slide17.xml><?xml version="1.0" encoding="utf-8"?>
+<p:sld xmlns:a="http://schemas.openxmlformats.org/drawingml/2006/main" xmlns:r="http://schemas.openxmlformats.org/officeDocument/2006/relationships" xmlns:p="http://schemas.openxmlformats.org/presentationml/2006/main">
+  <p:cSld>
+    <p:spTree>
+      <p:nvGrpSpPr>
         <p:cNvPr id="1" name="Shape 72"/>
         <p:cNvGrpSpPr/>
         <p:nvPr/>
@@ -15014,7 +15098,7 @@
 </p:sld>
 </file>
 
-<file path=ppt/slides/slide11.xml><?xml version="1.0" encoding="utf-8"?>
+<file path=ppt/slides/slide18.xml><?xml version="1.0" encoding="utf-8"?>
 <p:sld xmlns:a="http://schemas.openxmlformats.org/drawingml/2006/main" xmlns:r="http://schemas.openxmlformats.org/officeDocument/2006/relationships" xmlns:p="http://schemas.openxmlformats.org/presentationml/2006/main">
   <p:cSld>
     <p:spTree>
@@ -18615,7 +18699,7 @@
 </p:sld>
 </file>
 
-<file path=ppt/slides/slide12.xml><?xml version="1.0" encoding="utf-8"?>
+<file path=ppt/slides/slide19.xml><?xml version="1.0" encoding="utf-8"?>
 <p:sld xmlns:a="http://schemas.openxmlformats.org/drawingml/2006/main" xmlns:r="http://schemas.openxmlformats.org/officeDocument/2006/relationships" xmlns:p="http://schemas.openxmlformats.org/presentationml/2006/main">
   <p:cSld>
     <p:spTree>
@@ -20029,7 +20113,7 @@
         </p:spPr>
         <p:txBody>
           <a:bodyPr spcFirstLastPara="1" wrap="square" lIns="91425" tIns="45700" rIns="91425" bIns="45700" anchor="t" anchorCtr="0">
-            <a:normAutofit fontScale="92500" lnSpcReduction="20000"/>
+            <a:normAutofit fontScale="70000" lnSpcReduction="20000"/>
           </a:bodyPr>
           <a:lstStyle/>
           <a:p>
@@ -20048,8 +20132,39 @@
             </a:pPr>
             <a:r>
               <a:rPr lang="en-US" sz="3400" b="1" dirty="0"/>
-              <a:t>Group Presentation: [Insert group number and project title here; delete the brackets]</a:t>
+              <a:t>Group Presentation: Team 3 – An Huynh</a:t>
             </a:r>
+          </a:p>
+          <a:p>
+            <a:pPr marL="0" lvl="0" indent="0" rtl="0">
+              <a:lnSpc>
+                <a:spcPct val="90000"/>
+              </a:lnSpc>
+              <a:spcBef>
+                <a:spcPts val="0"/>
+              </a:spcBef>
+              <a:spcAft>
+                <a:spcPts val="0"/>
+              </a:spcAft>
+              <a:buSzPts val="2100"/>
+              <a:buNone/>
+            </a:pPr>
+            <a:r>
+              <a:rPr lang="en-US" sz="3400" b="1" dirty="0"/>
+              <a:t>Telco Customer Churn Prediction</a:t>
+            </a:r>
+          </a:p>
+          <a:p>
+            <a:pPr marL="0" lvl="0" indent="0">
+              <a:spcBef>
+                <a:spcPts val="0"/>
+              </a:spcBef>
+            </a:pPr>
+            <a:r>
+              <a:rPr lang="en-US" sz="3200" dirty="0"/>
+              <a:t>Course: AIT736 Applied Machine Learning (Spring 2026)</a:t>
+            </a:r>
+            <a:endParaRPr lang="en-US" sz="3200" b="1" dirty="0"/>
           </a:p>
           <a:p>
             <a:pPr marL="0" lvl="0" indent="0" rtl="0">
@@ -20088,47 +20203,6 @@
           </a:p>
         </p:txBody>
       </p:sp>
-      <p:pic>
-        <p:nvPicPr>
-          <p:cNvPr id="2" name="Camera 1">
-            <a:extLst>
-              <a:ext uri="{FF2B5EF4-FFF2-40B4-BE49-F238E27FC236}">
-                <a16:creationId xmlns:a16="http://schemas.microsoft.com/office/drawing/2014/main" id="{BF9A7970-7608-7CB4-93D2-9974995C54CF}"/>
-              </a:ext>
-            </a:extLst>
-          </p:cNvPr>
-          <p:cNvPicPr>
-            <a:picLocks noChangeAspect="1"/>
-            <a:extLst>
-              <a:ext uri="{51228E76-BA90-4043-B771-695A4F85340A}">
-                <alf:liveFeedProps xmlns:alf="http://schemas.microsoft.com/office/drawing/2021/livefeed"/>
-              </a:ext>
-            </a:extLst>
-          </p:cNvPicPr>
-          <p:nvPr/>
-        </p:nvPicPr>
-        <p:blipFill>
-          <a:blip>
-            <a:extLst>
-              <a:ext uri="{96DAC541-7B7A-43D3-8B79-37D633B846F1}">
-                <asvg:svgBlip xmlns:asvg="http://schemas.microsoft.com/office/drawing/2016/SVG/main" r:embed="rId3"/>
-              </a:ext>
-            </a:extLst>
-          </a:blip>
-          <a:stretch>
-            <a:fillRect/>
-          </a:stretch>
-        </p:blipFill>
-        <p:spPr>
-          <a:xfrm>
-            <a:off x="10052304" y="4718304"/>
-            <a:ext cx="2057400" cy="2057400"/>
-          </a:xfrm>
-          <a:prstGeom prst="ellipse">
-            <a:avLst/>
-          </a:prstGeom>
-        </p:spPr>
-      </p:pic>
     </p:spTree>
     <p:extLst>
       <p:ext uri="{BB962C8B-B14F-4D97-AF65-F5344CB8AC3E}">
@@ -20207,9 +20281,86 @@
             </a:pPr>
             <a:r>
               <a:rPr lang="en-US" dirty="0"/>
-              <a:t>Section Header: Update this to create a slide title</a:t>
+              <a:t>Introduction/Motivation</a:t>
             </a:r>
             <a:endParaRPr dirty="0"/>
+          </a:p>
+        </p:txBody>
+      </p:sp>
+      <p:sp>
+        <p:nvSpPr>
+          <p:cNvPr id="2" name="TextBox 1">
+            <a:extLst>
+              <a:ext uri="{FF2B5EF4-FFF2-40B4-BE49-F238E27FC236}">
+                <a16:creationId xmlns:a16="http://schemas.microsoft.com/office/drawing/2014/main" id="{7CF2D029-C269-57F6-BA63-7480209B09D2}"/>
+              </a:ext>
+            </a:extLst>
+          </p:cNvPr>
+          <p:cNvSpPr txBox="1"/>
+          <p:nvPr/>
+        </p:nvSpPr>
+        <p:spPr>
+          <a:xfrm>
+            <a:off x="672353" y="1909482"/>
+            <a:ext cx="11228294" cy="1600438"/>
+          </a:xfrm>
+          <a:prstGeom prst="rect">
+            <a:avLst/>
+          </a:prstGeom>
+          <a:noFill/>
+        </p:spPr>
+        <p:txBody>
+          <a:bodyPr wrap="square" rtlCol="0">
+            <a:spAutoFit/>
+          </a:bodyPr>
+          <a:lstStyle/>
+          <a:p>
+            <a:pPr marL="285750" indent="-285750">
+              <a:buFont typeface="Arial" panose="020B0604020202020204" pitchFamily="34" charset="0"/>
+              <a:buChar char="•"/>
+            </a:pPr>
+            <a:r>
+              <a:rPr lang="en-US" sz="2800" dirty="0">
+                <a:latin typeface="Calibri" panose="020F0502020204030204" pitchFamily="34" charset="0"/>
+                <a:cs typeface="Calibri" panose="020F0502020204030204" pitchFamily="34" charset="0"/>
+              </a:rPr>
+              <a:t>What churn is?</a:t>
+            </a:r>
+          </a:p>
+          <a:p>
+            <a:pPr marL="285750" indent="-285750">
+              <a:buFont typeface="Arial" panose="020B0604020202020204" pitchFamily="34" charset="0"/>
+              <a:buChar char="•"/>
+            </a:pPr>
+            <a:r>
+              <a:rPr lang="en-US" sz="2800" dirty="0">
+                <a:latin typeface="Calibri" panose="020F0502020204030204" pitchFamily="34" charset="0"/>
+                <a:cs typeface="Calibri" panose="020F0502020204030204" pitchFamily="34" charset="0"/>
+              </a:rPr>
+              <a:t>Why churn matters (revenue loss, customer retention cost)</a:t>
+            </a:r>
+          </a:p>
+          <a:p>
+            <a:pPr marL="285750" indent="-285750">
+              <a:buFont typeface="Arial" panose="020B0604020202020204" pitchFamily="34" charset="0"/>
+              <a:buChar char="•"/>
+            </a:pPr>
+            <a:r>
+              <a:rPr lang="en-US" sz="2800" dirty="0">
+                <a:latin typeface="Calibri" panose="020F0502020204030204" pitchFamily="34" charset="0"/>
+                <a:cs typeface="Calibri" panose="020F0502020204030204" pitchFamily="34" charset="0"/>
+              </a:rPr>
+              <a:t>Why prediction is useful for business?</a:t>
+            </a:r>
+          </a:p>
+          <a:p>
+            <a:pPr marL="285750" indent="-285750">
+              <a:buFont typeface="Arial" panose="020B0604020202020204" pitchFamily="34" charset="0"/>
+              <a:buChar char="•"/>
+            </a:pPr>
+            <a:endParaRPr lang="en-US" dirty="0">
+              <a:latin typeface="+mn-lt"/>
+            </a:endParaRPr>
           </a:p>
         </p:txBody>
       </p:sp>
@@ -20250,8 +20401,8 @@
         </p:nvSpPr>
         <p:spPr>
           <a:xfrm>
-            <a:off x="839788" y="2493818"/>
-            <a:ext cx="10515600" cy="3477491"/>
+            <a:off x="839788" y="1909482"/>
+            <a:ext cx="10515600" cy="4061827"/>
           </a:xfrm>
           <a:prstGeom prst="rect">
             <a:avLst/>
@@ -20263,70 +20414,89 @@
         </p:spPr>
         <p:txBody>
           <a:bodyPr spcFirstLastPara="1" wrap="square" lIns="91425" tIns="45700" rIns="91425" bIns="45700" anchor="t" anchorCtr="0">
-            <a:normAutofit/>
+            <a:normAutofit fontScale="85000" lnSpcReduction="20000"/>
           </a:bodyPr>
           <a:lstStyle/>
           <a:p>
-            <a:pPr marL="228600" lvl="0" indent="-95250" algn="l" rtl="0">
+            <a:pPr marL="590550" indent="-457200">
               <a:lnSpc>
-                <a:spcPct val="90000"/>
+                <a:spcPct val="150000"/>
               </a:lnSpc>
               <a:spcBef>
                 <a:spcPts val="0"/>
               </a:spcBef>
-              <a:spcAft>
-                <a:spcPts val="0"/>
-              </a:spcAft>
               <a:buSzPts val="2100"/>
-              <a:buNone/>
             </a:pPr>
-            <a:endParaRPr dirty="0"/>
+            <a:r>
+              <a:rPr lang="en-US" dirty="0">
+                <a:solidFill>
+                  <a:srgbClr val="000000"/>
+                </a:solidFill>
+              </a:rPr>
+              <a:t>Problem statement: This project aims at building different machine learning models to predict customer churn at Telco company by analyzing customer related factors.</a:t>
+            </a:r>
           </a:p>
-        </p:txBody>
-      </p:sp>
-      <p:sp>
-        <p:nvSpPr>
-          <p:cNvPr id="67" name="Google Shape;67;p2"/>
-          <p:cNvSpPr txBox="1">
-            <a:spLocks noGrp="1"/>
-          </p:cNvSpPr>
-          <p:nvPr>
-            <p:ph type="body" idx="2"/>
-          </p:nvPr>
-        </p:nvSpPr>
-        <p:spPr>
-          <a:xfrm>
-            <a:off x="839788" y="1828800"/>
-            <a:ext cx="10515600" cy="498764"/>
-          </a:xfrm>
-          <a:prstGeom prst="rect">
-            <a:avLst/>
-          </a:prstGeom>
-          <a:noFill/>
-          <a:ln>
-            <a:noFill/>
-          </a:ln>
-        </p:spPr>
-        <p:txBody>
-          <a:bodyPr spcFirstLastPara="1" wrap="square" lIns="91425" tIns="45700" rIns="91425" bIns="45700" anchor="t" anchorCtr="0">
-            <a:normAutofit/>
-          </a:bodyPr>
-          <a:lstStyle/>
           <a:p>
-            <a:pPr marL="0" lvl="0" indent="0" algn="l" rtl="0">
+            <a:pPr marL="590550" indent="-457200">
               <a:lnSpc>
-                <a:spcPct val="80000"/>
+                <a:spcPct val="150000"/>
               </a:lnSpc>
               <a:spcBef>
                 <a:spcPts val="0"/>
               </a:spcBef>
-              <a:spcAft>
-                <a:spcPts val="0"/>
-              </a:spcAft>
-              <a:buSzPts val="2400"/>
-              <a:buNone/>
+              <a:buSzPts val="2100"/>
             </a:pPr>
-            <a:endParaRPr dirty="0"/>
+            <a:r>
+              <a:rPr lang="en-US" dirty="0">
+                <a:solidFill>
+                  <a:srgbClr val="000000"/>
+                </a:solidFill>
+              </a:rPr>
+              <a:t>Target variable: Churn (Yes/No)</a:t>
+            </a:r>
+          </a:p>
+          <a:p>
+            <a:pPr marL="590550" indent="-457200">
+              <a:lnSpc>
+                <a:spcPct val="150000"/>
+              </a:lnSpc>
+              <a:spcBef>
+                <a:spcPts val="0"/>
+              </a:spcBef>
+              <a:buSzPts val="2100"/>
+            </a:pPr>
+            <a:r>
+              <a:rPr lang="en-US" dirty="0">
+                <a:solidFill>
+                  <a:srgbClr val="000000"/>
+                </a:solidFill>
+              </a:rPr>
+              <a:t>Business goal: The primary goal is to maximize churn detection (recall) while minimizing the number of missed churner, enabling the company to proactively retain customers</a:t>
+            </a:r>
+          </a:p>
+          <a:p>
+            <a:pPr marL="590550" indent="-457200">
+              <a:lnSpc>
+                <a:spcPct val="150000"/>
+              </a:lnSpc>
+              <a:spcBef>
+                <a:spcPts val="0"/>
+              </a:spcBef>
+              <a:buSzPts val="2100"/>
+            </a:pPr>
+            <a:r>
+              <a:rPr lang="en-US" dirty="0">
+                <a:solidFill>
+                  <a:srgbClr val="000000"/>
+                </a:solidFill>
+              </a:rPr>
+              <a:t>Challenge: class imbalance</a:t>
+            </a:r>
+            <a:endParaRPr dirty="0">
+              <a:solidFill>
+                <a:srgbClr val="000000"/>
+              </a:solidFill>
+            </a:endParaRPr>
           </a:p>
         </p:txBody>
       </p:sp>
@@ -20378,7 +20548,7 @@
             </a:pPr>
             <a:r>
               <a:rPr lang="en-US" dirty="0"/>
-              <a:t>Title with subtitle and text boxes. Update the text in this title box to create a slide title</a:t>
+              <a:t>Problem Statement/Business Goal</a:t>
             </a:r>
             <a:endParaRPr dirty="0"/>
           </a:p>
@@ -20438,20 +20608,104 @@
           </a:bodyPr>
           <a:lstStyle/>
           <a:p>
-            <a:pPr marL="228600" lvl="0" indent="-95250" algn="l" rtl="0">
+            <a:pPr marL="590550" indent="-457200">
               <a:lnSpc>
                 <a:spcPct val="90000"/>
               </a:lnSpc>
               <a:spcBef>
                 <a:spcPts val="0"/>
               </a:spcBef>
-              <a:spcAft>
-                <a:spcPts val="0"/>
-              </a:spcAft>
               <a:buSzPts val="2100"/>
-              <a:buNone/>
             </a:pPr>
-            <a:endParaRPr dirty="0"/>
+            <a:r>
+              <a:rPr lang="en-US" dirty="0">
+                <a:solidFill>
+                  <a:srgbClr val="000000"/>
+                </a:solidFill>
+              </a:rPr>
+              <a:t>Dataset name: Telco Customer Churn</a:t>
+            </a:r>
+          </a:p>
+          <a:p>
+            <a:pPr marL="590550" indent="-457200">
+              <a:lnSpc>
+                <a:spcPct val="90000"/>
+              </a:lnSpc>
+              <a:spcBef>
+                <a:spcPts val="0"/>
+              </a:spcBef>
+              <a:buSzPts val="2100"/>
+            </a:pPr>
+            <a:r>
+              <a:rPr lang="en-US" dirty="0">
+                <a:solidFill>
+                  <a:srgbClr val="000000"/>
+                </a:solidFill>
+              </a:rPr>
+              <a:t>Source: Kaggle</a:t>
+            </a:r>
+          </a:p>
+          <a:p>
+            <a:pPr marL="590550" indent="-457200">
+              <a:lnSpc>
+                <a:spcPct val="90000"/>
+              </a:lnSpc>
+              <a:spcBef>
+                <a:spcPts val="0"/>
+              </a:spcBef>
+              <a:buSzPts val="2100"/>
+            </a:pPr>
+            <a:r>
+              <a:rPr lang="en-US" dirty="0">
+                <a:solidFill>
+                  <a:srgbClr val="000000"/>
+                </a:solidFill>
+              </a:rPr>
+              <a:t>Size: (#rows, #columns)</a:t>
+            </a:r>
+          </a:p>
+          <a:p>
+            <a:pPr marL="590550" indent="-457200">
+              <a:lnSpc>
+                <a:spcPct val="90000"/>
+              </a:lnSpc>
+              <a:spcBef>
+                <a:spcPts val="0"/>
+              </a:spcBef>
+              <a:buSzPts val="2100"/>
+            </a:pPr>
+            <a:r>
+              <a:rPr lang="en-US" dirty="0">
+                <a:solidFill>
+                  <a:srgbClr val="000000"/>
+                </a:solidFill>
+              </a:rPr>
+              <a:t>Feature types:</a:t>
+            </a:r>
+          </a:p>
+          <a:p>
+            <a:pPr marL="590550" indent="-457200">
+              <a:lnSpc>
+                <a:spcPct val="90000"/>
+              </a:lnSpc>
+              <a:spcBef>
+                <a:spcPts val="0"/>
+              </a:spcBef>
+              <a:buSzPts val="2100"/>
+            </a:pPr>
+            <a:r>
+              <a:rPr lang="en-US" dirty="0">
+                <a:solidFill>
+                  <a:srgbClr val="000000"/>
+                </a:solidFill>
+              </a:rPr>
+              <a:t>Brief mention of key features</a:t>
+            </a:r>
+            <a:endParaRPr dirty="0">
+              <a:solidFill>
+                <a:srgbClr val="000000"/>
+              </a:solidFill>
+            </a:endParaRPr>
           </a:p>
         </p:txBody>
       </p:sp>
@@ -20503,7 +20757,7 @@
             </a:pPr>
             <a:r>
               <a:rPr lang="en-US" dirty="0"/>
-              <a:t>Title and one text box. Update the text in this title box to create a slide title</a:t>
+              <a:t>Dataset Description</a:t>
             </a:r>
             <a:endParaRPr dirty="0"/>
           </a:p>
@@ -20522,7 +20776,13 @@
   <p:cSld>
     <p:spTree>
       <p:nvGrpSpPr>
-        <p:cNvPr id="1" name="Shape 101"/>
+        <p:cNvPr id="1" name="Shape 95">
+          <a:extLst>
+            <a:ext uri="{FF2B5EF4-FFF2-40B4-BE49-F238E27FC236}">
+              <a16:creationId xmlns:a16="http://schemas.microsoft.com/office/drawing/2014/main" id="{D28C029E-1034-89DC-D7A2-63B016445F50}"/>
+            </a:ext>
+          </a:extLst>
+        </p:cNvPr>
         <p:cNvGrpSpPr/>
         <p:nvPr/>
       </p:nvGrpSpPr>
@@ -20536,7 +20796,13 @@
       </p:grpSpPr>
       <p:sp>
         <p:nvSpPr>
-          <p:cNvPr id="102" name="Google Shape;102;p8"/>
+          <p:cNvPr id="96" name="Google Shape;96;p7">
+            <a:extLst>
+              <a:ext uri="{FF2B5EF4-FFF2-40B4-BE49-F238E27FC236}">
+                <a16:creationId xmlns:a16="http://schemas.microsoft.com/office/drawing/2014/main" id="{79EF9916-657D-A356-C8CB-EE41BF232E89}"/>
+              </a:ext>
+            </a:extLst>
+          </p:cNvPr>
           <p:cNvSpPr txBox="1">
             <a:spLocks noGrp="1"/>
           </p:cNvSpPr>
@@ -20546,8 +20812,8 @@
         </p:nvSpPr>
         <p:spPr>
           <a:xfrm>
-            <a:off x="6172200" y="1825624"/>
-            <a:ext cx="5181600" cy="4110941"/>
+            <a:off x="838200" y="1828800"/>
+            <a:ext cx="10515600" cy="4118524"/>
           </a:xfrm>
           <a:prstGeom prst="rect">
             <a:avLst/>
@@ -20563,72 +20829,116 @@
           </a:bodyPr>
           <a:lstStyle/>
           <a:p>
-            <a:pPr marL="228600" lvl="0" indent="-95250" algn="l" rtl="0">
+            <a:pPr marL="590550" indent="-457200">
               <a:lnSpc>
                 <a:spcPct val="90000"/>
               </a:lnSpc>
               <a:spcBef>
                 <a:spcPts val="0"/>
               </a:spcBef>
-              <a:spcAft>
-                <a:spcPts val="0"/>
-              </a:spcAft>
               <a:buSzPts val="2100"/>
-              <a:buNone/>
             </a:pPr>
-            <a:endParaRPr dirty="0"/>
+            <a:r>
+              <a:rPr lang="en-US" dirty="0">
+                <a:solidFill>
+                  <a:srgbClr val="000000"/>
+                </a:solidFill>
+              </a:rPr>
+              <a:t>Dataset name: Telco Customer Churn</a:t>
+            </a:r>
+          </a:p>
+          <a:p>
+            <a:pPr marL="590550" indent="-457200">
+              <a:lnSpc>
+                <a:spcPct val="90000"/>
+              </a:lnSpc>
+              <a:spcBef>
+                <a:spcPts val="0"/>
+              </a:spcBef>
+              <a:buSzPts val="2100"/>
+            </a:pPr>
+            <a:r>
+              <a:rPr lang="en-US" dirty="0">
+                <a:solidFill>
+                  <a:srgbClr val="000000"/>
+                </a:solidFill>
+              </a:rPr>
+              <a:t>Source: Kaggle</a:t>
+            </a:r>
+          </a:p>
+          <a:p>
+            <a:pPr marL="590550" indent="-457200">
+              <a:lnSpc>
+                <a:spcPct val="90000"/>
+              </a:lnSpc>
+              <a:spcBef>
+                <a:spcPts val="0"/>
+              </a:spcBef>
+              <a:buSzPts val="2100"/>
+            </a:pPr>
+            <a:r>
+              <a:rPr lang="en-US" dirty="0">
+                <a:solidFill>
+                  <a:srgbClr val="000000"/>
+                </a:solidFill>
+              </a:rPr>
+              <a:t>Size: (#rows, #columns)</a:t>
+            </a:r>
+          </a:p>
+          <a:p>
+            <a:pPr marL="590550" indent="-457200">
+              <a:lnSpc>
+                <a:spcPct val="90000"/>
+              </a:lnSpc>
+              <a:spcBef>
+                <a:spcPts val="0"/>
+              </a:spcBef>
+              <a:buSzPts val="2100"/>
+            </a:pPr>
+            <a:r>
+              <a:rPr lang="en-US" dirty="0">
+                <a:solidFill>
+                  <a:srgbClr val="000000"/>
+                </a:solidFill>
+              </a:rPr>
+              <a:t>Feature types:</a:t>
+            </a:r>
+          </a:p>
+          <a:p>
+            <a:pPr marL="590550" indent="-457200">
+              <a:lnSpc>
+                <a:spcPct val="90000"/>
+              </a:lnSpc>
+              <a:spcBef>
+                <a:spcPts val="0"/>
+              </a:spcBef>
+              <a:buSzPts val="2100"/>
+            </a:pPr>
+            <a:r>
+              <a:rPr lang="en-US" dirty="0">
+                <a:solidFill>
+                  <a:srgbClr val="000000"/>
+                </a:solidFill>
+              </a:rPr>
+              <a:t>Brief mention of key features</a:t>
+            </a:r>
+            <a:endParaRPr dirty="0">
+              <a:solidFill>
+                <a:srgbClr val="000000"/>
+              </a:solidFill>
+            </a:endParaRPr>
           </a:p>
         </p:txBody>
       </p:sp>
       <p:sp>
         <p:nvSpPr>
-          <p:cNvPr id="103" name="Google Shape;103;p8"/>
-          <p:cNvSpPr txBox="1">
-            <a:spLocks noGrp="1"/>
-          </p:cNvSpPr>
-          <p:nvPr>
-            <p:ph type="body" idx="2"/>
-          </p:nvPr>
-        </p:nvSpPr>
-        <p:spPr>
-          <a:xfrm>
-            <a:off x="838200" y="1825624"/>
-            <a:ext cx="5181600" cy="4110941"/>
-          </a:xfrm>
-          <a:prstGeom prst="rect">
-            <a:avLst/>
-          </a:prstGeom>
-          <a:noFill/>
-          <a:ln>
-            <a:noFill/>
-          </a:ln>
-        </p:spPr>
-        <p:txBody>
-          <a:bodyPr spcFirstLastPara="1" wrap="square" lIns="91425" tIns="45700" rIns="91425" bIns="45700" anchor="t" anchorCtr="0">
-            <a:normAutofit/>
-          </a:bodyPr>
-          <a:lstStyle/>
-          <a:p>
-            <a:pPr marL="228600" lvl="0" indent="-95250" algn="l" rtl="0">
-              <a:lnSpc>
-                <a:spcPct val="90000"/>
-              </a:lnSpc>
-              <a:spcBef>
-                <a:spcPts val="0"/>
-              </a:spcBef>
-              <a:spcAft>
-                <a:spcPts val="0"/>
-              </a:spcAft>
-              <a:buSzPts val="2100"/>
-              <a:buNone/>
-            </a:pPr>
-            <a:endParaRPr dirty="0"/>
-          </a:p>
-        </p:txBody>
-      </p:sp>
-      <p:sp>
-        <p:nvSpPr>
-          <p:cNvPr id="104" name="Google Shape;104;p8"/>
+          <p:cNvPr id="97" name="Google Shape;97;p7">
+            <a:extLst>
+              <a:ext uri="{FF2B5EF4-FFF2-40B4-BE49-F238E27FC236}">
+                <a16:creationId xmlns:a16="http://schemas.microsoft.com/office/drawing/2014/main" id="{B132F64C-766A-6C66-FCB4-B2F61AEBA58E}"/>
+              </a:ext>
+            </a:extLst>
+          </p:cNvPr>
           <p:cNvSpPr txBox="1">
             <a:spLocks noGrp="1"/>
           </p:cNvSpPr>
@@ -20674,13 +20984,18 @@
             </a:pPr>
             <a:r>
               <a:rPr lang="en-US" dirty="0"/>
-              <a:t>2-Text Column Slide: Update the text in this title box to create a slide title</a:t>
+              <a:t>Exploratory Data Analysis</a:t>
             </a:r>
             <a:endParaRPr dirty="0"/>
           </a:p>
         </p:txBody>
       </p:sp>
     </p:spTree>
+    <p:extLst>
+      <p:ext uri="{BB962C8B-B14F-4D97-AF65-F5344CB8AC3E}">
+        <p14:creationId xmlns:p14="http://schemas.microsoft.com/office/powerpoint/2010/main" val="1376291174"/>
+      </p:ext>
+    </p:extLst>
   </p:cSld>
   <p:clrMapOvr>
     <a:masterClrMapping/>
@@ -20693,7 +21008,13 @@
   <p:cSld>
     <p:spTree>
       <p:nvGrpSpPr>
-        <p:cNvPr id="1" name="Shape 108"/>
+        <p:cNvPr id="1" name="Shape 95">
+          <a:extLst>
+            <a:ext uri="{FF2B5EF4-FFF2-40B4-BE49-F238E27FC236}">
+              <a16:creationId xmlns:a16="http://schemas.microsoft.com/office/drawing/2014/main" id="{B3BA4B89-D9E8-647D-1388-E6A29CBD0CA9}"/>
+            </a:ext>
+          </a:extLst>
+        </p:cNvPr>
         <p:cNvGrpSpPr/>
         <p:nvPr/>
       </p:nvGrpSpPr>
@@ -20707,7 +21028,13 @@
       </p:grpSpPr>
       <p:sp>
         <p:nvSpPr>
-          <p:cNvPr id="109" name="Google Shape;109;p9"/>
+          <p:cNvPr id="96" name="Google Shape;96;p7">
+            <a:extLst>
+              <a:ext uri="{FF2B5EF4-FFF2-40B4-BE49-F238E27FC236}">
+                <a16:creationId xmlns:a16="http://schemas.microsoft.com/office/drawing/2014/main" id="{6DAA00DE-A237-7490-0F82-0DEF7DC04885}"/>
+              </a:ext>
+            </a:extLst>
+          </p:cNvPr>
           <p:cNvSpPr txBox="1">
             <a:spLocks noGrp="1"/>
           </p:cNvSpPr>
@@ -20717,8 +21044,8 @@
         </p:nvSpPr>
         <p:spPr>
           <a:xfrm>
-            <a:off x="6172200" y="2771334"/>
-            <a:ext cx="5183188" cy="3200400"/>
+            <a:off x="838200" y="1828800"/>
+            <a:ext cx="10515600" cy="4118524"/>
           </a:xfrm>
           <a:prstGeom prst="rect">
             <a:avLst/>
@@ -20734,164 +21061,108 @@
           </a:bodyPr>
           <a:lstStyle/>
           <a:p>
-            <a:pPr marL="228600" lvl="0" indent="-95250" algn="l" rtl="0">
+            <a:pPr marL="590550" indent="-457200">
               <a:lnSpc>
                 <a:spcPct val="90000"/>
               </a:lnSpc>
               <a:spcBef>
                 <a:spcPts val="0"/>
               </a:spcBef>
-              <a:spcAft>
-                <a:spcPts val="0"/>
-              </a:spcAft>
               <a:buSzPts val="2100"/>
-              <a:buNone/>
             </a:pPr>
-            <a:endParaRPr dirty="0"/>
+            <a:r>
+              <a:rPr lang="en-US" dirty="0">
+                <a:solidFill>
+                  <a:srgbClr val="000000"/>
+                </a:solidFill>
+              </a:rPr>
+              <a:t>Convert ‘</a:t>
+            </a:r>
+            <a:r>
+              <a:rPr lang="en-US" dirty="0" err="1">
+                <a:solidFill>
+                  <a:srgbClr val="000000"/>
+                </a:solidFill>
+              </a:rPr>
+              <a:t>TotalCharges</a:t>
+            </a:r>
+            <a:r>
+              <a:rPr lang="en-US" dirty="0">
+                <a:solidFill>
+                  <a:srgbClr val="000000"/>
+                </a:solidFill>
+              </a:rPr>
+              <a:t>’ column to numeric type. </a:t>
+            </a:r>
+          </a:p>
+          <a:p>
+            <a:pPr marL="590550" indent="-457200">
+              <a:lnSpc>
+                <a:spcPct val="90000"/>
+              </a:lnSpc>
+              <a:spcBef>
+                <a:spcPts val="0"/>
+              </a:spcBef>
+              <a:buSzPts val="2100"/>
+            </a:pPr>
+            <a:r>
+              <a:rPr lang="en-US" dirty="0">
+                <a:solidFill>
+                  <a:srgbClr val="000000"/>
+                </a:solidFill>
+              </a:rPr>
+              <a:t>Handling missing values (drop 11 rows with null values)</a:t>
+            </a:r>
+          </a:p>
+          <a:p>
+            <a:pPr marL="590550" indent="-457200">
+              <a:lnSpc>
+                <a:spcPct val="90000"/>
+              </a:lnSpc>
+              <a:spcBef>
+                <a:spcPts val="0"/>
+              </a:spcBef>
+              <a:buSzPts val="2100"/>
+            </a:pPr>
+            <a:r>
+              <a:rPr lang="en-US" dirty="0">
+                <a:solidFill>
+                  <a:srgbClr val="000000"/>
+                </a:solidFill>
+              </a:rPr>
+              <a:t>Source: Kaggle</a:t>
+            </a:r>
+          </a:p>
+          <a:p>
+            <a:pPr marL="590550" indent="-457200">
+              <a:lnSpc>
+                <a:spcPct val="90000"/>
+              </a:lnSpc>
+              <a:spcBef>
+                <a:spcPts val="0"/>
+              </a:spcBef>
+              <a:buSzPts val="2100"/>
+            </a:pPr>
+            <a:r>
+              <a:rPr lang="en-US" dirty="0">
+                <a:solidFill>
+                  <a:srgbClr val="000000"/>
+                </a:solidFill>
+              </a:rPr>
+              <a:t>Encoding categorical variables (be more specific)</a:t>
+            </a:r>
           </a:p>
         </p:txBody>
       </p:sp>
       <p:sp>
         <p:nvSpPr>
-          <p:cNvPr id="110" name="Google Shape;110;p9"/>
-          <p:cNvSpPr txBox="1">
-            <a:spLocks noGrp="1"/>
-          </p:cNvSpPr>
-          <p:nvPr>
-            <p:ph type="body" idx="2"/>
-          </p:nvPr>
-        </p:nvSpPr>
-        <p:spPr>
-          <a:xfrm>
-            <a:off x="6172200" y="1828800"/>
-            <a:ext cx="5183188" cy="823912"/>
-          </a:xfrm>
-          <a:prstGeom prst="rect">
-            <a:avLst/>
-          </a:prstGeom>
-          <a:noFill/>
-          <a:ln>
-            <a:noFill/>
-          </a:ln>
-        </p:spPr>
-        <p:txBody>
-          <a:bodyPr spcFirstLastPara="1" wrap="square" lIns="91425" tIns="45700" rIns="91425" bIns="45700" anchor="t" anchorCtr="0">
-            <a:normAutofit/>
-          </a:bodyPr>
-          <a:lstStyle/>
-          <a:p>
-            <a:pPr marL="0" lvl="0" indent="0" algn="l" rtl="0">
-              <a:lnSpc>
-                <a:spcPct val="90000"/>
-              </a:lnSpc>
-              <a:spcBef>
-                <a:spcPts val="0"/>
-              </a:spcBef>
-              <a:spcAft>
-                <a:spcPts val="0"/>
-              </a:spcAft>
-              <a:buSzPts val="2100"/>
-              <a:buNone/>
-            </a:pPr>
-            <a:endParaRPr dirty="0"/>
-          </a:p>
-        </p:txBody>
-      </p:sp>
-      <p:sp>
-        <p:nvSpPr>
-          <p:cNvPr id="111" name="Google Shape;111;p9"/>
-          <p:cNvSpPr txBox="1">
-            <a:spLocks noGrp="1"/>
-          </p:cNvSpPr>
-          <p:nvPr>
-            <p:ph type="body" idx="3"/>
-          </p:nvPr>
-        </p:nvSpPr>
-        <p:spPr>
-          <a:xfrm>
-            <a:off x="839788" y="2771334"/>
-            <a:ext cx="5157787" cy="3200400"/>
-          </a:xfrm>
-          <a:prstGeom prst="rect">
-            <a:avLst/>
-          </a:prstGeom>
-          <a:noFill/>
-          <a:ln>
-            <a:noFill/>
-          </a:ln>
-        </p:spPr>
-        <p:txBody>
-          <a:bodyPr spcFirstLastPara="1" wrap="square" lIns="91425" tIns="45700" rIns="91425" bIns="45700" anchor="t" anchorCtr="0">
-            <a:normAutofit/>
-          </a:bodyPr>
-          <a:lstStyle/>
-          <a:p>
-            <a:pPr marL="228600" lvl="0" indent="-95250" algn="l" rtl="0">
-              <a:lnSpc>
-                <a:spcPct val="90000"/>
-              </a:lnSpc>
-              <a:spcBef>
-                <a:spcPts val="0"/>
-              </a:spcBef>
-              <a:spcAft>
-                <a:spcPts val="0"/>
-              </a:spcAft>
-              <a:buSzPts val="2100"/>
-              <a:buNone/>
-            </a:pPr>
-            <a:endParaRPr dirty="0"/>
-          </a:p>
-        </p:txBody>
-      </p:sp>
-      <p:sp>
-        <p:nvSpPr>
-          <p:cNvPr id="112" name="Google Shape;112;p9"/>
-          <p:cNvSpPr txBox="1">
-            <a:spLocks noGrp="1"/>
-          </p:cNvSpPr>
-          <p:nvPr>
-            <p:ph type="body" idx="4"/>
-          </p:nvPr>
-        </p:nvSpPr>
-        <p:spPr>
-          <a:xfrm>
-            <a:off x="839788" y="1828800"/>
-            <a:ext cx="5157787" cy="823912"/>
-          </a:xfrm>
-          <a:prstGeom prst="rect">
-            <a:avLst/>
-          </a:prstGeom>
-          <a:noFill/>
-          <a:ln>
-            <a:noFill/>
-          </a:ln>
-        </p:spPr>
-        <p:txBody>
-          <a:bodyPr spcFirstLastPara="1" wrap="square" lIns="91425" tIns="45700" rIns="91425" bIns="45700" anchor="t" anchorCtr="0">
-            <a:normAutofit/>
-          </a:bodyPr>
-          <a:lstStyle/>
-          <a:p>
-            <a:pPr marL="0" lvl="0" indent="0" algn="l" rtl="0">
-              <a:lnSpc>
-                <a:spcPct val="90000"/>
-              </a:lnSpc>
-              <a:spcBef>
-                <a:spcPts val="0"/>
-              </a:spcBef>
-              <a:spcAft>
-                <a:spcPts val="0"/>
-              </a:spcAft>
-              <a:buSzPts val="2100"/>
-              <a:buNone/>
-            </a:pPr>
-            <a:endParaRPr dirty="0"/>
-          </a:p>
-        </p:txBody>
-      </p:sp>
-      <p:sp>
-        <p:nvSpPr>
-          <p:cNvPr id="113" name="Google Shape;113;p9"/>
+          <p:cNvPr id="97" name="Google Shape;97;p7">
+            <a:extLst>
+              <a:ext uri="{FF2B5EF4-FFF2-40B4-BE49-F238E27FC236}">
+                <a16:creationId xmlns:a16="http://schemas.microsoft.com/office/drawing/2014/main" id="{13A6A0C3-4469-32D4-BAE4-B837717EE04A}"/>
+              </a:ext>
+            </a:extLst>
+          </p:cNvPr>
           <p:cNvSpPr txBox="1">
             <a:spLocks noGrp="1"/>
           </p:cNvSpPr>
@@ -20901,7 +21172,7 @@
         </p:nvSpPr>
         <p:spPr>
           <a:xfrm>
-            <a:off x="839788" y="0"/>
+            <a:off x="838200" y="0"/>
             <a:ext cx="10515600" cy="1371600"/>
           </a:xfrm>
           <a:prstGeom prst="rect">
@@ -20937,13 +21208,18 @@
             </a:pPr>
             <a:r>
               <a:rPr lang="en-US" dirty="0"/>
-              <a:t>2-Columns with Text Headings: Update the text in this title box to create a slide title</a:t>
+              <a:t>Dataset Preparation and Cleaning</a:t>
             </a:r>
             <a:endParaRPr dirty="0"/>
           </a:p>
         </p:txBody>
       </p:sp>
     </p:spTree>
+    <p:extLst>
+      <p:ext uri="{BB962C8B-B14F-4D97-AF65-F5344CB8AC3E}">
+        <p14:creationId xmlns:p14="http://schemas.microsoft.com/office/powerpoint/2010/main" val="2024343355"/>
+      </p:ext>
+    </p:extLst>
   </p:cSld>
   <p:clrMapOvr>
     <a:masterClrMapping/>
@@ -20956,7 +21232,13 @@
   <p:cSld>
     <p:spTree>
       <p:nvGrpSpPr>
-        <p:cNvPr id="1" name="Shape 122"/>
+        <p:cNvPr id="1" name="Shape 95">
+          <a:extLst>
+            <a:ext uri="{FF2B5EF4-FFF2-40B4-BE49-F238E27FC236}">
+              <a16:creationId xmlns:a16="http://schemas.microsoft.com/office/drawing/2014/main" id="{571C434B-C169-7AE7-6C92-DE7A9D63BD65}"/>
+            </a:ext>
+          </a:extLst>
+        </p:cNvPr>
         <p:cNvGrpSpPr/>
         <p:nvPr/>
       </p:nvGrpSpPr>
@@ -20970,7 +21252,13 @@
       </p:grpSpPr>
       <p:sp>
         <p:nvSpPr>
-          <p:cNvPr id="123" name="Google Shape;123;p11"/>
+          <p:cNvPr id="96" name="Google Shape;96;p7">
+            <a:extLst>
+              <a:ext uri="{FF2B5EF4-FFF2-40B4-BE49-F238E27FC236}">
+                <a16:creationId xmlns:a16="http://schemas.microsoft.com/office/drawing/2014/main" id="{F83B0704-1788-0BB9-DE51-9BC1518211D2}"/>
+              </a:ext>
+            </a:extLst>
+          </p:cNvPr>
           <p:cNvSpPr txBox="1">
             <a:spLocks noGrp="1"/>
           </p:cNvSpPr>
@@ -20980,8 +21268,8 @@
         </p:nvSpPr>
         <p:spPr>
           <a:xfrm>
-            <a:off x="5183188" y="1828800"/>
-            <a:ext cx="6172200" cy="4114800"/>
+            <a:off x="838200" y="1828800"/>
+            <a:ext cx="10515600" cy="4118524"/>
           </a:xfrm>
           <a:prstGeom prst="rect">
             <a:avLst/>
@@ -20997,72 +21285,35 @@
           </a:bodyPr>
           <a:lstStyle/>
           <a:p>
-            <a:pPr marL="228600" lvl="0" indent="-76200" algn="l" rtl="0">
+            <a:pPr marL="590550" indent="-457200">
               <a:lnSpc>
                 <a:spcPct val="90000"/>
               </a:lnSpc>
               <a:spcBef>
                 <a:spcPts val="0"/>
               </a:spcBef>
-              <a:spcAft>
-                <a:spcPts val="0"/>
-              </a:spcAft>
-              <a:buSzPts val="2400"/>
-              <a:buNone/>
+              <a:buSzPts val="2100"/>
             </a:pPr>
-            <a:endParaRPr dirty="0"/>
+            <a:r>
+              <a:rPr lang="en-US" dirty="0">
+                <a:solidFill>
+                  <a:srgbClr val="000000"/>
+                </a:solidFill>
+              </a:rPr>
+              <a:t>Describe the heatmap</a:t>
+            </a:r>
           </a:p>
         </p:txBody>
       </p:sp>
       <p:sp>
         <p:nvSpPr>
-          <p:cNvPr id="124" name="Google Shape;124;p11"/>
-          <p:cNvSpPr txBox="1">
-            <a:spLocks noGrp="1"/>
-          </p:cNvSpPr>
-          <p:nvPr>
-            <p:ph type="body" idx="2"/>
-          </p:nvPr>
-        </p:nvSpPr>
-        <p:spPr>
-          <a:xfrm>
-            <a:off x="839788" y="1828800"/>
-            <a:ext cx="3932237" cy="4114800"/>
-          </a:xfrm>
-          <a:prstGeom prst="rect">
-            <a:avLst/>
-          </a:prstGeom>
-          <a:noFill/>
-          <a:ln>
-            <a:noFill/>
-          </a:ln>
-        </p:spPr>
-        <p:txBody>
-          <a:bodyPr spcFirstLastPara="1" wrap="square" lIns="91425" tIns="45700" rIns="91425" bIns="45700" anchor="t" anchorCtr="0">
-            <a:normAutofit/>
-          </a:bodyPr>
-          <a:lstStyle/>
-          <a:p>
-            <a:pPr marL="0" lvl="0" indent="0" algn="l" rtl="0">
-              <a:lnSpc>
-                <a:spcPct val="90000"/>
-              </a:lnSpc>
-              <a:spcBef>
-                <a:spcPts val="0"/>
-              </a:spcBef>
-              <a:spcAft>
-                <a:spcPts val="0"/>
-              </a:spcAft>
-              <a:buSzPts val="1200"/>
-              <a:buNone/>
-            </a:pPr>
-            <a:endParaRPr dirty="0"/>
-          </a:p>
-        </p:txBody>
-      </p:sp>
-      <p:sp>
-        <p:nvSpPr>
-          <p:cNvPr id="125" name="Google Shape;125;p11"/>
+          <p:cNvPr id="97" name="Google Shape;97;p7">
+            <a:extLst>
+              <a:ext uri="{FF2B5EF4-FFF2-40B4-BE49-F238E27FC236}">
+                <a16:creationId xmlns:a16="http://schemas.microsoft.com/office/drawing/2014/main" id="{43020209-81C1-A326-AF7A-E4F040CBAB8D}"/>
+              </a:ext>
+            </a:extLst>
+          </p:cNvPr>
           <p:cNvSpPr txBox="1">
             <a:spLocks noGrp="1"/>
           </p:cNvSpPr>
@@ -21072,7 +21323,7 @@
         </p:nvSpPr>
         <p:spPr>
           <a:xfrm>
-            <a:off x="836612" y="0"/>
+            <a:off x="838200" y="0"/>
             <a:ext cx="10515600" cy="1371600"/>
           </a:xfrm>
           <a:prstGeom prst="rect">
@@ -21108,13 +21359,18 @@
             </a:pPr>
             <a:r>
               <a:rPr lang="en-US" dirty="0"/>
-              <a:t>2 Text Columns, Different Font Size: Update the text in this title box to create a slide title</a:t>
+              <a:t>Dataset Visualization</a:t>
             </a:r>
             <a:endParaRPr dirty="0"/>
           </a:p>
         </p:txBody>
       </p:sp>
     </p:spTree>
+    <p:extLst>
+      <p:ext uri="{BB962C8B-B14F-4D97-AF65-F5344CB8AC3E}">
+        <p14:creationId xmlns:p14="http://schemas.microsoft.com/office/powerpoint/2010/main" val="3279804841"/>
+      </p:ext>
+    </p:extLst>
   </p:cSld>
   <p:clrMapOvr>
     <a:masterClrMapping/>
@@ -21127,7 +21383,13 @@
   <p:cSld>
     <p:spTree>
       <p:nvGrpSpPr>
-        <p:cNvPr id="1" name="Shape 129"/>
+        <p:cNvPr id="1" name="Shape 95">
+          <a:extLst>
+            <a:ext uri="{FF2B5EF4-FFF2-40B4-BE49-F238E27FC236}">
+              <a16:creationId xmlns:a16="http://schemas.microsoft.com/office/drawing/2014/main" id="{4E46CF19-62A2-AEC3-FE7F-6D34443D002B}"/>
+            </a:ext>
+          </a:extLst>
+        </p:cNvPr>
         <p:cNvGrpSpPr/>
         <p:nvPr/>
       </p:nvGrpSpPr>
@@ -21141,49 +21403,13 @@
       </p:grpSpPr>
       <p:sp>
         <p:nvSpPr>
-          <p:cNvPr id="130" name="Google Shape;130;p12" descr="Blank graphics box."/>
-          <p:cNvSpPr>
-            <a:spLocks noGrp="1"/>
-          </p:cNvSpPr>
-          <p:nvPr>
-            <p:ph type="pic" idx="2"/>
-          </p:nvPr>
-        </p:nvSpPr>
-        <p:spPr>
-          <a:xfrm>
-            <a:off x="5225392" y="1747800"/>
-            <a:ext cx="6128408" cy="4188766"/>
-          </a:xfrm>
-          <a:prstGeom prst="rect">
-            <a:avLst/>
-          </a:prstGeom>
-          <a:noFill/>
-          <a:ln>
-            <a:noFill/>
-          </a:ln>
-        </p:spPr>
-        <p:txBody>
-          <a:bodyPr spcFirstLastPara="1" wrap="square" lIns="91425" tIns="45700" rIns="91425" bIns="45700" anchor="t" anchorCtr="0">
-            <a:noAutofit/>
-          </a:bodyPr>
-          <a:lstStyle/>
-          <a:p>
-            <a:pPr marL="0" lvl="0" indent="0" algn="l" rtl="0">
-              <a:spcBef>
-                <a:spcPts val="1000"/>
-              </a:spcBef>
-              <a:spcAft>
-                <a:spcPts val="0"/>
-              </a:spcAft>
-              <a:buNone/>
-            </a:pPr>
-            <a:endParaRPr dirty="0"/>
-          </a:p>
-        </p:txBody>
-      </p:sp>
-      <p:sp>
-        <p:nvSpPr>
-          <p:cNvPr id="131" name="Google Shape;131;p12"/>
+          <p:cNvPr id="96" name="Google Shape;96;p7">
+            <a:extLst>
+              <a:ext uri="{FF2B5EF4-FFF2-40B4-BE49-F238E27FC236}">
+                <a16:creationId xmlns:a16="http://schemas.microsoft.com/office/drawing/2014/main" id="{95D219DD-FBDE-66E7-ECE8-FB875C16BB16}"/>
+              </a:ext>
+            </a:extLst>
+          </p:cNvPr>
           <p:cNvSpPr txBox="1">
             <a:spLocks noGrp="1"/>
           </p:cNvSpPr>
@@ -21193,8 +21419,8 @@
         </p:nvSpPr>
         <p:spPr>
           <a:xfrm>
-            <a:off x="838200" y="1737249"/>
-            <a:ext cx="3932237" cy="4201815"/>
+            <a:off x="838200" y="1828800"/>
+            <a:ext cx="10515600" cy="4118524"/>
           </a:xfrm>
           <a:prstGeom prst="rect">
             <a:avLst/>
@@ -21210,26 +21436,54 @@
           </a:bodyPr>
           <a:lstStyle/>
           <a:p>
-            <a:pPr marL="0" lvl="0" indent="0" algn="l" rtl="0">
+            <a:pPr marL="590550" indent="-457200">
               <a:lnSpc>
                 <a:spcPct val="90000"/>
               </a:lnSpc>
               <a:spcBef>
                 <a:spcPts val="0"/>
               </a:spcBef>
-              <a:spcAft>
-                <a:spcPts val="0"/>
-              </a:spcAft>
-              <a:buSzPts val="1200"/>
-              <a:buNone/>
+              <a:buSzPts val="2100"/>
             </a:pPr>
-            <a:endParaRPr dirty="0"/>
+            <a:r>
+              <a:rPr lang="en-US" dirty="0">
+                <a:solidFill>
+                  <a:srgbClr val="000000"/>
+                </a:solidFill>
+              </a:rPr>
+              <a:t>What VIF tells us</a:t>
+            </a:r>
+          </a:p>
+          <a:p>
+            <a:pPr marL="590550" indent="-457200">
+              <a:lnSpc>
+                <a:spcPct val="90000"/>
+              </a:lnSpc>
+              <a:spcBef>
+                <a:spcPts val="0"/>
+              </a:spcBef>
+              <a:buSzPts val="2100"/>
+            </a:pPr>
+            <a:r>
+              <a:rPr lang="en-US" dirty="0">
+                <a:solidFill>
+                  <a:srgbClr val="000000"/>
+                </a:solidFill>
+              </a:rPr>
+              <a:t>Why we use tree-based model based on VIF</a:t>
+            </a:r>
           </a:p>
         </p:txBody>
       </p:sp>
       <p:sp>
         <p:nvSpPr>
-          <p:cNvPr id="132" name="Google Shape;132;p12"/>
+          <p:cNvPr id="97" name="Google Shape;97;p7">
+            <a:extLst>
+              <a:ext uri="{FF2B5EF4-FFF2-40B4-BE49-F238E27FC236}">
+                <a16:creationId xmlns:a16="http://schemas.microsoft.com/office/drawing/2014/main" id="{FA2C7981-F6F6-65C8-FF62-D2C559BD6F67}"/>
+              </a:ext>
+            </a:extLst>
+          </p:cNvPr>
           <p:cNvSpPr txBox="1">
             <a:spLocks noGrp="1"/>
           </p:cNvSpPr>
@@ -21239,7 +21493,7 @@
         </p:nvSpPr>
         <p:spPr>
           <a:xfrm>
-            <a:off x="839788" y="0"/>
+            <a:off x="838200" y="0"/>
             <a:ext cx="10515600" cy="1371600"/>
           </a:xfrm>
           <a:prstGeom prst="rect">
@@ -21275,13 +21529,18 @@
             </a:pPr>
             <a:r>
               <a:rPr lang="en-US" dirty="0"/>
-              <a:t>Update the text in this title box to create a slide title</a:t>
+              <a:t>Multicollinearity Analysis (VIF)</a:t>
             </a:r>
             <a:endParaRPr dirty="0"/>
           </a:p>
         </p:txBody>
       </p:sp>
     </p:spTree>
+    <p:extLst>
+      <p:ext uri="{BB962C8B-B14F-4D97-AF65-F5344CB8AC3E}">
+        <p14:creationId xmlns:p14="http://schemas.microsoft.com/office/powerpoint/2010/main" val="2834202988"/>
+      </p:ext>
+    </p:extLst>
   </p:cSld>
   <p:clrMapOvr>
     <a:masterClrMapping/>
@@ -21852,6 +22111,15 @@
 </file>
 
 <file path=customXml/item1.xml><?xml version="1.0" encoding="utf-8"?>
+<?mso-contentType ?>
+<FormTemplates xmlns="http://schemas.microsoft.com/sharepoint/v3/contenttype/forms">
+  <Display>DocumentLibraryForm</Display>
+  <Edit>DocumentLibraryForm</Edit>
+  <New>DocumentLibraryForm</New>
+</FormTemplates>
+</file>
+
+<file path=customXml/item2.xml><?xml version="1.0" encoding="utf-8"?>
 <p:properties xmlns:p="http://schemas.microsoft.com/office/2006/metadata/properties" xmlns:xsi="http://www.w3.org/2001/XMLSchema-instance" xmlns:pc="http://schemas.microsoft.com/office/infopath/2007/PartnerControls">
   <documentManagement>
     <TaxCatchAll xmlns="ea035b0b-d4a4-4160-ae0a-32d2cf7a840d" xsi:nil="true"/>
@@ -21860,15 +22128,6 @@
     </lcf76f155ced4ddcb4097134ff3c332f>
   </documentManagement>
 </p:properties>
-</file>
-
-<file path=customXml/item2.xml><?xml version="1.0" encoding="utf-8"?>
-<?mso-contentType ?>
-<FormTemplates xmlns="http://schemas.microsoft.com/sharepoint/v3/contenttype/forms">
-  <Display>DocumentLibraryForm</Display>
-  <Edit>DocumentLibraryForm</Edit>
-  <New>DocumentLibraryForm</New>
-</FormTemplates>
 </file>
 
 <file path=customXml/item3.xml><?xml version="1.0" encoding="utf-8"?>
@@ -22115,6 +22374,14 @@
 </file>
 
 <file path=customXml/itemProps1.xml><?xml version="1.0" encoding="utf-8"?>
+<ds:datastoreItem xmlns:ds="http://schemas.openxmlformats.org/officeDocument/2006/customXml" ds:itemID="{320A64D7-DC07-49E6-8411-E59672CE7BB8}">
+  <ds:schemaRefs>
+    <ds:schemaRef ds:uri="http://schemas.microsoft.com/sharepoint/v3/contenttype/forms"/>
+  </ds:schemaRefs>
+</ds:datastoreItem>
+</file>
+
+<file path=customXml/itemProps2.xml><?xml version="1.0" encoding="utf-8"?>
 <ds:datastoreItem xmlns:ds="http://schemas.openxmlformats.org/officeDocument/2006/customXml" ds:itemID="{EBBB1ECE-AFD7-4208-A965-E8724EC834DC}">
   <ds:schemaRefs>
     <ds:schemaRef ds:uri="http://purl.org/dc/dcmitype/"/>
@@ -22127,14 +22394,6 @@
     <ds:schemaRef ds:uri="ea035b0b-d4a4-4160-ae0a-32d2cf7a840d"/>
     <ds:schemaRef ds:uri="http://schemas.openxmlformats.org/package/2006/metadata/core-properties"/>
     <ds:schemaRef ds:uri="http://www.w3.org/XML/1998/namespace"/>
-  </ds:schemaRefs>
-</ds:datastoreItem>
-</file>
-
-<file path=customXml/itemProps2.xml><?xml version="1.0" encoding="utf-8"?>
-<ds:datastoreItem xmlns:ds="http://schemas.openxmlformats.org/officeDocument/2006/customXml" ds:itemID="{320A64D7-DC07-49E6-8411-E59672CE7BB8}">
-  <ds:schemaRefs>
-    <ds:schemaRef ds:uri="http://schemas.microsoft.com/sharepoint/v3/contenttype/forms"/>
   </ds:schemaRefs>
 </ds:datastoreItem>
 </file>

--- a/slides/AIT736_Final_Project_AnHuynh.pptx
+++ b/slides/AIT736_Final_Project_AnHuynh.pptx
@@ -264,7 +264,7 @@
       <p15:sldGuideLst xmlns:p15="http://schemas.microsoft.com/office/powerpoint/2012/main"/>
     </p:ext>
     <p:ext uri="http://customooxmlschemas.google.com/">
-      <go:slidesCustomData xmlns="" xmlns:mc="http://schemas.openxmlformats.org/markup-compatibility/2006" xmlns:mv="urn:schemas-microsoft-com:mac:vml" xmlns:c="http://schemas.openxmlformats.org/drawingml/2006/chart" xmlns:dgm="http://schemas.openxmlformats.org/drawingml/2006/diagram" xmlns:o="urn:schemas-microsoft-com:office:office" xmlns:v="urn:schemas-microsoft-com:vml" xmlns:pvml="urn:schemas-microsoft-com:office:powerpoint" xmlns:com="http://schemas.openxmlformats.org/drawingml/2006/compatibility" xmlns:p14="http://schemas.microsoft.com/office/powerpoint/2010/main" xmlns:p15="http://schemas.microsoft.com/office/powerpoint/2012/main" xmlns:go="http://customooxmlschemas.google.com/" r:id="rId28" roundtripDataSignature="AMtx7mjoA08xUQFmVkTcOpqRfxDqbGkKow=="/>
+      <go:slidesCustomData xmlns:go="http://customooxmlschemas.google.com/" xmlns:p15="http://schemas.microsoft.com/office/powerpoint/2012/main" xmlns:p14="http://schemas.microsoft.com/office/powerpoint/2010/main" xmlns:com="http://schemas.openxmlformats.org/drawingml/2006/compatibility" xmlns:pvml="urn:schemas-microsoft-com:office:powerpoint" xmlns:v="urn:schemas-microsoft-com:vml" xmlns:o="urn:schemas-microsoft-com:office:office" xmlns:dgm="http://schemas.openxmlformats.org/drawingml/2006/diagram" xmlns:c="http://schemas.openxmlformats.org/drawingml/2006/chart" xmlns:mv="urn:schemas-microsoft-com:mac:vml" xmlns:mc="http://schemas.openxmlformats.org/markup-compatibility/2006" xmlns="" r:id="rId28" roundtripDataSignature="AMtx7mjoA08xUQFmVkTcOpqRfxDqbGkKow=="/>
     </p:ext>
   </p:extLst>
 </p:presentation>
@@ -17171,6 +17171,15 @@
 </file>
 
 <file path=customXml/item1.xml><?xml version="1.0" encoding="utf-8"?>
+<?mso-contentType ?>
+<FormTemplates xmlns="http://schemas.microsoft.com/sharepoint/v3/contenttype/forms">
+  <Display>DocumentLibraryForm</Display>
+  <Edit>DocumentLibraryForm</Edit>
+  <New>DocumentLibraryForm</New>
+</FormTemplates>
+</file>
+
+<file path=customXml/item2.xml><?xml version="1.0" encoding="utf-8"?>
 <ct:contentTypeSchema xmlns:ct="http://schemas.microsoft.com/office/2006/metadata/contentType" xmlns:ma="http://schemas.microsoft.com/office/2006/metadata/properties/metaAttributes" ct:_="" ma:_="" ma:contentTypeName="Document" ma:contentTypeID="0x010100DCA45C30C308A341BFDAB65976ABB442" ma:contentTypeVersion="17" ma:contentTypeDescription="Create a new document." ma:contentTypeScope="" ma:versionID="eeee7edb6e606ca9c644af75759c4062">
   <xsd:schema xmlns:xsd="http://www.w3.org/2001/XMLSchema" xmlns:xs="http://www.w3.org/2001/XMLSchema" xmlns:p="http://schemas.microsoft.com/office/2006/metadata/properties" xmlns:ns2="7d35bc41-1145-4875-8ed8-4b6586f43481" xmlns:ns3="ea035b0b-d4a4-4160-ae0a-32d2cf7a840d" targetNamespace="http://schemas.microsoft.com/office/2006/metadata/properties" ma:root="true" ma:fieldsID="608f77e83057bc2d9176dc756be9e826" ns2:_="" ns3:_="">
     <xsd:import namespace="7d35bc41-1145-4875-8ed8-4b6586f43481"/>
@@ -17413,15 +17422,6 @@
 </ct:contentTypeSchema>
 </file>
 
-<file path=customXml/item2.xml><?xml version="1.0" encoding="utf-8"?>
-<?mso-contentType ?>
-<FormTemplates xmlns="http://schemas.microsoft.com/sharepoint/v3/contenttype/forms">
-  <Display>DocumentLibraryForm</Display>
-  <Edit>DocumentLibraryForm</Edit>
-  <New>DocumentLibraryForm</New>
-</FormTemplates>
-</file>
-
 <file path=customXml/item3.xml><?xml version="1.0" encoding="utf-8"?>
 <p:properties xmlns:p="http://schemas.microsoft.com/office/2006/metadata/properties" xmlns:xsi="http://www.w3.org/2001/XMLSchema-instance" xmlns:pc="http://schemas.microsoft.com/office/infopath/2007/PartnerControls">
   <documentManagement>
@@ -17434,6 +17434,14 @@
 </file>
 
 <file path=customXml/itemProps1.xml><?xml version="1.0" encoding="utf-8"?>
+<ds:datastoreItem xmlns:ds="http://schemas.openxmlformats.org/officeDocument/2006/customXml" ds:itemID="{320A64D7-DC07-49E6-8411-E59672CE7BB8}">
+  <ds:schemaRefs>
+    <ds:schemaRef ds:uri="http://schemas.microsoft.com/sharepoint/v3/contenttype/forms"/>
+  </ds:schemaRefs>
+</ds:datastoreItem>
+</file>
+
+<file path=customXml/itemProps2.xml><?xml version="1.0" encoding="utf-8"?>
 <ds:datastoreItem xmlns:ds="http://schemas.openxmlformats.org/officeDocument/2006/customXml" ds:itemID="{8076C0E0-66E3-4F9F-9D1B-306142ACFFD9}">
   <ds:schemaRefs>
     <ds:schemaRef ds:uri="http://schemas.microsoft.com/office/2006/metadata/contentType"/>
@@ -17448,14 +17456,6 @@
     <ds:schemaRef ds:uri="http://purl.org/dc/elements/1.1/"/>
     <ds:schemaRef ds:uri="http://purl.org/dc/terms/"/>
     <ds:schemaRef ds:uri="http://schemas.microsoft.com/internal/obd"/>
-  </ds:schemaRefs>
-</ds:datastoreItem>
-</file>
-
-<file path=customXml/itemProps2.xml><?xml version="1.0" encoding="utf-8"?>
-<ds:datastoreItem xmlns:ds="http://schemas.openxmlformats.org/officeDocument/2006/customXml" ds:itemID="{320A64D7-DC07-49E6-8411-E59672CE7BB8}">
-  <ds:schemaRefs>
-    <ds:schemaRef ds:uri="http://schemas.microsoft.com/sharepoint/v3/contenttype/forms"/>
   </ds:schemaRefs>
 </ds:datastoreItem>
 </file>
